--- a/others/Literature Review_ Post-Disaster Rescue Guidance.pptx
+++ b/others/Literature Review_ Post-Disaster Rescue Guidance.pptx
@@ -28,41 +28,42 @@
     <p:sldId id="273" r:id="rId23"/>
     <p:sldId id="274" r:id="rId24"/>
     <p:sldId id="275" r:id="rId25"/>
+    <p:sldId id="276" r:id="rId26"/>
   </p:sldIdLst>
   <p:sldSz cy="6858000" cx="12192000"/>
   <p:notesSz cx="6858000" cy="9144000"/>
   <p:embeddedFontLst>
     <p:embeddedFont>
       <p:font typeface="Spline Sans"/>
-      <p:bold r:id="rId26"/>
+      <p:bold r:id="rId27"/>
     </p:embeddedFont>
     <p:embeddedFont>
       <p:font typeface="Urbanist SemiBold"/>
-      <p:regular r:id="rId27"/>
-      <p:bold r:id="rId28"/>
-      <p:italic r:id="rId29"/>
-      <p:boldItalic r:id="rId30"/>
+      <p:regular r:id="rId28"/>
+      <p:bold r:id="rId29"/>
+      <p:italic r:id="rId30"/>
+      <p:boldItalic r:id="rId31"/>
     </p:embeddedFont>
     <p:embeddedFont>
       <p:font typeface="Urbanist Medium"/>
-      <p:regular r:id="rId31"/>
-      <p:bold r:id="rId32"/>
-      <p:italic r:id="rId33"/>
-      <p:boldItalic r:id="rId34"/>
+      <p:regular r:id="rId32"/>
+      <p:bold r:id="rId33"/>
+      <p:italic r:id="rId34"/>
+      <p:boldItalic r:id="rId35"/>
     </p:embeddedFont>
     <p:embeddedFont>
       <p:font typeface="Urbanist"/>
-      <p:regular r:id="rId35"/>
-      <p:bold r:id="rId36"/>
-      <p:italic r:id="rId37"/>
-      <p:boldItalic r:id="rId38"/>
+      <p:regular r:id="rId36"/>
+      <p:bold r:id="rId37"/>
+      <p:italic r:id="rId38"/>
+      <p:boldItalic r:id="rId39"/>
     </p:embeddedFont>
     <p:embeddedFont>
       <p:font typeface="Barlow"/>
-      <p:regular r:id="rId39"/>
-      <p:bold r:id="rId40"/>
-      <p:italic r:id="rId41"/>
-      <p:boldItalic r:id="rId42"/>
+      <p:regular r:id="rId40"/>
+      <p:bold r:id="rId41"/>
+      <p:italic r:id="rId42"/>
+      <p:boldItalic r:id="rId43"/>
     </p:embeddedFont>
   </p:embeddedFontLst>
   <p:defaultTextStyle>
@@ -1352,46 +1353,7 @@
       </p:grpSpPr>
       <p:sp>
         <p:nvSpPr>
-          <p:cNvPr id="319" name="Google Shape;319;p13:notes"/>
-          <p:cNvSpPr txBox="1"/>
-          <p:nvPr>
-            <p:ph idx="1" type="body"/>
-          </p:nvPr>
-        </p:nvSpPr>
-        <p:spPr>
-          <a:xfrm>
-            <a:off x="685800" y="4343400"/>
-            <a:ext cx="5486400" cy="4114800"/>
-          </a:xfrm>
-          <a:prstGeom prst="rect">
-            <a:avLst/>
-          </a:prstGeom>
-        </p:spPr>
-        <p:txBody>
-          <a:bodyPr anchorCtr="0" anchor="t" bIns="91425" lIns="91425" spcFirstLastPara="1" rIns="91425" wrap="square" tIns="91425">
-            <a:noAutofit/>
-          </a:bodyPr>
-          <a:lstStyle/>
-          <a:p>
-            <a:pPr indent="0" lvl="0" marL="0" rtl="0" algn="l">
-              <a:spcBef>
-                <a:spcPts val="0"/>
-              </a:spcBef>
-              <a:spcAft>
-                <a:spcPts val="0"/>
-              </a:spcAft>
-              <a:buNone/>
-            </a:pPr>
-            <a:r>
-              <a:t/>
-            </a:r>
-            <a:endParaRPr/>
-          </a:p>
-        </p:txBody>
-      </p:sp>
-      <p:sp>
-        <p:nvSpPr>
-          <p:cNvPr id="320" name="Google Shape;320;p13:notes"/>
+          <p:cNvPr id="319" name="Google Shape;319;g3f37856b383_1_0:notes"/>
           <p:cNvSpPr/>
           <p:nvPr>
             <p:ph idx="2" type="sldImg"/>
@@ -1400,7 +1362,7 @@
         <p:spPr>
           <a:xfrm>
             <a:off x="1143225" y="685800"/>
-            <a:ext cx="4572225" cy="3429000"/>
+            <a:ext cx="4572300" cy="3429000"/>
           </a:xfrm>
           <a:custGeom>
             <a:rect b="b" l="l" r="r" t="t"/>
@@ -1424,6 +1386,45 @@
           </a:custGeom>
         </p:spPr>
       </p:sp>
+      <p:sp>
+        <p:nvSpPr>
+          <p:cNvPr id="320" name="Google Shape;320;g3f37856b383_1_0:notes"/>
+          <p:cNvSpPr txBox="1"/>
+          <p:nvPr>
+            <p:ph idx="1" type="body"/>
+          </p:nvPr>
+        </p:nvSpPr>
+        <p:spPr>
+          <a:xfrm>
+            <a:off x="685800" y="4343400"/>
+            <a:ext cx="5486400" cy="4114800"/>
+          </a:xfrm>
+          <a:prstGeom prst="rect">
+            <a:avLst/>
+          </a:prstGeom>
+        </p:spPr>
+        <p:txBody>
+          <a:bodyPr anchorCtr="0" anchor="t" bIns="91425" lIns="91425" spcFirstLastPara="1" rIns="91425" wrap="square" tIns="91425">
+            <a:noAutofit/>
+          </a:bodyPr>
+          <a:lstStyle/>
+          <a:p>
+            <a:pPr indent="0" lvl="0" marL="0" rtl="0" algn="l">
+              <a:spcBef>
+                <a:spcPts val="0"/>
+              </a:spcBef>
+              <a:spcAft>
+                <a:spcPts val="0"/>
+              </a:spcAft>
+              <a:buNone/>
+            </a:pPr>
+            <a:r>
+              <a:t/>
+            </a:r>
+            <a:endParaRPr/>
+          </a:p>
+        </p:txBody>
+      </p:sp>
     </p:spTree>
   </p:cSld>
   <p:clrMapOvr>
@@ -1437,7 +1438,7 @@
   <p:cSld>
     <p:spTree>
       <p:nvGrpSpPr>
-        <p:cNvPr id="334" name="Shape 334"/>
+        <p:cNvPr id="328" name="Shape 328"/>
         <p:cNvGrpSpPr/>
         <p:nvPr/>
       </p:nvGrpSpPr>
@@ -1451,7 +1452,7 @@
       </p:grpSpPr>
       <p:sp>
         <p:nvSpPr>
-          <p:cNvPr id="335" name="Google Shape;335;p14:notes"/>
+          <p:cNvPr id="329" name="Google Shape;329;p13:notes"/>
           <p:cNvSpPr txBox="1"/>
           <p:nvPr>
             <p:ph idx="1" type="body"/>
@@ -1490,7 +1491,7 @@
       </p:sp>
       <p:sp>
         <p:nvSpPr>
-          <p:cNvPr id="336" name="Google Shape;336;p14:notes"/>
+          <p:cNvPr id="330" name="Google Shape;330;p13:notes"/>
           <p:cNvSpPr/>
           <p:nvPr>
             <p:ph idx="2" type="sldImg"/>
@@ -1536,7 +1537,7 @@
   <p:cSld>
     <p:spTree>
       <p:nvGrpSpPr>
-        <p:cNvPr id="350" name="Shape 350"/>
+        <p:cNvPr id="341" name="Shape 341"/>
         <p:cNvGrpSpPr/>
         <p:nvPr/>
       </p:nvGrpSpPr>
@@ -1550,7 +1551,46 @@
       </p:grpSpPr>
       <p:sp>
         <p:nvSpPr>
-          <p:cNvPr id="351" name="Google Shape;351;g3f7bae3a9fa_18_16:notes"/>
+          <p:cNvPr id="342" name="Google Shape;342;p14:notes"/>
+          <p:cNvSpPr txBox="1"/>
+          <p:nvPr>
+            <p:ph idx="1" type="body"/>
+          </p:nvPr>
+        </p:nvSpPr>
+        <p:spPr>
+          <a:xfrm>
+            <a:off x="685800" y="4343400"/>
+            <a:ext cx="5486400" cy="4114800"/>
+          </a:xfrm>
+          <a:prstGeom prst="rect">
+            <a:avLst/>
+          </a:prstGeom>
+        </p:spPr>
+        <p:txBody>
+          <a:bodyPr anchorCtr="0" anchor="t" bIns="91425" lIns="91425" spcFirstLastPara="1" rIns="91425" wrap="square" tIns="91425">
+            <a:noAutofit/>
+          </a:bodyPr>
+          <a:lstStyle/>
+          <a:p>
+            <a:pPr indent="0" lvl="0" marL="0" rtl="0" algn="l">
+              <a:spcBef>
+                <a:spcPts val="0"/>
+              </a:spcBef>
+              <a:spcAft>
+                <a:spcPts val="0"/>
+              </a:spcAft>
+              <a:buNone/>
+            </a:pPr>
+            <a:r>
+              <a:t/>
+            </a:r>
+            <a:endParaRPr/>
+          </a:p>
+        </p:txBody>
+      </p:sp>
+      <p:sp>
+        <p:nvSpPr>
+          <p:cNvPr id="343" name="Google Shape;343;p14:notes"/>
           <p:cNvSpPr/>
           <p:nvPr>
             <p:ph idx="2" type="sldImg"/>
@@ -1559,7 +1599,7 @@
         <p:spPr>
           <a:xfrm>
             <a:off x="1143225" y="685800"/>
-            <a:ext cx="4572300" cy="3429000"/>
+            <a:ext cx="4572225" cy="3429000"/>
           </a:xfrm>
           <a:custGeom>
             <a:rect b="b" l="l" r="r" t="t"/>
@@ -1583,45 +1623,6 @@
           </a:custGeom>
         </p:spPr>
       </p:sp>
-      <p:sp>
-        <p:nvSpPr>
-          <p:cNvPr id="352" name="Google Shape;352;g3f7bae3a9fa_18_16:notes"/>
-          <p:cNvSpPr txBox="1"/>
-          <p:nvPr>
-            <p:ph idx="1" type="body"/>
-          </p:nvPr>
-        </p:nvSpPr>
-        <p:spPr>
-          <a:xfrm>
-            <a:off x="685800" y="4343400"/>
-            <a:ext cx="5486400" cy="4114800"/>
-          </a:xfrm>
-          <a:prstGeom prst="rect">
-            <a:avLst/>
-          </a:prstGeom>
-        </p:spPr>
-        <p:txBody>
-          <a:bodyPr anchorCtr="0" anchor="t" bIns="91425" lIns="91425" spcFirstLastPara="1" rIns="91425" wrap="square" tIns="91425">
-            <a:noAutofit/>
-          </a:bodyPr>
-          <a:lstStyle/>
-          <a:p>
-            <a:pPr indent="0" lvl="0" marL="0" rtl="0" algn="l">
-              <a:spcBef>
-                <a:spcPts val="0"/>
-              </a:spcBef>
-              <a:spcAft>
-                <a:spcPts val="0"/>
-              </a:spcAft>
-              <a:buNone/>
-            </a:pPr>
-            <a:r>
-              <a:t/>
-            </a:r>
-            <a:endParaRPr/>
-          </a:p>
-        </p:txBody>
-      </p:sp>
     </p:spTree>
   </p:cSld>
   <p:clrMapOvr>
@@ -1635,7 +1636,7 @@
   <p:cSld>
     <p:spTree>
       <p:nvGrpSpPr>
-        <p:cNvPr id="357" name="Shape 357"/>
+        <p:cNvPr id="354" name="Shape 354"/>
         <p:cNvGrpSpPr/>
         <p:nvPr/>
       </p:nvGrpSpPr>
@@ -1649,46 +1650,7 @@
       </p:grpSpPr>
       <p:sp>
         <p:nvSpPr>
-          <p:cNvPr id="358" name="Google Shape;358;p15:notes"/>
-          <p:cNvSpPr txBox="1"/>
-          <p:nvPr>
-            <p:ph idx="1" type="body"/>
-          </p:nvPr>
-        </p:nvSpPr>
-        <p:spPr>
-          <a:xfrm>
-            <a:off x="685800" y="4343400"/>
-            <a:ext cx="5486400" cy="4114800"/>
-          </a:xfrm>
-          <a:prstGeom prst="rect">
-            <a:avLst/>
-          </a:prstGeom>
-        </p:spPr>
-        <p:txBody>
-          <a:bodyPr anchorCtr="0" anchor="t" bIns="91425" lIns="91425" spcFirstLastPara="1" rIns="91425" wrap="square" tIns="91425">
-            <a:noAutofit/>
-          </a:bodyPr>
-          <a:lstStyle/>
-          <a:p>
-            <a:pPr indent="0" lvl="0" marL="0" rtl="0" algn="l">
-              <a:spcBef>
-                <a:spcPts val="0"/>
-              </a:spcBef>
-              <a:spcAft>
-                <a:spcPts val="0"/>
-              </a:spcAft>
-              <a:buNone/>
-            </a:pPr>
-            <a:r>
-              <a:t/>
-            </a:r>
-            <a:endParaRPr/>
-          </a:p>
-        </p:txBody>
-      </p:sp>
-      <p:sp>
-        <p:nvSpPr>
-          <p:cNvPr id="359" name="Google Shape;359;p15:notes"/>
+          <p:cNvPr id="355" name="Google Shape;355;g3f7bae3a9fa_18_16:notes"/>
           <p:cNvSpPr/>
           <p:nvPr>
             <p:ph idx="2" type="sldImg"/>
@@ -1697,7 +1659,7 @@
         <p:spPr>
           <a:xfrm>
             <a:off x="1143225" y="685800"/>
-            <a:ext cx="4572225" cy="3429000"/>
+            <a:ext cx="4572300" cy="3429000"/>
           </a:xfrm>
           <a:custGeom>
             <a:rect b="b" l="l" r="r" t="t"/>
@@ -1721,6 +1683,45 @@
           </a:custGeom>
         </p:spPr>
       </p:sp>
+      <p:sp>
+        <p:nvSpPr>
+          <p:cNvPr id="356" name="Google Shape;356;g3f7bae3a9fa_18_16:notes"/>
+          <p:cNvSpPr txBox="1"/>
+          <p:nvPr>
+            <p:ph idx="1" type="body"/>
+          </p:nvPr>
+        </p:nvSpPr>
+        <p:spPr>
+          <a:xfrm>
+            <a:off x="685800" y="4343400"/>
+            <a:ext cx="5486400" cy="4114800"/>
+          </a:xfrm>
+          <a:prstGeom prst="rect">
+            <a:avLst/>
+          </a:prstGeom>
+        </p:spPr>
+        <p:txBody>
+          <a:bodyPr anchorCtr="0" anchor="t" bIns="91425" lIns="91425" spcFirstLastPara="1" rIns="91425" wrap="square" tIns="91425">
+            <a:noAutofit/>
+          </a:bodyPr>
+          <a:lstStyle/>
+          <a:p>
+            <a:pPr indent="0" lvl="0" marL="0" rtl="0" algn="l">
+              <a:spcBef>
+                <a:spcPts val="0"/>
+              </a:spcBef>
+              <a:spcAft>
+                <a:spcPts val="0"/>
+              </a:spcAft>
+              <a:buNone/>
+            </a:pPr>
+            <a:r>
+              <a:t/>
+            </a:r>
+            <a:endParaRPr/>
+          </a:p>
+        </p:txBody>
+      </p:sp>
     </p:spTree>
   </p:cSld>
   <p:clrMapOvr>
@@ -1734,7 +1735,7 @@
   <p:cSld>
     <p:spTree>
       <p:nvGrpSpPr>
-        <p:cNvPr id="367" name="Shape 367"/>
+        <p:cNvPr id="361" name="Shape 361"/>
         <p:cNvGrpSpPr/>
         <p:nvPr/>
       </p:nvGrpSpPr>
@@ -1748,7 +1749,7 @@
       </p:grpSpPr>
       <p:sp>
         <p:nvSpPr>
-          <p:cNvPr id="368" name="Google Shape;368;p16:notes"/>
+          <p:cNvPr id="362" name="Google Shape;362;p15:notes"/>
           <p:cNvSpPr txBox="1"/>
           <p:nvPr>
             <p:ph idx="1" type="body"/>
@@ -1787,7 +1788,7 @@
       </p:sp>
       <p:sp>
         <p:nvSpPr>
-          <p:cNvPr id="369" name="Google Shape;369;p16:notes"/>
+          <p:cNvPr id="363" name="Google Shape;363;p15:notes"/>
           <p:cNvSpPr/>
           <p:nvPr>
             <p:ph idx="2" type="sldImg"/>
@@ -1932,7 +1933,7 @@
   <p:cSld>
     <p:spTree>
       <p:nvGrpSpPr>
-        <p:cNvPr id="381" name="Shape 381"/>
+        <p:cNvPr id="371" name="Shape 371"/>
         <p:cNvGrpSpPr/>
         <p:nvPr/>
       </p:nvGrpSpPr>
@@ -1946,7 +1947,7 @@
       </p:grpSpPr>
       <p:sp>
         <p:nvSpPr>
-          <p:cNvPr id="382" name="Google Shape;382;p17:notes"/>
+          <p:cNvPr id="372" name="Google Shape;372;p16:notes"/>
           <p:cNvSpPr txBox="1"/>
           <p:nvPr>
             <p:ph idx="1" type="body"/>
@@ -1985,7 +1986,106 @@
       </p:sp>
       <p:sp>
         <p:nvSpPr>
-          <p:cNvPr id="383" name="Google Shape;383;p17:notes"/>
+          <p:cNvPr id="373" name="Google Shape;373;p16:notes"/>
+          <p:cNvSpPr/>
+          <p:nvPr>
+            <p:ph idx="2" type="sldImg"/>
+          </p:nvPr>
+        </p:nvSpPr>
+        <p:spPr>
+          <a:xfrm>
+            <a:off x="1143225" y="685800"/>
+            <a:ext cx="4572225" cy="3429000"/>
+          </a:xfrm>
+          <a:custGeom>
+            <a:rect b="b" l="l" r="r" t="t"/>
+            <a:pathLst>
+              <a:path extrusionOk="0" h="120000" w="120000">
+                <a:moveTo>
+                  <a:pt x="0" y="0"/>
+                </a:moveTo>
+                <a:lnTo>
+                  <a:pt x="120000" y="0"/>
+                </a:lnTo>
+                <a:lnTo>
+                  <a:pt x="120000" y="120000"/>
+                </a:lnTo>
+                <a:lnTo>
+                  <a:pt x="0" y="120000"/>
+                </a:lnTo>
+                <a:close/>
+              </a:path>
+            </a:pathLst>
+          </a:custGeom>
+        </p:spPr>
+      </p:sp>
+    </p:spTree>
+  </p:cSld>
+  <p:clrMapOvr>
+    <a:masterClrMapping/>
+  </p:clrMapOvr>
+</p:notes>
+</file>
+
+<file path=ppt/notesSlides/notesSlide21.xml><?xml version="1.0" encoding="utf-8"?>
+<p:notes xmlns:a="http://schemas.openxmlformats.org/drawingml/2006/main" xmlns:r="http://schemas.openxmlformats.org/officeDocument/2006/relationships" xmlns:mc="http://schemas.openxmlformats.org/markup-compatibility/2006" xmlns:mv="urn:schemas-microsoft-com:mac:vml" xmlns:p="http://schemas.openxmlformats.org/presentationml/2006/main" xmlns:c="http://schemas.openxmlformats.org/drawingml/2006/chart" xmlns:dgm="http://schemas.openxmlformats.org/drawingml/2006/diagram" xmlns:o="urn:schemas-microsoft-com:office:office" xmlns:v="urn:schemas-microsoft-com:vml" xmlns:pvml="urn:schemas-microsoft-com:office:powerpoint" xmlns:com="http://schemas.openxmlformats.org/drawingml/2006/compatibility" xmlns:p14="http://schemas.microsoft.com/office/powerpoint/2010/main" xmlns:p15="http://schemas.microsoft.com/office/powerpoint/2012/main" xmlns:ahyp="http://schemas.microsoft.com/office/drawing/2018/hyperlinkcolor" showMasterPhAnim="0" showMasterSp="0">
+  <p:cSld>
+    <p:spTree>
+      <p:nvGrpSpPr>
+        <p:cNvPr id="385" name="Shape 385"/>
+        <p:cNvGrpSpPr/>
+        <p:nvPr/>
+      </p:nvGrpSpPr>
+      <p:grpSpPr>
+        <a:xfrm>
+          <a:off x="0" y="0"/>
+          <a:ext cx="0" cy="0"/>
+          <a:chOff x="0" y="0"/>
+          <a:chExt cx="0" cy="0"/>
+        </a:xfrm>
+      </p:grpSpPr>
+      <p:sp>
+        <p:nvSpPr>
+          <p:cNvPr id="386" name="Google Shape;386;p17:notes"/>
+          <p:cNvSpPr txBox="1"/>
+          <p:nvPr>
+            <p:ph idx="1" type="body"/>
+          </p:nvPr>
+        </p:nvSpPr>
+        <p:spPr>
+          <a:xfrm>
+            <a:off x="685800" y="4343400"/>
+            <a:ext cx="5486400" cy="4114800"/>
+          </a:xfrm>
+          <a:prstGeom prst="rect">
+            <a:avLst/>
+          </a:prstGeom>
+        </p:spPr>
+        <p:txBody>
+          <a:bodyPr anchorCtr="0" anchor="t" bIns="91425" lIns="91425" spcFirstLastPara="1" rIns="91425" wrap="square" tIns="91425">
+            <a:noAutofit/>
+          </a:bodyPr>
+          <a:lstStyle/>
+          <a:p>
+            <a:pPr indent="0" lvl="0" marL="0" rtl="0" algn="l">
+              <a:spcBef>
+                <a:spcPts val="0"/>
+              </a:spcBef>
+              <a:spcAft>
+                <a:spcPts val="0"/>
+              </a:spcAft>
+              <a:buNone/>
+            </a:pPr>
+            <a:r>
+              <a:t/>
+            </a:r>
+            <a:endParaRPr/>
+          </a:p>
+        </p:txBody>
+      </p:sp>
+      <p:sp>
+        <p:nvSpPr>
+          <p:cNvPr id="387" name="Google Shape;387;p17:notes"/>
           <p:cNvSpPr/>
           <p:nvPr>
             <p:ph idx="2" type="sldImg"/>
@@ -11261,16 +11361,43 @@
           </a:p>
         </p:txBody>
       </p:sp>
-      <p:sp>
-        <p:nvSpPr>
-          <p:cNvPr id="313" name="Google Shape;313;p26"/>
+      <p:pic>
+        <p:nvPicPr>
+          <p:cNvPr descr="image.png" id="313" name="Google Shape;313;p26"/>
+          <p:cNvPicPr preferRelativeResize="0"/>
+          <p:nvPr/>
+        </p:nvPicPr>
+        <p:blipFill rotWithShape="1">
+          <a:blip r:embed="rId4">
+            <a:alphaModFix/>
+          </a:blip>
+          <a:srcRect b="0" l="0" r="0" t="0"/>
+          <a:stretch/>
+        </p:blipFill>
+        <p:spPr>
+          <a:xfrm>
+            <a:off x="571500" y="6257925"/>
+            <a:ext cx="11049000" cy="314325"/>
+          </a:xfrm>
+          <a:prstGeom prst="rect">
+            <a:avLst/>
+          </a:prstGeom>
+          <a:noFill/>
+          <a:ln>
+            <a:noFill/>
+          </a:ln>
+        </p:spPr>
+      </p:pic>
+      <p:sp>
+        <p:nvSpPr>
+          <p:cNvPr id="314" name="Google Shape;314;p26"/>
           <p:cNvSpPr txBox="1"/>
           <p:nvPr/>
         </p:nvSpPr>
         <p:spPr>
           <a:xfrm>
-            <a:off x="904875" y="4814887"/>
-            <a:ext cx="4953000" cy="215400"/>
+            <a:off x="571500" y="6410325"/>
+            <a:ext cx="485700" cy="161700"/>
           </a:xfrm>
           <a:prstGeom prst="rect">
             <a:avLst/>
@@ -11287,9 +11414,106 @@
           <a:lstStyle/>
           <a:p>
             <a:pPr indent="0" lvl="0" marL="0" marR="0" rtl="0" algn="l">
-              <a:lnSpc>
-                <a:spcPct val="160000"/>
-              </a:lnSpc>
+              <a:spcBef>
+                <a:spcPts val="0"/>
+              </a:spcBef>
+              <a:spcAft>
+                <a:spcPts val="0"/>
+              </a:spcAft>
+              <a:buNone/>
+            </a:pPr>
+            <a:r>
+              <a:rPr b="0" i="0" lang="en-US" sz="1050" u="none" cap="none" strike="noStrike">
+                <a:solidFill>
+                  <a:srgbClr val="94A3B8"/>
+                </a:solidFill>
+                <a:latin typeface="Urbanist SemiBold"/>
+                <a:ea typeface="Urbanist SemiBold"/>
+                <a:cs typeface="Urbanist SemiBold"/>
+                <a:sym typeface="Urbanist SemiBold"/>
+              </a:rPr>
+              <a:t>Group 5</a:t>
+            </a:r>
+            <a:endParaRPr/>
+          </a:p>
+        </p:txBody>
+      </p:sp>
+      <p:sp>
+        <p:nvSpPr>
+          <p:cNvPr id="315" name="Google Shape;315;p26"/>
+          <p:cNvSpPr txBox="1"/>
+          <p:nvPr/>
+        </p:nvSpPr>
+        <p:spPr>
+          <a:xfrm>
+            <a:off x="5114925" y="6410438"/>
+            <a:ext cx="7048500" cy="161700"/>
+          </a:xfrm>
+          <a:prstGeom prst="rect">
+            <a:avLst/>
+          </a:prstGeom>
+          <a:noFill/>
+          <a:ln>
+            <a:noFill/>
+          </a:ln>
+        </p:spPr>
+        <p:txBody>
+          <a:bodyPr anchorCtr="0" anchor="t" bIns="0" lIns="0" spcFirstLastPara="1" rIns="0" wrap="square" tIns="0">
+            <a:spAutoFit/>
+          </a:bodyPr>
+          <a:lstStyle/>
+          <a:p>
+            <a:pPr indent="0" lvl="0" marL="0" marR="0" rtl="0" algn="l">
+              <a:spcBef>
+                <a:spcPts val="0"/>
+              </a:spcBef>
+              <a:spcAft>
+                <a:spcPts val="0"/>
+              </a:spcAft>
+              <a:buNone/>
+            </a:pPr>
+            <a:r>
+              <a:rPr b="0" i="0" lang="en-US" sz="1050" u="none" cap="none" strike="noStrike">
+                <a:solidFill>
+                  <a:srgbClr val="64748B"/>
+                </a:solidFill>
+                <a:latin typeface="Urbanist"/>
+                <a:ea typeface="Urbanist"/>
+                <a:cs typeface="Urbanist"/>
+                <a:sym typeface="Urbanist"/>
+              </a:rPr>
+              <a:t>Abdullah Al Noman · Tamanna Akter Mou · Aryan Sami · Ridita Afrin Riya · Abrar Mohammed Tanzim Alam</a:t>
+            </a:r>
+            <a:endParaRPr/>
+          </a:p>
+        </p:txBody>
+      </p:sp>
+      <p:sp>
+        <p:nvSpPr>
+          <p:cNvPr id="316" name="Google Shape;316;p26"/>
+          <p:cNvSpPr txBox="1"/>
+          <p:nvPr/>
+        </p:nvSpPr>
+        <p:spPr>
+          <a:xfrm>
+            <a:off x="7848925" y="3796925"/>
+            <a:ext cx="4365900" cy="554100"/>
+          </a:xfrm>
+          <a:prstGeom prst="rect">
+            <a:avLst/>
+          </a:prstGeom>
+          <a:noFill/>
+          <a:ln>
+            <a:noFill/>
+          </a:ln>
+        </p:spPr>
+        <p:txBody>
+          <a:bodyPr anchorCtr="0" anchor="t" bIns="91425" lIns="91425" spcFirstLastPara="1" rIns="91425" wrap="square" tIns="91425">
+            <a:spAutoFit/>
+          </a:bodyPr>
+          <a:lstStyle/>
+          <a:p>
+            <a:pPr indent="0" lvl="0" marL="0" rtl="0" algn="l">
               <a:spcBef>
                 <a:spcPts val="0"/>
               </a:spcBef>
@@ -11301,18 +11525,22 @@
             <a:r>
               <a:t/>
             </a:r>
-            <a:endParaRPr/>
+            <a:endParaRPr sz="2400">
+              <a:solidFill>
+                <a:schemeClr val="lt2"/>
+              </a:solidFill>
+            </a:endParaRPr>
           </a:p>
         </p:txBody>
       </p:sp>
       <p:pic>
         <p:nvPicPr>
-          <p:cNvPr id="314" name="Google Shape;314;p26"/>
+          <p:cNvPr id="317" name="Google Shape;317;p26"/>
           <p:cNvPicPr preferRelativeResize="0"/>
           <p:nvPr/>
         </p:nvPicPr>
         <p:blipFill>
-          <a:blip r:embed="rId4">
+          <a:blip r:embed="rId5">
             <a:alphaModFix/>
           </a:blip>
           <a:stretch>
@@ -11321,8 +11549,8 @@
         </p:blipFill>
         <p:spPr>
           <a:xfrm>
-            <a:off x="5101800" y="3061075"/>
-            <a:ext cx="6877625" cy="2933550"/>
+            <a:off x="5415750" y="2894300"/>
+            <a:ext cx="6063300" cy="3211225"/>
           </a:xfrm>
           <a:prstGeom prst="rect">
             <a:avLst/>
@@ -11333,133 +11561,6 @@
           </a:ln>
         </p:spPr>
       </p:pic>
-      <p:pic>
-        <p:nvPicPr>
-          <p:cNvPr descr="image.png" id="315" name="Google Shape;315;p26"/>
-          <p:cNvPicPr preferRelativeResize="0"/>
-          <p:nvPr/>
-        </p:nvPicPr>
-        <p:blipFill rotWithShape="1">
-          <a:blip r:embed="rId5">
-            <a:alphaModFix/>
-          </a:blip>
-          <a:srcRect b="0" l="0" r="0" t="0"/>
-          <a:stretch/>
-        </p:blipFill>
-        <p:spPr>
-          <a:xfrm>
-            <a:off x="571500" y="6257925"/>
-            <a:ext cx="11049000" cy="314325"/>
-          </a:xfrm>
-          <a:prstGeom prst="rect">
-            <a:avLst/>
-          </a:prstGeom>
-          <a:noFill/>
-          <a:ln>
-            <a:noFill/>
-          </a:ln>
-        </p:spPr>
-      </p:pic>
-      <p:sp>
-        <p:nvSpPr>
-          <p:cNvPr id="316" name="Google Shape;316;p26"/>
-          <p:cNvSpPr txBox="1"/>
-          <p:nvPr/>
-        </p:nvSpPr>
-        <p:spPr>
-          <a:xfrm>
-            <a:off x="571500" y="6410325"/>
-            <a:ext cx="485700" cy="161700"/>
-          </a:xfrm>
-          <a:prstGeom prst="rect">
-            <a:avLst/>
-          </a:prstGeom>
-          <a:noFill/>
-          <a:ln>
-            <a:noFill/>
-          </a:ln>
-        </p:spPr>
-        <p:txBody>
-          <a:bodyPr anchorCtr="0" anchor="t" bIns="0" lIns="0" spcFirstLastPara="1" rIns="0" wrap="square" tIns="0">
-            <a:spAutoFit/>
-          </a:bodyPr>
-          <a:lstStyle/>
-          <a:p>
-            <a:pPr indent="0" lvl="0" marL="0" marR="0" rtl="0" algn="l">
-              <a:spcBef>
-                <a:spcPts val="0"/>
-              </a:spcBef>
-              <a:spcAft>
-                <a:spcPts val="0"/>
-              </a:spcAft>
-              <a:buNone/>
-            </a:pPr>
-            <a:r>
-              <a:rPr b="0" i="0" lang="en-US" sz="1050" u="none" cap="none" strike="noStrike">
-                <a:solidFill>
-                  <a:srgbClr val="94A3B8"/>
-                </a:solidFill>
-                <a:latin typeface="Urbanist SemiBold"/>
-                <a:ea typeface="Urbanist SemiBold"/>
-                <a:cs typeface="Urbanist SemiBold"/>
-                <a:sym typeface="Urbanist SemiBold"/>
-              </a:rPr>
-              <a:t>Group 5</a:t>
-            </a:r>
-            <a:endParaRPr/>
-          </a:p>
-        </p:txBody>
-      </p:sp>
-      <p:sp>
-        <p:nvSpPr>
-          <p:cNvPr id="317" name="Google Shape;317;p26"/>
-          <p:cNvSpPr txBox="1"/>
-          <p:nvPr/>
-        </p:nvSpPr>
-        <p:spPr>
-          <a:xfrm>
-            <a:off x="5114925" y="6410438"/>
-            <a:ext cx="7048500" cy="161700"/>
-          </a:xfrm>
-          <a:prstGeom prst="rect">
-            <a:avLst/>
-          </a:prstGeom>
-          <a:noFill/>
-          <a:ln>
-            <a:noFill/>
-          </a:ln>
-        </p:spPr>
-        <p:txBody>
-          <a:bodyPr anchorCtr="0" anchor="t" bIns="0" lIns="0" spcFirstLastPara="1" rIns="0" wrap="square" tIns="0">
-            <a:spAutoFit/>
-          </a:bodyPr>
-          <a:lstStyle/>
-          <a:p>
-            <a:pPr indent="0" lvl="0" marL="0" marR="0" rtl="0" algn="l">
-              <a:spcBef>
-                <a:spcPts val="0"/>
-              </a:spcBef>
-              <a:spcAft>
-                <a:spcPts val="0"/>
-              </a:spcAft>
-              <a:buNone/>
-            </a:pPr>
-            <a:r>
-              <a:rPr b="0" i="0" lang="en-US" sz="1050" u="none" cap="none" strike="noStrike">
-                <a:solidFill>
-                  <a:srgbClr val="64748B"/>
-                </a:solidFill>
-                <a:latin typeface="Urbanist"/>
-                <a:ea typeface="Urbanist"/>
-                <a:cs typeface="Urbanist"/>
-                <a:sym typeface="Urbanist"/>
-              </a:rPr>
-              <a:t>Abdullah Al Noman · Tamanna Akter Mou · Aryan Sami · Ridita Afrin Riya · Abrar Mohammed Tanzim Alam</a:t>
-            </a:r>
-            <a:endParaRPr/>
-          </a:p>
-        </p:txBody>
-      </p:sp>
     </p:spTree>
   </p:cSld>
   <p:clrMapOvr>
@@ -11474,7 +11575,7 @@
     <p:bg>
       <p:bgPr>
         <a:solidFill>
-          <a:srgbClr val="020617"/>
+          <a:srgbClr val="0A081B"/>
         </a:solidFill>
       </p:bgPr>
     </p:bg>
@@ -11494,21 +11595,22 @@
       </p:grpSpPr>
       <p:pic>
         <p:nvPicPr>
-          <p:cNvPr descr="image.png" id="322" name="Google Shape;322;p27"/>
+          <p:cNvPr id="322" name="Google Shape;322;p27"/>
           <p:cNvPicPr preferRelativeResize="0"/>
           <p:nvPr/>
         </p:nvPicPr>
-        <p:blipFill rotWithShape="1">
+        <p:blipFill>
           <a:blip r:embed="rId3">
             <a:alphaModFix/>
           </a:blip>
-          <a:srcRect b="0" l="0" r="0" t="0"/>
-          <a:stretch/>
+          <a:stretch>
+            <a:fillRect/>
+          </a:stretch>
         </p:blipFill>
         <p:spPr>
           <a:xfrm>
-            <a:off x="571500" y="476250"/>
-            <a:ext cx="2276475" cy="352425"/>
+            <a:off x="1869375" y="996175"/>
+            <a:ext cx="8879450" cy="5346400"/>
           </a:xfrm>
           <a:prstGeom prst="rect">
             <a:avLst/>
@@ -11522,200 +11624,25 @@
       <p:sp>
         <p:nvSpPr>
           <p:cNvPr id="323" name="Google Shape;323;p27"/>
-          <p:cNvSpPr txBox="1"/>
-          <p:nvPr/>
-        </p:nvSpPr>
-        <p:spPr>
-          <a:xfrm>
-            <a:off x="762000" y="971550"/>
-            <a:ext cx="11401500" cy="215400"/>
-          </a:xfrm>
-          <a:prstGeom prst="rect">
-            <a:avLst/>
-          </a:prstGeom>
-          <a:noFill/>
-          <a:ln>
-            <a:noFill/>
-          </a:ln>
-        </p:spPr>
-        <p:txBody>
-          <a:bodyPr anchorCtr="0" anchor="t" bIns="0" lIns="0" spcFirstLastPara="1" rIns="0" wrap="square" tIns="0">
-            <a:spAutoFit/>
-          </a:bodyPr>
-          <a:lstStyle/>
-          <a:p>
-            <a:pPr indent="0" lvl="0" marL="0" marR="0" rtl="0" algn="l">
-              <a:spcBef>
-                <a:spcPts val="0"/>
-              </a:spcBef>
-              <a:spcAft>
-                <a:spcPts val="0"/>
-              </a:spcAft>
-              <a:buNone/>
-            </a:pPr>
-            <a:r>
-              <a:t/>
-            </a:r>
-            <a:endParaRPr/>
-          </a:p>
-        </p:txBody>
-      </p:sp>
-      <p:sp>
-        <p:nvSpPr>
-          <p:cNvPr id="324" name="Google Shape;324;p27"/>
-          <p:cNvSpPr txBox="1"/>
-          <p:nvPr/>
-        </p:nvSpPr>
-        <p:spPr>
-          <a:xfrm>
-            <a:off x="6186750" y="2071676"/>
-            <a:ext cx="4953000" cy="215400"/>
-          </a:xfrm>
-          <a:prstGeom prst="rect">
-            <a:avLst/>
-          </a:prstGeom>
-          <a:noFill/>
-          <a:ln>
-            <a:noFill/>
-          </a:ln>
-        </p:spPr>
-        <p:txBody>
-          <a:bodyPr anchorCtr="0" anchor="t" bIns="0" lIns="0" spcFirstLastPara="1" rIns="0" wrap="square" tIns="0">
-            <a:spAutoFit/>
-          </a:bodyPr>
-          <a:lstStyle/>
-          <a:p>
-            <a:pPr indent="0" lvl="0" marL="0" marR="0" rtl="0" algn="l">
-              <a:lnSpc>
-                <a:spcPct val="160000"/>
-              </a:lnSpc>
-              <a:spcBef>
-                <a:spcPts val="0"/>
-              </a:spcBef>
-              <a:spcAft>
-                <a:spcPts val="0"/>
-              </a:spcAft>
-              <a:buNone/>
-            </a:pPr>
-            <a:r>
-              <a:t/>
-            </a:r>
-            <a:endParaRPr/>
-          </a:p>
-        </p:txBody>
-      </p:sp>
-      <p:sp>
-        <p:nvSpPr>
-          <p:cNvPr id="325" name="Google Shape;325;p27"/>
-          <p:cNvSpPr txBox="1"/>
-          <p:nvPr/>
-        </p:nvSpPr>
-        <p:spPr>
-          <a:xfrm>
-            <a:off x="6850500" y="1507300"/>
-            <a:ext cx="4587000" cy="169200"/>
-          </a:xfrm>
-          <a:prstGeom prst="rect">
-            <a:avLst/>
-          </a:prstGeom>
-          <a:noFill/>
-          <a:ln>
-            <a:noFill/>
-          </a:ln>
-        </p:spPr>
-        <p:txBody>
-          <a:bodyPr anchorCtr="0" anchor="t" bIns="0" lIns="0" spcFirstLastPara="1" rIns="0" wrap="square" tIns="0">
-            <a:spAutoFit/>
-          </a:bodyPr>
-          <a:lstStyle/>
-          <a:p>
-            <a:pPr indent="0" lvl="0" marL="0" rtl="0" algn="l">
-              <a:lnSpc>
-                <a:spcPct val="115000"/>
-              </a:lnSpc>
-              <a:spcBef>
-                <a:spcPts val="1200"/>
-              </a:spcBef>
-              <a:spcAft>
-                <a:spcPts val="1200"/>
-              </a:spcAft>
-              <a:buNone/>
-            </a:pPr>
-            <a:r>
-              <a:t/>
-            </a:r>
-            <a:endParaRPr sz="1100">
-              <a:solidFill>
-                <a:schemeClr val="lt1"/>
-              </a:solidFill>
-            </a:endParaRPr>
-          </a:p>
-        </p:txBody>
-      </p:sp>
-      <p:sp>
-        <p:nvSpPr>
-          <p:cNvPr id="326" name="Google Shape;326;p27"/>
-          <p:cNvSpPr txBox="1"/>
-          <p:nvPr/>
-        </p:nvSpPr>
-        <p:spPr>
-          <a:xfrm>
-            <a:off x="6667500" y="4062412"/>
-            <a:ext cx="4953000" cy="215400"/>
-          </a:xfrm>
-          <a:prstGeom prst="rect">
-            <a:avLst/>
-          </a:prstGeom>
-          <a:noFill/>
-          <a:ln>
-            <a:noFill/>
-          </a:ln>
-        </p:spPr>
-        <p:txBody>
-          <a:bodyPr anchorCtr="0" anchor="t" bIns="0" lIns="0" spcFirstLastPara="1" rIns="0" wrap="square" tIns="0">
-            <a:spAutoFit/>
-          </a:bodyPr>
-          <a:lstStyle/>
-          <a:p>
-            <a:pPr indent="0" lvl="0" marL="0" marR="0" rtl="0" algn="l">
-              <a:lnSpc>
-                <a:spcPct val="160000"/>
-              </a:lnSpc>
-              <a:spcBef>
-                <a:spcPts val="0"/>
-              </a:spcBef>
-              <a:spcAft>
-                <a:spcPts val="0"/>
-              </a:spcAft>
-              <a:buNone/>
-            </a:pPr>
-            <a:r>
-              <a:t/>
-            </a:r>
-            <a:endParaRPr/>
-          </a:p>
-        </p:txBody>
-      </p:sp>
-      <p:sp>
-        <p:nvSpPr>
-          <p:cNvPr id="327" name="Google Shape;327;p27"/>
           <p:cNvSpPr/>
           <p:nvPr/>
         </p:nvSpPr>
         <p:spPr>
           <a:xfrm>
-            <a:off x="762000" y="2155251"/>
-            <a:ext cx="3247500" cy="2470800"/>
-          </a:xfrm>
-          <a:prstGeom prst="rect">
-            <a:avLst/>
+            <a:off x="5243700" y="336375"/>
+            <a:ext cx="1584300" cy="544500"/>
+          </a:xfrm>
+          <a:prstGeom prst="roundRect">
+            <a:avLst>
+              <a:gd fmla="val 19542" name="adj"/>
+            </a:avLst>
           </a:prstGeom>
           <a:solidFill>
-            <a:srgbClr val="6FA8DC"/>
+            <a:srgbClr val="0A081B"/>
           </a:solidFill>
-          <a:ln cap="flat" cmpd="sng" w="9525">
+          <a:ln cap="flat" cmpd="sng" w="16925">
             <a:solidFill>
-              <a:srgbClr val="B45F06"/>
+              <a:srgbClr val="6AA84F"/>
             </a:solidFill>
             <a:prstDash val="solid"/>
             <a:round/>
@@ -11724,546 +11651,41 @@
           </a:ln>
         </p:spPr>
         <p:txBody>
-          <a:bodyPr anchorCtr="0" anchor="ctr" bIns="91425" lIns="91425" spcFirstLastPara="1" rIns="91425" wrap="square" tIns="91425">
+          <a:bodyPr anchorCtr="0" anchor="ctr" bIns="81175" lIns="81175" spcFirstLastPara="1" rIns="81175" wrap="square" tIns="81175">
             <a:noAutofit/>
           </a:bodyPr>
           <a:lstStyle/>
           <a:p>
             <a:pPr indent="0" lvl="0" marL="0" rtl="0" algn="l">
-              <a:lnSpc>
-                <a:spcPct val="115000"/>
-              </a:lnSpc>
-              <a:spcBef>
-                <a:spcPts val="1200"/>
-              </a:spcBef>
-              <a:spcAft>
-                <a:spcPts val="0"/>
-              </a:spcAft>
-              <a:buClr>
-                <a:schemeClr val="dk1"/>
-              </a:buClr>
-              <a:buSzPts val="1100"/>
-              <a:buFont typeface="Arial"/>
-              <a:buNone/>
-            </a:pPr>
-            <a:r>
-              <a:rPr b="1" lang="en-US" sz="1100">
-                <a:solidFill>
-                  <a:schemeClr val="lt1"/>
-                </a:solidFill>
-              </a:rPr>
-              <a:t>             </a:t>
-            </a:r>
-            <a:r>
-              <a:rPr b="1" lang="en-US" sz="1100">
-                <a:solidFill>
-                  <a:schemeClr val="dk1"/>
-                </a:solidFill>
-              </a:rPr>
-              <a:t>       </a:t>
-            </a:r>
-            <a:r>
-              <a:rPr b="1" lang="en-US" sz="1100">
-                <a:solidFill>
-                  <a:schemeClr val="dk1"/>
-                </a:solidFill>
-              </a:rPr>
-              <a:t>Objective &amp; Approach</a:t>
-            </a:r>
-            <a:endParaRPr b="1" sz="1100">
+              <a:spcBef>
+                <a:spcPts val="0"/>
+              </a:spcBef>
+              <a:spcAft>
+                <a:spcPts val="0"/>
+              </a:spcAft>
+              <a:buNone/>
+            </a:pPr>
+            <a:r>
+              <a:t/>
+            </a:r>
+            <a:endParaRPr>
               <a:solidFill>
-                <a:schemeClr val="dk1"/>
+                <a:srgbClr val="6AA84F"/>
               </a:solidFill>
             </a:endParaRPr>
           </a:p>
-          <a:p>
-            <a:pPr indent="-298450" lvl="0" marL="457200" rtl="0" algn="l">
-              <a:lnSpc>
-                <a:spcPct val="115000"/>
-              </a:lnSpc>
-              <a:spcBef>
-                <a:spcPts val="1200"/>
-              </a:spcBef>
-              <a:spcAft>
-                <a:spcPts val="0"/>
-              </a:spcAft>
-              <a:buClr>
-                <a:schemeClr val="dk1"/>
-              </a:buClr>
-              <a:buSzPts val="1100"/>
-              <a:buChar char="●"/>
-            </a:pPr>
-            <a:r>
-              <a:rPr lang="en-US" sz="1100">
-                <a:solidFill>
-                  <a:schemeClr val="dk1"/>
-                </a:solidFill>
-              </a:rPr>
-              <a:t>Test whether medium-resolution Copernicus satellite data (Sentinel-1 SAR, Sentinel-2 optical) can assess building damage during disasters</a:t>
-            </a:r>
-            <a:endParaRPr sz="1100">
-              <a:solidFill>
-                <a:schemeClr val="dk1"/>
-              </a:solidFill>
-            </a:endParaRPr>
-          </a:p>
-          <a:p>
-            <a:pPr indent="-298450" lvl="0" marL="457200" rtl="0" algn="l">
-              <a:lnSpc>
-                <a:spcPct val="115000"/>
-              </a:lnSpc>
-              <a:spcBef>
-                <a:spcPts val="0"/>
-              </a:spcBef>
-              <a:spcAft>
-                <a:spcPts val="0"/>
-              </a:spcAft>
-              <a:buClr>
-                <a:schemeClr val="dk1"/>
-              </a:buClr>
-              <a:buSzPts val="1100"/>
-              <a:buChar char="●"/>
-            </a:pPr>
-            <a:r>
-              <a:rPr lang="en-US" sz="1100">
-                <a:solidFill>
-                  <a:schemeClr val="dk1"/>
-                </a:solidFill>
-              </a:rPr>
-              <a:t>Created xBD-S12 dataset by aligning Sentinel imagery with existing damage labels</a:t>
-            </a:r>
-            <a:endParaRPr sz="1100">
-              <a:solidFill>
-                <a:schemeClr val="dk1"/>
-              </a:solidFill>
-            </a:endParaRPr>
-          </a:p>
-          <a:p>
-            <a:pPr indent="-298450" lvl="0" marL="457200" rtl="0" algn="l">
-              <a:lnSpc>
-                <a:spcPct val="115000"/>
-              </a:lnSpc>
-              <a:spcBef>
-                <a:spcPts val="0"/>
-              </a:spcBef>
-              <a:spcAft>
-                <a:spcPts val="0"/>
-              </a:spcAft>
-              <a:buClr>
-                <a:schemeClr val="dk1"/>
-              </a:buClr>
-              <a:buSzPts val="1100"/>
-              <a:buChar char="●"/>
-            </a:pPr>
-            <a:r>
-              <a:rPr lang="en-US" sz="1100">
-                <a:solidFill>
-                  <a:schemeClr val="dk1"/>
-                </a:solidFill>
-              </a:rPr>
-              <a:t>Trained multiple architectures including geospatial foundation models (Prithvi-EO-2.0, DOFA</a:t>
-            </a:r>
-            <a:endParaRPr>
-              <a:solidFill>
-                <a:schemeClr val="dk1"/>
-              </a:solidFill>
-              <a:latin typeface="Calibri"/>
-              <a:ea typeface="Calibri"/>
-              <a:cs typeface="Calibri"/>
-              <a:sym typeface="Calibri"/>
-            </a:endParaRPr>
-          </a:p>
         </p:txBody>
       </p:sp>
       <p:sp>
         <p:nvSpPr>
-          <p:cNvPr id="328" name="Google Shape;328;p27"/>
-          <p:cNvSpPr/>
-          <p:nvPr/>
-        </p:nvSpPr>
-        <p:spPr>
-          <a:xfrm>
-            <a:off x="4927200" y="2259450"/>
-            <a:ext cx="3247500" cy="2339100"/>
-          </a:xfrm>
-          <a:prstGeom prst="rect">
-            <a:avLst/>
-          </a:prstGeom>
-          <a:solidFill>
-            <a:srgbClr val="6FA8DC"/>
-          </a:solidFill>
-          <a:ln cap="flat" cmpd="sng" w="9525">
-            <a:solidFill>
-              <a:srgbClr val="B45F06"/>
-            </a:solidFill>
-            <a:prstDash val="solid"/>
-            <a:round/>
-            <a:headEnd len="sm" w="sm" type="none"/>
-            <a:tailEnd len="sm" w="sm" type="none"/>
-          </a:ln>
-        </p:spPr>
-        <p:txBody>
-          <a:bodyPr anchorCtr="0" anchor="ctr" bIns="91425" lIns="91425" spcFirstLastPara="1" rIns="91425" wrap="square" tIns="91425">
-            <a:noAutofit/>
-          </a:bodyPr>
-          <a:lstStyle/>
-          <a:p>
-            <a:pPr indent="0" lvl="0" marL="0" rtl="0" algn="l">
-              <a:lnSpc>
-                <a:spcPct val="115000"/>
-              </a:lnSpc>
-              <a:spcBef>
-                <a:spcPts val="1200"/>
-              </a:spcBef>
-              <a:spcAft>
-                <a:spcPts val="0"/>
-              </a:spcAft>
-              <a:buNone/>
-            </a:pPr>
-            <a:r>
-              <a:rPr b="1" lang="en-US" sz="1100">
-                <a:solidFill>
-                  <a:schemeClr val="lt1"/>
-                </a:solidFill>
-              </a:rPr>
-              <a:t>                   </a:t>
-            </a:r>
-            <a:r>
-              <a:rPr lang="en-US" sz="1100">
-                <a:solidFill>
-                  <a:schemeClr val="dk1"/>
-                </a:solidFill>
-              </a:rPr>
-              <a:t>    </a:t>
-            </a:r>
-            <a:r>
-              <a:rPr b="1" lang="en-US" sz="1100">
-                <a:solidFill>
-                  <a:schemeClr val="dk1"/>
-                </a:solidFill>
-              </a:rPr>
-              <a:t> </a:t>
-            </a:r>
-            <a:r>
-              <a:rPr b="1" lang="en-US" sz="1100">
-                <a:solidFill>
-                  <a:schemeClr val="dk1"/>
-                </a:solidFill>
-              </a:rPr>
-              <a:t>Key Methods</a:t>
-            </a:r>
-            <a:endParaRPr b="1" sz="1100">
-              <a:solidFill>
-                <a:schemeClr val="dk1"/>
-              </a:solidFill>
-            </a:endParaRPr>
-          </a:p>
-          <a:p>
-            <a:pPr indent="-298450" lvl="0" marL="457200" rtl="0" algn="l">
-              <a:lnSpc>
-                <a:spcPct val="115000"/>
-              </a:lnSpc>
-              <a:spcBef>
-                <a:spcPts val="1200"/>
-              </a:spcBef>
-              <a:spcAft>
-                <a:spcPts val="0"/>
-              </a:spcAft>
-              <a:buClr>
-                <a:schemeClr val="dk1"/>
-              </a:buClr>
-              <a:buSzPts val="1100"/>
-              <a:buChar char="●"/>
-            </a:pPr>
-            <a:r>
-              <a:rPr lang="en-US" sz="1100">
-                <a:solidFill>
-                  <a:schemeClr val="dk1"/>
-                </a:solidFill>
-              </a:rPr>
-              <a:t>Corrected geolocation errors using building footprints</a:t>
-            </a:r>
-            <a:endParaRPr sz="1100">
-              <a:solidFill>
-                <a:schemeClr val="dk1"/>
-              </a:solidFill>
-            </a:endParaRPr>
-          </a:p>
-          <a:p>
-            <a:pPr indent="-298450" lvl="0" marL="457200" rtl="0" algn="l">
-              <a:lnSpc>
-                <a:spcPct val="115000"/>
-              </a:lnSpc>
-              <a:spcBef>
-                <a:spcPts val="0"/>
-              </a:spcBef>
-              <a:spcAft>
-                <a:spcPts val="0"/>
-              </a:spcAft>
-              <a:buClr>
-                <a:schemeClr val="dk1"/>
-              </a:buClr>
-              <a:buSzPts val="1100"/>
-              <a:buChar char="●"/>
-            </a:pPr>
-            <a:r>
-              <a:rPr lang="en-US" sz="1100">
-                <a:solidFill>
-                  <a:schemeClr val="dk1"/>
-                </a:solidFill>
-              </a:rPr>
-              <a:t>Compared early vs. late fusion strategies</a:t>
-            </a:r>
-            <a:endParaRPr sz="1100">
-              <a:solidFill>
-                <a:schemeClr val="dk1"/>
-              </a:solidFill>
-            </a:endParaRPr>
-          </a:p>
-          <a:p>
-            <a:pPr indent="-298450" lvl="0" marL="457200" rtl="0" algn="l">
-              <a:lnSpc>
-                <a:spcPct val="115000"/>
-              </a:lnSpc>
-              <a:spcBef>
-                <a:spcPts val="0"/>
-              </a:spcBef>
-              <a:spcAft>
-                <a:spcPts val="0"/>
-              </a:spcAft>
-              <a:buClr>
-                <a:schemeClr val="dk1"/>
-              </a:buClr>
-              <a:buSzPts val="1100"/>
-              <a:buChar char="●"/>
-            </a:pPr>
-            <a:r>
-              <a:rPr lang="en-US" sz="1100">
-                <a:solidFill>
-                  <a:schemeClr val="dk1"/>
-                </a:solidFill>
-              </a:rPr>
-              <a:t>Applied morphological buffers to handle coregistration errors</a:t>
-            </a:r>
-            <a:endParaRPr sz="1100">
-              <a:solidFill>
-                <a:schemeClr val="dk1"/>
-              </a:solidFill>
-            </a:endParaRPr>
-          </a:p>
-          <a:p>
-            <a:pPr indent="-298450" lvl="0" marL="457200" rtl="0" algn="l">
-              <a:lnSpc>
-                <a:spcPct val="115000"/>
-              </a:lnSpc>
-              <a:spcBef>
-                <a:spcPts val="0"/>
-              </a:spcBef>
-              <a:spcAft>
-                <a:spcPts val="0"/>
-              </a:spcAft>
-              <a:buClr>
-                <a:schemeClr val="dk1"/>
-              </a:buClr>
-              <a:buSzPts val="1100"/>
-              <a:buChar char="●"/>
-            </a:pPr>
-            <a:r>
-              <a:rPr lang="en-US" sz="1100">
-                <a:solidFill>
-                  <a:schemeClr val="dk1"/>
-                </a:solidFill>
-              </a:rPr>
-              <a:t>Used ensemble methods and biased sampling for class imbalance</a:t>
-            </a:r>
-            <a:endParaRPr sz="1100">
-              <a:solidFill>
-                <a:schemeClr val="dk1"/>
-              </a:solidFill>
-            </a:endParaRPr>
-          </a:p>
-        </p:txBody>
-      </p:sp>
-      <p:sp>
-        <p:nvSpPr>
-          <p:cNvPr id="329" name="Google Shape;329;p27"/>
-          <p:cNvSpPr/>
-          <p:nvPr/>
-        </p:nvSpPr>
-        <p:spPr>
-          <a:xfrm>
-            <a:off x="8680275" y="2259450"/>
-            <a:ext cx="3247500" cy="2424600"/>
-          </a:xfrm>
-          <a:prstGeom prst="rect">
-            <a:avLst/>
-          </a:prstGeom>
-          <a:solidFill>
-            <a:srgbClr val="6FA8DC"/>
-          </a:solidFill>
-          <a:ln cap="flat" cmpd="sng" w="9525">
-            <a:solidFill>
-              <a:srgbClr val="B45F06"/>
-            </a:solidFill>
-            <a:prstDash val="solid"/>
-            <a:round/>
-            <a:headEnd len="sm" w="sm" type="none"/>
-            <a:tailEnd len="sm" w="sm" type="none"/>
-          </a:ln>
-        </p:spPr>
-        <p:txBody>
-          <a:bodyPr anchorCtr="0" anchor="ctr" bIns="91425" lIns="91425" spcFirstLastPara="1" rIns="91425" wrap="square" tIns="91425">
-            <a:noAutofit/>
-          </a:bodyPr>
-          <a:lstStyle/>
-          <a:p>
-            <a:pPr indent="0" lvl="0" marL="0" rtl="0" algn="l">
-              <a:lnSpc>
-                <a:spcPct val="115000"/>
-              </a:lnSpc>
-              <a:spcBef>
-                <a:spcPts val="1200"/>
-              </a:spcBef>
-              <a:spcAft>
-                <a:spcPts val="0"/>
-              </a:spcAft>
-              <a:buNone/>
-            </a:pPr>
-            <a:r>
-              <a:rPr b="1" lang="en-US" sz="1100">
-                <a:solidFill>
-                  <a:schemeClr val="lt1"/>
-                </a:solidFill>
-              </a:rPr>
-              <a:t>                     </a:t>
-            </a:r>
-            <a:r>
-              <a:rPr b="1" lang="en-US" sz="1100">
-                <a:solidFill>
-                  <a:schemeClr val="dk1"/>
-                </a:solidFill>
-              </a:rPr>
-              <a:t>        </a:t>
-            </a:r>
-            <a:r>
-              <a:rPr b="1" lang="en-US" sz="1100">
-                <a:solidFill>
-                  <a:schemeClr val="dk1"/>
-                </a:solidFill>
-              </a:rPr>
-              <a:t>Results</a:t>
-            </a:r>
-            <a:endParaRPr b="1" sz="1100">
-              <a:solidFill>
-                <a:schemeClr val="dk1"/>
-              </a:solidFill>
-            </a:endParaRPr>
-          </a:p>
-          <a:p>
-            <a:pPr indent="-298450" lvl="0" marL="457200" rtl="0" algn="l">
-              <a:lnSpc>
-                <a:spcPct val="115000"/>
-              </a:lnSpc>
-              <a:spcBef>
-                <a:spcPts val="1200"/>
-              </a:spcBef>
-              <a:spcAft>
-                <a:spcPts val="0"/>
-              </a:spcAft>
-              <a:buClr>
-                <a:schemeClr val="dk1"/>
-              </a:buClr>
-              <a:buSzPts val="1100"/>
-              <a:buChar char="●"/>
-            </a:pPr>
-            <a:r>
-              <a:rPr lang="en-US" sz="1100">
-                <a:solidFill>
-                  <a:schemeClr val="dk1"/>
-                </a:solidFill>
-              </a:rPr>
-              <a:t>Evaluated using F1 scores for building localization and damage classification</a:t>
-            </a:r>
-            <a:endParaRPr sz="1100">
-              <a:solidFill>
-                <a:schemeClr val="dk1"/>
-              </a:solidFill>
-            </a:endParaRPr>
-          </a:p>
-          <a:p>
-            <a:pPr indent="-298450" lvl="0" marL="457200" rtl="0" algn="l">
-              <a:lnSpc>
-                <a:spcPct val="115000"/>
-              </a:lnSpc>
-              <a:spcBef>
-                <a:spcPts val="0"/>
-              </a:spcBef>
-              <a:spcAft>
-                <a:spcPts val="0"/>
-              </a:spcAft>
-              <a:buClr>
-                <a:schemeClr val="dk1"/>
-              </a:buClr>
-              <a:buSzPts val="1100"/>
-              <a:buChar char="●"/>
-            </a:pPr>
-            <a:r>
-              <a:rPr lang="en-US" sz="1100">
-                <a:solidFill>
-                  <a:schemeClr val="dk1"/>
-                </a:solidFill>
-              </a:rPr>
-              <a:t>Tested on both random splits and geographically separated events</a:t>
-            </a:r>
-            <a:endParaRPr sz="1100">
-              <a:solidFill>
-                <a:schemeClr val="dk1"/>
-              </a:solidFill>
-            </a:endParaRPr>
-          </a:p>
-          <a:p>
-            <a:pPr indent="-298450" lvl="0" marL="457200" rtl="0" algn="l">
-              <a:lnSpc>
-                <a:spcPct val="115000"/>
-              </a:lnSpc>
-              <a:spcBef>
-                <a:spcPts val="0"/>
-              </a:spcBef>
-              <a:spcAft>
-                <a:spcPts val="0"/>
-              </a:spcAft>
-              <a:buClr>
-                <a:schemeClr val="dk1"/>
-              </a:buClr>
-              <a:buSzPts val="1100"/>
-              <a:buChar char="●"/>
-            </a:pPr>
-            <a:r>
-              <a:rPr lang="en-US" sz="1100">
-                <a:solidFill>
-                  <a:schemeClr val="dk1"/>
-                </a:solidFill>
-              </a:rPr>
-              <a:t>Validated with real-world case studies (Mexico earthquake, Palisades fire)</a:t>
-            </a:r>
-            <a:endParaRPr b="1" sz="1100">
-              <a:solidFill>
-                <a:schemeClr val="dk1"/>
-              </a:solidFill>
-            </a:endParaRPr>
-          </a:p>
-        </p:txBody>
-      </p:sp>
-      <p:sp>
-        <p:nvSpPr>
-          <p:cNvPr id="330" name="Google Shape;330;p27"/>
+          <p:cNvPr id="324" name="Google Shape;324;p27"/>
           <p:cNvSpPr txBox="1"/>
           <p:nvPr/>
         </p:nvSpPr>
         <p:spPr>
           <a:xfrm>
-            <a:off x="3875400" y="1089050"/>
-            <a:ext cx="5062500" cy="490500"/>
+            <a:off x="5303850" y="340681"/>
+            <a:ext cx="1584300" cy="500400"/>
           </a:xfrm>
           <a:prstGeom prst="rect">
             <a:avLst/>
@@ -12280,64 +11702,33 @@
           <a:lstStyle/>
           <a:p>
             <a:pPr indent="0" lvl="0" marL="0" rtl="0" algn="l">
-              <a:lnSpc>
-                <a:spcPct val="115000"/>
-              </a:lnSpc>
-              <a:spcBef>
-                <a:spcPts val="2400"/>
-              </a:spcBef>
-              <a:spcAft>
-                <a:spcPts val="0"/>
-              </a:spcAft>
-              <a:buClr>
-                <a:schemeClr val="dk1"/>
-              </a:buClr>
-              <a:buSzPts val="1100"/>
-              <a:buFont typeface="Arial"/>
-              <a:buNone/>
-            </a:pPr>
-            <a:r>
-              <a:rPr b="1" lang="en-US" sz="2300">
+              <a:spcBef>
+                <a:spcPts val="0"/>
+              </a:spcBef>
+              <a:spcAft>
+                <a:spcPts val="0"/>
+              </a:spcAft>
+              <a:buNone/>
+            </a:pPr>
+            <a:r>
+              <a:rPr b="1" lang="en-US" sz="2400">
                 <a:solidFill>
                   <a:schemeClr val="dk1"/>
                 </a:solidFill>
               </a:rPr>
-              <a:t>              Research Overview</a:t>
-            </a:r>
-            <a:endParaRPr b="1" sz="2300">
+              <a:t>xBD-S12</a:t>
+            </a:r>
+            <a:endParaRPr b="1" sz="2400">
               <a:solidFill>
                 <a:schemeClr val="dk1"/>
               </a:solidFill>
             </a:endParaRPr>
           </a:p>
-          <a:p>
-            <a:pPr indent="0" lvl="0" marL="0" rtl="0" algn="l">
-              <a:spcBef>
-                <a:spcPts val="600"/>
-              </a:spcBef>
-              <a:spcAft>
-                <a:spcPts val="0"/>
-              </a:spcAft>
-              <a:buNone/>
-            </a:pPr>
-            <a:r>
-              <a:t/>
-            </a:r>
-            <a:endParaRPr sz="3200">
-              <a:solidFill>
-                <a:schemeClr val="lt1"/>
-              </a:solidFill>
-              <a:latin typeface="Calibri"/>
-              <a:ea typeface="Calibri"/>
-              <a:cs typeface="Calibri"/>
-              <a:sym typeface="Calibri"/>
-            </a:endParaRPr>
-          </a:p>
         </p:txBody>
       </p:sp>
       <p:pic>
         <p:nvPicPr>
-          <p:cNvPr descr="image.png" id="331" name="Google Shape;331;p27"/>
+          <p:cNvPr descr="image.png" id="325" name="Google Shape;325;p27"/>
           <p:cNvPicPr preferRelativeResize="0"/>
           <p:nvPr/>
         </p:nvPicPr>
@@ -12364,7 +11755,7 @@
       </p:pic>
       <p:sp>
         <p:nvSpPr>
-          <p:cNvPr id="332" name="Google Shape;332;p27"/>
+          <p:cNvPr id="326" name="Google Shape;326;p27"/>
           <p:cNvSpPr txBox="1"/>
           <p:nvPr/>
         </p:nvSpPr>
@@ -12414,7 +11805,7 @@
       </p:sp>
       <p:sp>
         <p:nvSpPr>
-          <p:cNvPr id="333" name="Google Shape;333;p27"/>
+          <p:cNvPr id="327" name="Google Shape;327;p27"/>
           <p:cNvSpPr txBox="1"/>
           <p:nvPr/>
         </p:nvSpPr>
@@ -12467,81 +11858,6 @@
   <p:clrMapOvr>
     <a:masterClrMapping/>
   </p:clrMapOvr>
-  <p:timing>
-    <p:tnLst>
-      <p:par>
-        <p:cTn dur="indefinite" nodeType="tmRoot" restart="never">
-          <p:childTnLst>
-            <p:seq concurrent="1" nextAc="seek">
-              <p:cTn dur="indefinite" id="2" nodeType="mainSeq">
-                <p:childTnLst>
-                  <p:par>
-                    <p:cTn fill="hold">
-                      <p:stCondLst>
-                        <p:cond delay="indefinite"/>
-                      </p:stCondLst>
-                      <p:childTnLst>
-                        <p:par>
-                          <p:cTn fill="hold">
-                            <p:stCondLst>
-                              <p:cond delay="0"/>
-                            </p:stCondLst>
-                            <p:childTnLst>
-                              <p:par>
-                                <p:cTn fill="hold" nodeType="clickEffect" presetClass="entr" presetID="1" presetSubtype="0">
-                                  <p:stCondLst>
-                                    <p:cond delay="0"/>
-                                  </p:stCondLst>
-                                  <p:childTnLst>
-                                    <p:set>
-                                      <p:cBhvr>
-                                        <p:cTn dur="1" fill="hold">
-                                          <p:stCondLst>
-                                            <p:cond delay="0"/>
-                                          </p:stCondLst>
-                                        </p:cTn>
-                                        <p:tgtEl>
-                                          <p:spTgt spid="327"/>
-                                        </p:tgtEl>
-                                        <p:attrNameLst>
-                                          <p:attrName>style.visibility</p:attrName>
-                                        </p:attrNameLst>
-                                      </p:cBhvr>
-                                      <p:to>
-                                        <p:strVal val="visible"/>
-                                      </p:to>
-                                    </p:set>
-                                  </p:childTnLst>
-                                </p:cTn>
-                              </p:par>
-                            </p:childTnLst>
-                          </p:cTn>
-                        </p:par>
-                      </p:childTnLst>
-                    </p:cTn>
-                  </p:par>
-                </p:childTnLst>
-              </p:cTn>
-              <p:prevCondLst>
-                <p:cond evt="onPrev">
-                  <p:tgtEl>
-                    <p:sldTgt/>
-                  </p:tgtEl>
-                </p:cond>
-              </p:prevCondLst>
-              <p:nextCondLst>
-                <p:cond evt="onNext">
-                  <p:tgtEl>
-                    <p:sldTgt/>
-                  </p:tgtEl>
-                </p:cond>
-              </p:nextCondLst>
-            </p:seq>
-          </p:childTnLst>
-        </p:cTn>
-      </p:par>
-    </p:tnLst>
-  </p:timing>
 </p:sld>
 </file>
 
@@ -12557,7 +11873,870 @@
     </p:bg>
     <p:spTree>
       <p:nvGrpSpPr>
-        <p:cNvPr id="337" name="Shape 337"/>
+        <p:cNvPr id="331" name="Shape 331"/>
+        <p:cNvGrpSpPr/>
+        <p:nvPr/>
+      </p:nvGrpSpPr>
+      <p:grpSpPr>
+        <a:xfrm>
+          <a:off x="0" y="0"/>
+          <a:ext cx="0" cy="0"/>
+          <a:chOff x="0" y="0"/>
+          <a:chExt cx="0" cy="0"/>
+        </a:xfrm>
+      </p:grpSpPr>
+      <p:sp>
+        <p:nvSpPr>
+          <p:cNvPr id="332" name="Google Shape;332;p28"/>
+          <p:cNvSpPr/>
+          <p:nvPr/>
+        </p:nvSpPr>
+        <p:spPr>
+          <a:xfrm>
+            <a:off x="4612050" y="1133025"/>
+            <a:ext cx="2967900" cy="544500"/>
+          </a:xfrm>
+          <a:prstGeom prst="roundRect">
+            <a:avLst>
+              <a:gd fmla="val 19542" name="adj"/>
+            </a:avLst>
+          </a:prstGeom>
+          <a:solidFill>
+            <a:srgbClr val="0A081B"/>
+          </a:solidFill>
+          <a:ln cap="flat" cmpd="sng" w="16925">
+            <a:solidFill>
+              <a:srgbClr val="6AA84F"/>
+            </a:solidFill>
+            <a:prstDash val="solid"/>
+            <a:round/>
+            <a:headEnd len="sm" w="sm" type="none"/>
+            <a:tailEnd len="sm" w="sm" type="none"/>
+          </a:ln>
+        </p:spPr>
+        <p:txBody>
+          <a:bodyPr anchorCtr="0" anchor="ctr" bIns="81175" lIns="81175" spcFirstLastPara="1" rIns="81175" wrap="square" tIns="81175">
+            <a:noAutofit/>
+          </a:bodyPr>
+          <a:lstStyle/>
+          <a:p>
+            <a:pPr indent="0" lvl="0" marL="0" rtl="0" algn="l">
+              <a:spcBef>
+                <a:spcPts val="0"/>
+              </a:spcBef>
+              <a:spcAft>
+                <a:spcPts val="0"/>
+              </a:spcAft>
+              <a:buNone/>
+            </a:pPr>
+            <a:r>
+              <a:t/>
+            </a:r>
+            <a:endParaRPr/>
+          </a:p>
+        </p:txBody>
+      </p:sp>
+      <p:sp>
+        <p:nvSpPr>
+          <p:cNvPr id="333" name="Google Shape;333;p28"/>
+          <p:cNvSpPr txBox="1"/>
+          <p:nvPr/>
+        </p:nvSpPr>
+        <p:spPr>
+          <a:xfrm>
+            <a:off x="4664078" y="1133409"/>
+            <a:ext cx="2907000" cy="490500"/>
+          </a:xfrm>
+          <a:prstGeom prst="rect">
+            <a:avLst/>
+          </a:prstGeom>
+          <a:noFill/>
+          <a:ln>
+            <a:noFill/>
+          </a:ln>
+        </p:spPr>
+        <p:txBody>
+          <a:bodyPr anchorCtr="0" anchor="t" bIns="91425" lIns="91425" spcFirstLastPara="1" rIns="91425" wrap="square" tIns="91425">
+            <a:noAutofit/>
+          </a:bodyPr>
+          <a:lstStyle/>
+          <a:p>
+            <a:pPr indent="0" lvl="0" marL="0" rtl="0" algn="l">
+              <a:lnSpc>
+                <a:spcPct val="115000"/>
+              </a:lnSpc>
+              <a:spcBef>
+                <a:spcPts val="2400"/>
+              </a:spcBef>
+              <a:spcAft>
+                <a:spcPts val="600"/>
+              </a:spcAft>
+              <a:buClr>
+                <a:schemeClr val="dk1"/>
+              </a:buClr>
+              <a:buSzPts val="1100"/>
+              <a:buFont typeface="Arial"/>
+              <a:buNone/>
+            </a:pPr>
+            <a:r>
+              <a:rPr b="1" lang="en-US" sz="2300">
+                <a:solidFill>
+                  <a:schemeClr val="dk1"/>
+                </a:solidFill>
+              </a:rPr>
+              <a:t>Research Overview</a:t>
+            </a:r>
+            <a:endParaRPr sz="3200">
+              <a:solidFill>
+                <a:schemeClr val="dk1"/>
+              </a:solidFill>
+              <a:latin typeface="Calibri"/>
+              <a:ea typeface="Calibri"/>
+              <a:cs typeface="Calibri"/>
+              <a:sym typeface="Calibri"/>
+            </a:endParaRPr>
+          </a:p>
+        </p:txBody>
+      </p:sp>
+      <p:pic>
+        <p:nvPicPr>
+          <p:cNvPr descr="image.png" id="334" name="Google Shape;334;p28"/>
+          <p:cNvPicPr preferRelativeResize="0"/>
+          <p:nvPr/>
+        </p:nvPicPr>
+        <p:blipFill rotWithShape="1">
+          <a:blip r:embed="rId3">
+            <a:alphaModFix/>
+          </a:blip>
+          <a:srcRect b="0" l="0" r="0" t="0"/>
+          <a:stretch/>
+        </p:blipFill>
+        <p:spPr>
+          <a:xfrm>
+            <a:off x="571500" y="476250"/>
+            <a:ext cx="2276475" cy="352425"/>
+          </a:xfrm>
+          <a:prstGeom prst="rect">
+            <a:avLst/>
+          </a:prstGeom>
+          <a:noFill/>
+          <a:ln>
+            <a:noFill/>
+          </a:ln>
+        </p:spPr>
+      </p:pic>
+      <p:sp>
+        <p:nvSpPr>
+          <p:cNvPr id="335" name="Google Shape;335;p28"/>
+          <p:cNvSpPr/>
+          <p:nvPr/>
+        </p:nvSpPr>
+        <p:spPr>
+          <a:xfrm>
+            <a:off x="513113" y="2193600"/>
+            <a:ext cx="3247500" cy="2470800"/>
+          </a:xfrm>
+          <a:prstGeom prst="roundRect">
+            <a:avLst>
+              <a:gd fmla="val 16667" name="adj"/>
+            </a:avLst>
+          </a:prstGeom>
+          <a:solidFill>
+            <a:srgbClr val="6AA84F"/>
+          </a:solidFill>
+          <a:ln cap="flat" cmpd="sng" w="9525">
+            <a:solidFill>
+              <a:srgbClr val="B45F06"/>
+            </a:solidFill>
+            <a:prstDash val="solid"/>
+            <a:round/>
+            <a:headEnd len="sm" w="sm" type="none"/>
+            <a:tailEnd len="sm" w="sm" type="none"/>
+          </a:ln>
+        </p:spPr>
+        <p:txBody>
+          <a:bodyPr anchorCtr="0" anchor="ctr" bIns="91425" lIns="91425" spcFirstLastPara="1" rIns="91425" wrap="square" tIns="91425">
+            <a:noAutofit/>
+          </a:bodyPr>
+          <a:lstStyle/>
+          <a:p>
+            <a:pPr indent="0" lvl="0" marL="0" rtl="0" algn="l">
+              <a:lnSpc>
+                <a:spcPct val="115000"/>
+              </a:lnSpc>
+              <a:spcBef>
+                <a:spcPts val="1200"/>
+              </a:spcBef>
+              <a:spcAft>
+                <a:spcPts val="0"/>
+              </a:spcAft>
+              <a:buClr>
+                <a:schemeClr val="dk1"/>
+              </a:buClr>
+              <a:buSzPts val="1100"/>
+              <a:buFont typeface="Arial"/>
+              <a:buNone/>
+            </a:pPr>
+            <a:r>
+              <a:rPr b="1" lang="en-US" sz="1100">
+                <a:solidFill>
+                  <a:schemeClr val="lt1"/>
+                </a:solidFill>
+              </a:rPr>
+              <a:t>             </a:t>
+            </a:r>
+            <a:r>
+              <a:rPr b="1" lang="en-US" sz="1100">
+                <a:solidFill>
+                  <a:schemeClr val="dk1"/>
+                </a:solidFill>
+              </a:rPr>
+              <a:t>       </a:t>
+            </a:r>
+            <a:r>
+              <a:rPr b="1" lang="en-US" sz="1100">
+                <a:solidFill>
+                  <a:schemeClr val="dk1"/>
+                </a:solidFill>
+              </a:rPr>
+              <a:t>Objective &amp; Approach</a:t>
+            </a:r>
+            <a:endParaRPr b="1" sz="1100">
+              <a:solidFill>
+                <a:schemeClr val="dk1"/>
+              </a:solidFill>
+            </a:endParaRPr>
+          </a:p>
+          <a:p>
+            <a:pPr indent="-298450" lvl="0" marL="457200" rtl="0" algn="l">
+              <a:lnSpc>
+                <a:spcPct val="115000"/>
+              </a:lnSpc>
+              <a:spcBef>
+                <a:spcPts val="1200"/>
+              </a:spcBef>
+              <a:spcAft>
+                <a:spcPts val="0"/>
+              </a:spcAft>
+              <a:buClr>
+                <a:schemeClr val="dk1"/>
+              </a:buClr>
+              <a:buSzPts val="1100"/>
+              <a:buChar char="●"/>
+            </a:pPr>
+            <a:r>
+              <a:rPr lang="en-US" sz="1100">
+                <a:solidFill>
+                  <a:schemeClr val="dk1"/>
+                </a:solidFill>
+              </a:rPr>
+              <a:t>Test whether medium-resolution Copernicus satellite data (Sentinel-1 SAR, Sentinel-2 optical) can assess building damage during disasters</a:t>
+            </a:r>
+            <a:endParaRPr sz="1100">
+              <a:solidFill>
+                <a:schemeClr val="dk1"/>
+              </a:solidFill>
+            </a:endParaRPr>
+          </a:p>
+          <a:p>
+            <a:pPr indent="-298450" lvl="0" marL="457200" rtl="0" algn="l">
+              <a:lnSpc>
+                <a:spcPct val="115000"/>
+              </a:lnSpc>
+              <a:spcBef>
+                <a:spcPts val="0"/>
+              </a:spcBef>
+              <a:spcAft>
+                <a:spcPts val="0"/>
+              </a:spcAft>
+              <a:buClr>
+                <a:schemeClr val="dk1"/>
+              </a:buClr>
+              <a:buSzPts val="1100"/>
+              <a:buChar char="●"/>
+            </a:pPr>
+            <a:r>
+              <a:rPr lang="en-US" sz="1100">
+                <a:solidFill>
+                  <a:schemeClr val="dk1"/>
+                </a:solidFill>
+              </a:rPr>
+              <a:t>Created xBD-S12 dataset by aligning Sentinel imagery with existing damage labels</a:t>
+            </a:r>
+            <a:endParaRPr sz="1100">
+              <a:solidFill>
+                <a:schemeClr val="dk1"/>
+              </a:solidFill>
+            </a:endParaRPr>
+          </a:p>
+          <a:p>
+            <a:pPr indent="-298450" lvl="0" marL="457200" rtl="0" algn="l">
+              <a:lnSpc>
+                <a:spcPct val="115000"/>
+              </a:lnSpc>
+              <a:spcBef>
+                <a:spcPts val="0"/>
+              </a:spcBef>
+              <a:spcAft>
+                <a:spcPts val="0"/>
+              </a:spcAft>
+              <a:buClr>
+                <a:schemeClr val="dk1"/>
+              </a:buClr>
+              <a:buSzPts val="1100"/>
+              <a:buChar char="●"/>
+            </a:pPr>
+            <a:r>
+              <a:rPr lang="en-US" sz="1100">
+                <a:solidFill>
+                  <a:schemeClr val="dk1"/>
+                </a:solidFill>
+              </a:rPr>
+              <a:t>Trained multiple architectures including geospatial foundation models (Prithvi-EO-2.0, DOFA</a:t>
+            </a:r>
+            <a:endParaRPr>
+              <a:solidFill>
+                <a:schemeClr val="dk1"/>
+              </a:solidFill>
+              <a:latin typeface="Calibri"/>
+              <a:ea typeface="Calibri"/>
+              <a:cs typeface="Calibri"/>
+              <a:sym typeface="Calibri"/>
+            </a:endParaRPr>
+          </a:p>
+        </p:txBody>
+      </p:sp>
+      <p:sp>
+        <p:nvSpPr>
+          <p:cNvPr id="336" name="Google Shape;336;p28"/>
+          <p:cNvSpPr/>
+          <p:nvPr/>
+        </p:nvSpPr>
+        <p:spPr>
+          <a:xfrm>
+            <a:off x="4472250" y="2259450"/>
+            <a:ext cx="3247500" cy="2339100"/>
+          </a:xfrm>
+          <a:prstGeom prst="roundRect">
+            <a:avLst>
+              <a:gd fmla="val 16667" name="adj"/>
+            </a:avLst>
+          </a:prstGeom>
+          <a:solidFill>
+            <a:srgbClr val="6AA84F"/>
+          </a:solidFill>
+          <a:ln cap="flat" cmpd="sng" w="9525">
+            <a:solidFill>
+              <a:srgbClr val="B45F06"/>
+            </a:solidFill>
+            <a:prstDash val="solid"/>
+            <a:round/>
+            <a:headEnd len="sm" w="sm" type="none"/>
+            <a:tailEnd len="sm" w="sm" type="none"/>
+          </a:ln>
+        </p:spPr>
+        <p:txBody>
+          <a:bodyPr anchorCtr="0" anchor="ctr" bIns="91425" lIns="91425" spcFirstLastPara="1" rIns="91425" wrap="square" tIns="91425">
+            <a:noAutofit/>
+          </a:bodyPr>
+          <a:lstStyle/>
+          <a:p>
+            <a:pPr indent="0" lvl="0" marL="0" rtl="0" algn="l">
+              <a:lnSpc>
+                <a:spcPct val="115000"/>
+              </a:lnSpc>
+              <a:spcBef>
+                <a:spcPts val="1200"/>
+              </a:spcBef>
+              <a:spcAft>
+                <a:spcPts val="0"/>
+              </a:spcAft>
+              <a:buNone/>
+            </a:pPr>
+            <a:r>
+              <a:rPr b="1" lang="en-US" sz="1100">
+                <a:solidFill>
+                  <a:schemeClr val="lt1"/>
+                </a:solidFill>
+              </a:rPr>
+              <a:t>                   </a:t>
+            </a:r>
+            <a:r>
+              <a:rPr lang="en-US" sz="1100">
+                <a:solidFill>
+                  <a:schemeClr val="dk1"/>
+                </a:solidFill>
+              </a:rPr>
+              <a:t>    </a:t>
+            </a:r>
+            <a:r>
+              <a:rPr b="1" lang="en-US" sz="1100">
+                <a:solidFill>
+                  <a:schemeClr val="dk1"/>
+                </a:solidFill>
+              </a:rPr>
+              <a:t> </a:t>
+            </a:r>
+            <a:r>
+              <a:rPr b="1" lang="en-US" sz="1100">
+                <a:solidFill>
+                  <a:schemeClr val="dk1"/>
+                </a:solidFill>
+              </a:rPr>
+              <a:t>Key Methods</a:t>
+            </a:r>
+            <a:endParaRPr b="1" sz="1100">
+              <a:solidFill>
+                <a:schemeClr val="dk1"/>
+              </a:solidFill>
+            </a:endParaRPr>
+          </a:p>
+          <a:p>
+            <a:pPr indent="-298450" lvl="0" marL="457200" rtl="0" algn="l">
+              <a:lnSpc>
+                <a:spcPct val="115000"/>
+              </a:lnSpc>
+              <a:spcBef>
+                <a:spcPts val="1200"/>
+              </a:spcBef>
+              <a:spcAft>
+                <a:spcPts val="0"/>
+              </a:spcAft>
+              <a:buClr>
+                <a:schemeClr val="dk1"/>
+              </a:buClr>
+              <a:buSzPts val="1100"/>
+              <a:buChar char="●"/>
+            </a:pPr>
+            <a:r>
+              <a:rPr lang="en-US" sz="1100">
+                <a:solidFill>
+                  <a:schemeClr val="dk1"/>
+                </a:solidFill>
+              </a:rPr>
+              <a:t>Corrected geolocation errors using building footprints</a:t>
+            </a:r>
+            <a:endParaRPr sz="1100">
+              <a:solidFill>
+                <a:schemeClr val="dk1"/>
+              </a:solidFill>
+            </a:endParaRPr>
+          </a:p>
+          <a:p>
+            <a:pPr indent="-298450" lvl="0" marL="457200" rtl="0" algn="l">
+              <a:lnSpc>
+                <a:spcPct val="115000"/>
+              </a:lnSpc>
+              <a:spcBef>
+                <a:spcPts val="0"/>
+              </a:spcBef>
+              <a:spcAft>
+                <a:spcPts val="0"/>
+              </a:spcAft>
+              <a:buClr>
+                <a:schemeClr val="dk1"/>
+              </a:buClr>
+              <a:buSzPts val="1100"/>
+              <a:buChar char="●"/>
+            </a:pPr>
+            <a:r>
+              <a:rPr lang="en-US" sz="1100">
+                <a:solidFill>
+                  <a:schemeClr val="dk1"/>
+                </a:solidFill>
+              </a:rPr>
+              <a:t>Compared early vs. late fusion strategies</a:t>
+            </a:r>
+            <a:endParaRPr sz="1100">
+              <a:solidFill>
+                <a:schemeClr val="dk1"/>
+              </a:solidFill>
+            </a:endParaRPr>
+          </a:p>
+          <a:p>
+            <a:pPr indent="-298450" lvl="0" marL="457200" rtl="0" algn="l">
+              <a:lnSpc>
+                <a:spcPct val="115000"/>
+              </a:lnSpc>
+              <a:spcBef>
+                <a:spcPts val="0"/>
+              </a:spcBef>
+              <a:spcAft>
+                <a:spcPts val="0"/>
+              </a:spcAft>
+              <a:buClr>
+                <a:schemeClr val="dk1"/>
+              </a:buClr>
+              <a:buSzPts val="1100"/>
+              <a:buChar char="●"/>
+            </a:pPr>
+            <a:r>
+              <a:rPr lang="en-US" sz="1100">
+                <a:solidFill>
+                  <a:schemeClr val="dk1"/>
+                </a:solidFill>
+              </a:rPr>
+              <a:t>Applied morphological buffers to handle coregistration errors</a:t>
+            </a:r>
+            <a:endParaRPr sz="1100">
+              <a:solidFill>
+                <a:schemeClr val="dk1"/>
+              </a:solidFill>
+            </a:endParaRPr>
+          </a:p>
+          <a:p>
+            <a:pPr indent="-298450" lvl="0" marL="457200" rtl="0" algn="l">
+              <a:lnSpc>
+                <a:spcPct val="115000"/>
+              </a:lnSpc>
+              <a:spcBef>
+                <a:spcPts val="0"/>
+              </a:spcBef>
+              <a:spcAft>
+                <a:spcPts val="0"/>
+              </a:spcAft>
+              <a:buClr>
+                <a:schemeClr val="dk1"/>
+              </a:buClr>
+              <a:buSzPts val="1100"/>
+              <a:buChar char="●"/>
+            </a:pPr>
+            <a:r>
+              <a:rPr lang="en-US" sz="1100">
+                <a:solidFill>
+                  <a:schemeClr val="dk1"/>
+                </a:solidFill>
+              </a:rPr>
+              <a:t>Used ensemble methods and biased sampling for class imbalance</a:t>
+            </a:r>
+            <a:endParaRPr sz="1100">
+              <a:solidFill>
+                <a:schemeClr val="dk1"/>
+              </a:solidFill>
+            </a:endParaRPr>
+          </a:p>
+        </p:txBody>
+      </p:sp>
+      <p:sp>
+        <p:nvSpPr>
+          <p:cNvPr id="337" name="Google Shape;337;p28"/>
+          <p:cNvSpPr/>
+          <p:nvPr/>
+        </p:nvSpPr>
+        <p:spPr>
+          <a:xfrm>
+            <a:off x="8431388" y="2216700"/>
+            <a:ext cx="3247500" cy="2424600"/>
+          </a:xfrm>
+          <a:prstGeom prst="roundRect">
+            <a:avLst>
+              <a:gd fmla="val 16667" name="adj"/>
+            </a:avLst>
+          </a:prstGeom>
+          <a:solidFill>
+            <a:srgbClr val="6AA84F"/>
+          </a:solidFill>
+          <a:ln cap="flat" cmpd="sng" w="9525">
+            <a:solidFill>
+              <a:srgbClr val="B45F06"/>
+            </a:solidFill>
+            <a:prstDash val="solid"/>
+            <a:round/>
+            <a:headEnd len="sm" w="sm" type="none"/>
+            <a:tailEnd len="sm" w="sm" type="none"/>
+          </a:ln>
+        </p:spPr>
+        <p:txBody>
+          <a:bodyPr anchorCtr="0" anchor="ctr" bIns="91425" lIns="91425" spcFirstLastPara="1" rIns="91425" wrap="square" tIns="91425">
+            <a:noAutofit/>
+          </a:bodyPr>
+          <a:lstStyle/>
+          <a:p>
+            <a:pPr indent="0" lvl="0" marL="0" rtl="0" algn="l">
+              <a:lnSpc>
+                <a:spcPct val="115000"/>
+              </a:lnSpc>
+              <a:spcBef>
+                <a:spcPts val="1200"/>
+              </a:spcBef>
+              <a:spcAft>
+                <a:spcPts val="0"/>
+              </a:spcAft>
+              <a:buNone/>
+            </a:pPr>
+            <a:r>
+              <a:rPr b="1" lang="en-US" sz="1100">
+                <a:solidFill>
+                  <a:schemeClr val="lt1"/>
+                </a:solidFill>
+              </a:rPr>
+              <a:t>                     </a:t>
+            </a:r>
+            <a:r>
+              <a:rPr b="1" lang="en-US" sz="1100">
+                <a:solidFill>
+                  <a:schemeClr val="dk1"/>
+                </a:solidFill>
+              </a:rPr>
+              <a:t>        </a:t>
+            </a:r>
+            <a:r>
+              <a:rPr b="1" lang="en-US" sz="1100">
+                <a:solidFill>
+                  <a:schemeClr val="dk1"/>
+                </a:solidFill>
+              </a:rPr>
+              <a:t>Results</a:t>
+            </a:r>
+            <a:endParaRPr b="1" sz="1100">
+              <a:solidFill>
+                <a:schemeClr val="dk1"/>
+              </a:solidFill>
+            </a:endParaRPr>
+          </a:p>
+          <a:p>
+            <a:pPr indent="-298450" lvl="0" marL="457200" rtl="0" algn="l">
+              <a:lnSpc>
+                <a:spcPct val="115000"/>
+              </a:lnSpc>
+              <a:spcBef>
+                <a:spcPts val="1200"/>
+              </a:spcBef>
+              <a:spcAft>
+                <a:spcPts val="0"/>
+              </a:spcAft>
+              <a:buClr>
+                <a:schemeClr val="dk1"/>
+              </a:buClr>
+              <a:buSzPts val="1100"/>
+              <a:buChar char="●"/>
+            </a:pPr>
+            <a:r>
+              <a:rPr lang="en-US" sz="1100">
+                <a:solidFill>
+                  <a:schemeClr val="dk1"/>
+                </a:solidFill>
+              </a:rPr>
+              <a:t>Evaluated using F1 scores for building localization and damage classification</a:t>
+            </a:r>
+            <a:endParaRPr sz="1100">
+              <a:solidFill>
+                <a:schemeClr val="dk1"/>
+              </a:solidFill>
+            </a:endParaRPr>
+          </a:p>
+          <a:p>
+            <a:pPr indent="-298450" lvl="0" marL="457200" rtl="0" algn="l">
+              <a:lnSpc>
+                <a:spcPct val="115000"/>
+              </a:lnSpc>
+              <a:spcBef>
+                <a:spcPts val="0"/>
+              </a:spcBef>
+              <a:spcAft>
+                <a:spcPts val="0"/>
+              </a:spcAft>
+              <a:buClr>
+                <a:schemeClr val="dk1"/>
+              </a:buClr>
+              <a:buSzPts val="1100"/>
+              <a:buChar char="●"/>
+            </a:pPr>
+            <a:r>
+              <a:rPr lang="en-US" sz="1100">
+                <a:solidFill>
+                  <a:schemeClr val="dk1"/>
+                </a:solidFill>
+              </a:rPr>
+              <a:t>Tested on both random splits and geographically separated events</a:t>
+            </a:r>
+            <a:endParaRPr sz="1100">
+              <a:solidFill>
+                <a:schemeClr val="dk1"/>
+              </a:solidFill>
+            </a:endParaRPr>
+          </a:p>
+          <a:p>
+            <a:pPr indent="-298450" lvl="0" marL="457200" rtl="0" algn="l">
+              <a:lnSpc>
+                <a:spcPct val="115000"/>
+              </a:lnSpc>
+              <a:spcBef>
+                <a:spcPts val="0"/>
+              </a:spcBef>
+              <a:spcAft>
+                <a:spcPts val="0"/>
+              </a:spcAft>
+              <a:buClr>
+                <a:schemeClr val="dk1"/>
+              </a:buClr>
+              <a:buSzPts val="1100"/>
+              <a:buChar char="●"/>
+            </a:pPr>
+            <a:r>
+              <a:rPr lang="en-US" sz="1100">
+                <a:solidFill>
+                  <a:schemeClr val="dk1"/>
+                </a:solidFill>
+              </a:rPr>
+              <a:t>Validated with real-world case studies (Mexico earthquake, Palisades fire)</a:t>
+            </a:r>
+            <a:endParaRPr b="1" sz="1100">
+              <a:solidFill>
+                <a:schemeClr val="dk1"/>
+              </a:solidFill>
+            </a:endParaRPr>
+          </a:p>
+        </p:txBody>
+      </p:sp>
+      <p:pic>
+        <p:nvPicPr>
+          <p:cNvPr descr="image.png" id="338" name="Google Shape;338;p28"/>
+          <p:cNvPicPr preferRelativeResize="0"/>
+          <p:nvPr/>
+        </p:nvPicPr>
+        <p:blipFill rotWithShape="1">
+          <a:blip r:embed="rId4">
+            <a:alphaModFix/>
+          </a:blip>
+          <a:srcRect b="0" l="0" r="0" t="0"/>
+          <a:stretch/>
+        </p:blipFill>
+        <p:spPr>
+          <a:xfrm>
+            <a:off x="571500" y="6257925"/>
+            <a:ext cx="11049000" cy="314325"/>
+          </a:xfrm>
+          <a:prstGeom prst="rect">
+            <a:avLst/>
+          </a:prstGeom>
+          <a:noFill/>
+          <a:ln>
+            <a:noFill/>
+          </a:ln>
+        </p:spPr>
+      </p:pic>
+      <p:sp>
+        <p:nvSpPr>
+          <p:cNvPr id="339" name="Google Shape;339;p28"/>
+          <p:cNvSpPr txBox="1"/>
+          <p:nvPr/>
+        </p:nvSpPr>
+        <p:spPr>
+          <a:xfrm>
+            <a:off x="571500" y="6410325"/>
+            <a:ext cx="485700" cy="161700"/>
+          </a:xfrm>
+          <a:prstGeom prst="rect">
+            <a:avLst/>
+          </a:prstGeom>
+          <a:noFill/>
+          <a:ln>
+            <a:noFill/>
+          </a:ln>
+        </p:spPr>
+        <p:txBody>
+          <a:bodyPr anchorCtr="0" anchor="t" bIns="0" lIns="0" spcFirstLastPara="1" rIns="0" wrap="square" tIns="0">
+            <a:spAutoFit/>
+          </a:bodyPr>
+          <a:lstStyle/>
+          <a:p>
+            <a:pPr indent="0" lvl="0" marL="0" marR="0" rtl="0" algn="l">
+              <a:spcBef>
+                <a:spcPts val="0"/>
+              </a:spcBef>
+              <a:spcAft>
+                <a:spcPts val="0"/>
+              </a:spcAft>
+              <a:buNone/>
+            </a:pPr>
+            <a:r>
+              <a:rPr b="0" i="0" lang="en-US" sz="1050" u="none" cap="none" strike="noStrike">
+                <a:solidFill>
+                  <a:srgbClr val="94A3B8"/>
+                </a:solidFill>
+                <a:latin typeface="Urbanist SemiBold"/>
+                <a:ea typeface="Urbanist SemiBold"/>
+                <a:cs typeface="Urbanist SemiBold"/>
+                <a:sym typeface="Urbanist SemiBold"/>
+              </a:rPr>
+              <a:t>Group 5</a:t>
+            </a:r>
+            <a:endParaRPr/>
+          </a:p>
+        </p:txBody>
+      </p:sp>
+      <p:sp>
+        <p:nvSpPr>
+          <p:cNvPr id="340" name="Google Shape;340;p28"/>
+          <p:cNvSpPr txBox="1"/>
+          <p:nvPr/>
+        </p:nvSpPr>
+        <p:spPr>
+          <a:xfrm>
+            <a:off x="5114925" y="6410438"/>
+            <a:ext cx="7048500" cy="161700"/>
+          </a:xfrm>
+          <a:prstGeom prst="rect">
+            <a:avLst/>
+          </a:prstGeom>
+          <a:noFill/>
+          <a:ln>
+            <a:noFill/>
+          </a:ln>
+        </p:spPr>
+        <p:txBody>
+          <a:bodyPr anchorCtr="0" anchor="t" bIns="0" lIns="0" spcFirstLastPara="1" rIns="0" wrap="square" tIns="0">
+            <a:spAutoFit/>
+          </a:bodyPr>
+          <a:lstStyle/>
+          <a:p>
+            <a:pPr indent="0" lvl="0" marL="0" marR="0" rtl="0" algn="l">
+              <a:spcBef>
+                <a:spcPts val="0"/>
+              </a:spcBef>
+              <a:spcAft>
+                <a:spcPts val="0"/>
+              </a:spcAft>
+              <a:buNone/>
+            </a:pPr>
+            <a:r>
+              <a:rPr b="0" i="0" lang="en-US" sz="1050" u="none" cap="none" strike="noStrike">
+                <a:solidFill>
+                  <a:srgbClr val="64748B"/>
+                </a:solidFill>
+                <a:latin typeface="Urbanist"/>
+                <a:ea typeface="Urbanist"/>
+                <a:cs typeface="Urbanist"/>
+                <a:sym typeface="Urbanist"/>
+              </a:rPr>
+              <a:t>Abdullah Al Noman · Tamanna Akter Mou · Aryan Sami · Ridita Afrin Riya · Abrar Mohammed Tanzim Alam</a:t>
+            </a:r>
+            <a:endParaRPr/>
+          </a:p>
+        </p:txBody>
+      </p:sp>
+    </p:spTree>
+  </p:cSld>
+  <p:clrMapOvr>
+    <a:masterClrMapping/>
+  </p:clrMapOvr>
+</p:sld>
+</file>
+
+<file path=ppt/slides/slide17.xml><?xml version="1.0" encoding="utf-8"?>
+<p:sld xmlns:a="http://schemas.openxmlformats.org/drawingml/2006/main" xmlns:r="http://schemas.openxmlformats.org/officeDocument/2006/relationships" xmlns:mc="http://schemas.openxmlformats.org/markup-compatibility/2006" xmlns:mv="urn:schemas-microsoft-com:mac:vml" xmlns:p="http://schemas.openxmlformats.org/presentationml/2006/main" xmlns:c="http://schemas.openxmlformats.org/drawingml/2006/chart" xmlns:dgm="http://schemas.openxmlformats.org/drawingml/2006/diagram" xmlns:o="urn:schemas-microsoft-com:office:office" xmlns:v="urn:schemas-microsoft-com:vml" xmlns:pvml="urn:schemas-microsoft-com:office:powerpoint" xmlns:com="http://schemas.openxmlformats.org/drawingml/2006/compatibility" xmlns:p14="http://schemas.microsoft.com/office/powerpoint/2010/main" xmlns:p15="http://schemas.microsoft.com/office/powerpoint/2012/main" xmlns:ahyp="http://schemas.microsoft.com/office/drawing/2018/hyperlinkcolor">
+  <p:cSld>
+    <p:bg>
+      <p:bgPr>
+        <a:solidFill>
+          <a:srgbClr val="020617"/>
+        </a:solidFill>
+      </p:bgPr>
+    </p:bg>
+    <p:spTree>
+      <p:nvGrpSpPr>
+        <p:cNvPr id="344" name="Shape 344"/>
         <p:cNvGrpSpPr/>
         <p:nvPr/>
       </p:nvGrpSpPr>
@@ -12571,7 +12750,7 @@
       </p:grpSpPr>
       <p:pic>
         <p:nvPicPr>
-          <p:cNvPr descr="image.png" id="338" name="Google Shape;338;p28"/>
+          <p:cNvPr descr="image.png" id="345" name="Google Shape;345;p29"/>
           <p:cNvPicPr preferRelativeResize="0"/>
           <p:nvPr/>
         </p:nvPicPr>
@@ -12598,13 +12777,13 @@
       </p:pic>
       <p:sp>
         <p:nvSpPr>
-          <p:cNvPr id="339" name="Google Shape;339;p28"/>
+          <p:cNvPr id="346" name="Google Shape;346;p29"/>
           <p:cNvSpPr txBox="1"/>
           <p:nvPr/>
         </p:nvSpPr>
         <p:spPr>
           <a:xfrm>
-            <a:off x="762000" y="971550"/>
+            <a:off x="-3540875" y="1024775"/>
             <a:ext cx="11401500" cy="215400"/>
           </a:xfrm>
           <a:prstGeom prst="rect">
@@ -12639,196 +12818,22 @@
       </p:sp>
       <p:sp>
         <p:nvSpPr>
-          <p:cNvPr id="340" name="Google Shape;340;p28"/>
-          <p:cNvSpPr txBox="1"/>
-          <p:nvPr/>
-        </p:nvSpPr>
-        <p:spPr>
-          <a:xfrm>
-            <a:off x="904875" y="2557462"/>
-            <a:ext cx="4953000" cy="215400"/>
-          </a:xfrm>
-          <a:prstGeom prst="rect">
-            <a:avLst/>
-          </a:prstGeom>
-          <a:noFill/>
-          <a:ln>
-            <a:noFill/>
-          </a:ln>
-        </p:spPr>
-        <p:txBody>
-          <a:bodyPr anchorCtr="0" anchor="t" bIns="0" lIns="0" spcFirstLastPara="1" rIns="0" wrap="square" tIns="0">
-            <a:spAutoFit/>
-          </a:bodyPr>
-          <a:lstStyle/>
-          <a:p>
-            <a:pPr indent="0" lvl="0" marL="0" marR="0" rtl="0" algn="l">
-              <a:lnSpc>
-                <a:spcPct val="160000"/>
-              </a:lnSpc>
-              <a:spcBef>
-                <a:spcPts val="0"/>
-              </a:spcBef>
-              <a:spcAft>
-                <a:spcPts val="0"/>
-              </a:spcAft>
-              <a:buNone/>
-            </a:pPr>
-            <a:r>
-              <a:t/>
-            </a:r>
-            <a:endParaRPr/>
-          </a:p>
-        </p:txBody>
-      </p:sp>
-      <p:sp>
-        <p:nvSpPr>
-          <p:cNvPr id="341" name="Google Shape;341;p28"/>
-          <p:cNvSpPr txBox="1"/>
-          <p:nvPr/>
-        </p:nvSpPr>
-        <p:spPr>
-          <a:xfrm>
-            <a:off x="904875" y="3309937"/>
-            <a:ext cx="4953000" cy="215400"/>
-          </a:xfrm>
-          <a:prstGeom prst="rect">
-            <a:avLst/>
-          </a:prstGeom>
-          <a:noFill/>
-          <a:ln>
-            <a:noFill/>
-          </a:ln>
-        </p:spPr>
-        <p:txBody>
-          <a:bodyPr anchorCtr="0" anchor="t" bIns="0" lIns="0" spcFirstLastPara="1" rIns="0" wrap="square" tIns="0">
-            <a:spAutoFit/>
-          </a:bodyPr>
-          <a:lstStyle/>
-          <a:p>
-            <a:pPr indent="0" lvl="0" marL="0" marR="0" rtl="0" algn="l">
-              <a:lnSpc>
-                <a:spcPct val="160000"/>
-              </a:lnSpc>
-              <a:spcBef>
-                <a:spcPts val="0"/>
-              </a:spcBef>
-              <a:spcAft>
-                <a:spcPts val="0"/>
-              </a:spcAft>
-              <a:buNone/>
-            </a:pPr>
-            <a:r>
-              <a:t/>
-            </a:r>
-            <a:endParaRPr/>
-          </a:p>
-        </p:txBody>
-      </p:sp>
-      <p:sp>
-        <p:nvSpPr>
-          <p:cNvPr id="342" name="Google Shape;342;p28"/>
-          <p:cNvSpPr txBox="1"/>
-          <p:nvPr/>
-        </p:nvSpPr>
-        <p:spPr>
-          <a:xfrm>
-            <a:off x="904875" y="4062412"/>
-            <a:ext cx="4953000" cy="215400"/>
-          </a:xfrm>
-          <a:prstGeom prst="rect">
-            <a:avLst/>
-          </a:prstGeom>
-          <a:noFill/>
-          <a:ln>
-            <a:noFill/>
-          </a:ln>
-        </p:spPr>
-        <p:txBody>
-          <a:bodyPr anchorCtr="0" anchor="t" bIns="0" lIns="0" spcFirstLastPara="1" rIns="0" wrap="square" tIns="0">
-            <a:spAutoFit/>
-          </a:bodyPr>
-          <a:lstStyle/>
-          <a:p>
-            <a:pPr indent="0" lvl="0" marL="0" marR="0" rtl="0" algn="l">
-              <a:lnSpc>
-                <a:spcPct val="160000"/>
-              </a:lnSpc>
-              <a:spcBef>
-                <a:spcPts val="0"/>
-              </a:spcBef>
-              <a:spcAft>
-                <a:spcPts val="0"/>
-              </a:spcAft>
-              <a:buNone/>
-            </a:pPr>
-            <a:r>
-              <a:t/>
-            </a:r>
-            <a:endParaRPr/>
-          </a:p>
-        </p:txBody>
-      </p:sp>
-      <p:sp>
-        <p:nvSpPr>
-          <p:cNvPr id="343" name="Google Shape;343;p28"/>
-          <p:cNvSpPr txBox="1"/>
-          <p:nvPr/>
-        </p:nvSpPr>
-        <p:spPr>
-          <a:xfrm>
-            <a:off x="904875" y="4814887"/>
-            <a:ext cx="4953000" cy="215400"/>
-          </a:xfrm>
-          <a:prstGeom prst="rect">
-            <a:avLst/>
-          </a:prstGeom>
-          <a:noFill/>
-          <a:ln>
-            <a:noFill/>
-          </a:ln>
-        </p:spPr>
-        <p:txBody>
-          <a:bodyPr anchorCtr="0" anchor="t" bIns="0" lIns="0" spcFirstLastPara="1" rIns="0" wrap="square" tIns="0">
-            <a:spAutoFit/>
-          </a:bodyPr>
-          <a:lstStyle/>
-          <a:p>
-            <a:pPr indent="0" lvl="0" marL="0" marR="0" rtl="0" algn="l">
-              <a:lnSpc>
-                <a:spcPct val="160000"/>
-              </a:lnSpc>
-              <a:spcBef>
-                <a:spcPts val="0"/>
-              </a:spcBef>
-              <a:spcAft>
-                <a:spcPts val="0"/>
-              </a:spcAft>
-              <a:buNone/>
-            </a:pPr>
-            <a:r>
-              <a:t/>
-            </a:r>
-            <a:endParaRPr/>
-          </a:p>
-        </p:txBody>
-      </p:sp>
-      <p:sp>
-        <p:nvSpPr>
-          <p:cNvPr id="344" name="Google Shape;344;p28"/>
+          <p:cNvPr id="347" name="Google Shape;347;p29"/>
           <p:cNvSpPr/>
           <p:nvPr/>
         </p:nvSpPr>
         <p:spPr>
           <a:xfrm>
-            <a:off x="8660650" y="1685925"/>
+            <a:off x="8516825" y="2216700"/>
             <a:ext cx="3247500" cy="2424600"/>
           </a:xfrm>
-          <a:prstGeom prst="rect">
-            <a:avLst/>
+          <a:prstGeom prst="roundRect">
+            <a:avLst>
+              <a:gd fmla="val 16667" name="adj"/>
+            </a:avLst>
           </a:prstGeom>
           <a:solidFill>
-            <a:srgbClr val="6FA8DC"/>
+            <a:srgbClr val="6AA84F"/>
           </a:solidFill>
           <a:ln cap="flat" cmpd="sng" w="9525">
             <a:solidFill>
@@ -12913,7 +12918,7 @@
                   <a:schemeClr val="dk1"/>
                 </a:solidFill>
               </a:rPr>
-              <a:t>              Relevance to Your Project</a:t>
+              <a:t>              Relevance to our Project</a:t>
             </a:r>
             <a:endParaRPr b="1" sz="1100">
               <a:solidFill>
@@ -13062,20 +13067,22 @@
       </p:sp>
       <p:sp>
         <p:nvSpPr>
-          <p:cNvPr id="345" name="Google Shape;345;p28"/>
+          <p:cNvPr id="348" name="Google Shape;348;p29"/>
           <p:cNvSpPr/>
           <p:nvPr/>
         </p:nvSpPr>
         <p:spPr>
           <a:xfrm>
-            <a:off x="4417650" y="1685825"/>
+            <a:off x="4472250" y="2216700"/>
             <a:ext cx="3247500" cy="2424600"/>
           </a:xfrm>
-          <a:prstGeom prst="rect">
-            <a:avLst/>
+          <a:prstGeom prst="roundRect">
+            <a:avLst>
+              <a:gd fmla="val 16667" name="adj"/>
+            </a:avLst>
           </a:prstGeom>
           <a:solidFill>
-            <a:srgbClr val="6FA8DC"/>
+            <a:srgbClr val="6AA84F"/>
           </a:solidFill>
           <a:ln cap="flat" cmpd="sng" w="9525">
             <a:solidFill>
@@ -13251,20 +13258,22 @@
       </p:sp>
       <p:sp>
         <p:nvSpPr>
-          <p:cNvPr id="346" name="Google Shape;346;p28"/>
+          <p:cNvPr id="349" name="Google Shape;349;p29"/>
           <p:cNvSpPr/>
           <p:nvPr/>
         </p:nvSpPr>
         <p:spPr>
           <a:xfrm>
-            <a:off x="571500" y="1609475"/>
+            <a:off x="427675" y="2216700"/>
             <a:ext cx="3247500" cy="2424600"/>
           </a:xfrm>
-          <a:prstGeom prst="rect">
-            <a:avLst/>
+          <a:prstGeom prst="roundRect">
+            <a:avLst>
+              <a:gd fmla="val 16667" name="adj"/>
+            </a:avLst>
           </a:prstGeom>
           <a:solidFill>
-            <a:srgbClr val="6FA8DC"/>
+            <a:srgbClr val="6AA84F"/>
           </a:solidFill>
           <a:ln cap="flat" cmpd="sng" w="9525">
             <a:solidFill>
@@ -13435,7 +13444,7 @@
       </p:sp>
       <p:pic>
         <p:nvPicPr>
-          <p:cNvPr descr="image.png" id="347" name="Google Shape;347;p28"/>
+          <p:cNvPr descr="image.png" id="350" name="Google Shape;350;p29"/>
           <p:cNvPicPr preferRelativeResize="0"/>
           <p:nvPr/>
         </p:nvPicPr>
@@ -13462,7 +13471,7 @@
       </p:pic>
       <p:sp>
         <p:nvSpPr>
-          <p:cNvPr id="348" name="Google Shape;348;p28"/>
+          <p:cNvPr id="351" name="Google Shape;351;p29"/>
           <p:cNvSpPr txBox="1"/>
           <p:nvPr/>
         </p:nvSpPr>
@@ -13512,7 +13521,7 @@
       </p:sp>
       <p:sp>
         <p:nvSpPr>
-          <p:cNvPr id="349" name="Google Shape;349;p28"/>
+          <p:cNvPr id="352" name="Google Shape;352;p29"/>
           <p:cNvSpPr txBox="1"/>
           <p:nvPr/>
         </p:nvSpPr>
@@ -13557,6 +13566,63 @@
               <a:t>Abdullah Al Noman · Tamanna Akter Mou · Aryan Sami · Ridita Afrin Riya · Abrar Mohammed Tanzim Alam</a:t>
             </a:r>
             <a:endParaRPr/>
+          </a:p>
+        </p:txBody>
+      </p:sp>
+      <p:sp>
+        <p:nvSpPr>
+          <p:cNvPr id="353" name="Google Shape;353;p29"/>
+          <p:cNvSpPr txBox="1"/>
+          <p:nvPr/>
+        </p:nvSpPr>
+        <p:spPr>
+          <a:xfrm>
+            <a:off x="1548725" y="1169275"/>
+            <a:ext cx="1747696" cy="490500"/>
+          </a:xfrm>
+          <a:prstGeom prst="rect">
+            <a:avLst/>
+          </a:prstGeom>
+          <a:noFill/>
+          <a:ln>
+            <a:noFill/>
+          </a:ln>
+        </p:spPr>
+        <p:txBody>
+          <a:bodyPr anchorCtr="0" anchor="t" bIns="91425" lIns="91425" spcFirstLastPara="1" rIns="91425" wrap="square" tIns="91425">
+            <a:noAutofit/>
+          </a:bodyPr>
+          <a:lstStyle/>
+          <a:p>
+            <a:pPr indent="0" lvl="0" marL="0" rtl="0" algn="l">
+              <a:lnSpc>
+                <a:spcPct val="115000"/>
+              </a:lnSpc>
+              <a:spcBef>
+                <a:spcPts val="2400"/>
+              </a:spcBef>
+              <a:spcAft>
+                <a:spcPts val="600"/>
+              </a:spcAft>
+              <a:buClr>
+                <a:schemeClr val="dk1"/>
+              </a:buClr>
+              <a:buSzPts val="1100"/>
+              <a:buFont typeface="Arial"/>
+              <a:buNone/>
+            </a:pPr>
+            <a:r>
+              <a:t/>
+            </a:r>
+            <a:endParaRPr sz="3200">
+              <a:solidFill>
+                <a:srgbClr val="4ADE80"/>
+              </a:solidFill>
+              <a:latin typeface="Calibri"/>
+              <a:ea typeface="Calibri"/>
+              <a:cs typeface="Calibri"/>
+              <a:sym typeface="Calibri"/>
+            </a:endParaRPr>
           </a:p>
         </p:txBody>
       </p:sp>
@@ -13568,12 +13634,12 @@
 </p:sld>
 </file>
 
-<file path=ppt/slides/slide17.xml><?xml version="1.0" encoding="utf-8"?>
+<file path=ppt/slides/slide18.xml><?xml version="1.0" encoding="utf-8"?>
 <p:sld xmlns:a="http://schemas.openxmlformats.org/drawingml/2006/main" xmlns:r="http://schemas.openxmlformats.org/officeDocument/2006/relationships" xmlns:mc="http://schemas.openxmlformats.org/markup-compatibility/2006" xmlns:mv="urn:schemas-microsoft-com:mac:vml" xmlns:p="http://schemas.openxmlformats.org/presentationml/2006/main" xmlns:c="http://schemas.openxmlformats.org/drawingml/2006/chart" xmlns:dgm="http://schemas.openxmlformats.org/drawingml/2006/diagram" xmlns:o="urn:schemas-microsoft-com:office:office" xmlns:v="urn:schemas-microsoft-com:vml" xmlns:pvml="urn:schemas-microsoft-com:office:powerpoint" xmlns:com="http://schemas.openxmlformats.org/drawingml/2006/compatibility" xmlns:p14="http://schemas.microsoft.com/office/powerpoint/2010/main" xmlns:p15="http://schemas.microsoft.com/office/powerpoint/2012/main" xmlns:ahyp="http://schemas.microsoft.com/office/drawing/2018/hyperlinkcolor">
   <p:cSld>
     <p:spTree>
       <p:nvGrpSpPr>
-        <p:cNvPr id="353" name="Shape 353"/>
+        <p:cNvPr id="357" name="Shape 357"/>
         <p:cNvGrpSpPr/>
         <p:nvPr/>
       </p:nvGrpSpPr>
@@ -13587,7 +13653,7 @@
       </p:grpSpPr>
       <p:sp>
         <p:nvSpPr>
-          <p:cNvPr id="354" name="Google Shape;354;p29"/>
+          <p:cNvPr id="358" name="Google Shape;358;p30"/>
           <p:cNvSpPr txBox="1"/>
           <p:nvPr/>
         </p:nvSpPr>
@@ -13742,7 +13808,7 @@
       </p:sp>
       <p:sp>
         <p:nvSpPr>
-          <p:cNvPr id="355" name="Google Shape;355;p29"/>
+          <p:cNvPr id="359" name="Google Shape;359;p30"/>
           <p:cNvSpPr txBox="1"/>
           <p:nvPr/>
         </p:nvSpPr>
@@ -13819,7 +13885,7 @@
       </p:sp>
       <p:sp>
         <p:nvSpPr>
-          <p:cNvPr id="356" name="Google Shape;356;p29"/>
+          <p:cNvPr id="360" name="Google Shape;360;p30"/>
           <p:cNvSpPr txBox="1"/>
           <p:nvPr/>
         </p:nvSpPr>
@@ -13860,583 +13926,6 @@
               <a:t>Group 5</a:t>
             </a:r>
             <a:endParaRPr sz="2400">
-              <a:solidFill>
-                <a:srgbClr val="00FF00"/>
-              </a:solidFill>
-            </a:endParaRPr>
-          </a:p>
-        </p:txBody>
-      </p:sp>
-    </p:spTree>
-  </p:cSld>
-  <p:clrMapOvr>
-    <a:masterClrMapping/>
-  </p:clrMapOvr>
-</p:sld>
-</file>
-
-<file path=ppt/slides/slide18.xml><?xml version="1.0" encoding="utf-8"?>
-<p:sld xmlns:a="http://schemas.openxmlformats.org/drawingml/2006/main" xmlns:r="http://schemas.openxmlformats.org/officeDocument/2006/relationships" xmlns:mc="http://schemas.openxmlformats.org/markup-compatibility/2006" xmlns:mv="urn:schemas-microsoft-com:mac:vml" xmlns:p="http://schemas.openxmlformats.org/presentationml/2006/main" xmlns:c="http://schemas.openxmlformats.org/drawingml/2006/chart" xmlns:dgm="http://schemas.openxmlformats.org/drawingml/2006/diagram" xmlns:o="urn:schemas-microsoft-com:office:office" xmlns:v="urn:schemas-microsoft-com:vml" xmlns:pvml="urn:schemas-microsoft-com:office:powerpoint" xmlns:com="http://schemas.openxmlformats.org/drawingml/2006/compatibility" xmlns:p14="http://schemas.microsoft.com/office/powerpoint/2010/main" xmlns:p15="http://schemas.microsoft.com/office/powerpoint/2012/main" xmlns:ahyp="http://schemas.microsoft.com/office/drawing/2018/hyperlinkcolor">
-  <p:cSld>
-    <p:bg>
-      <p:bgPr>
-        <a:solidFill>
-          <a:srgbClr val="1A1A1A"/>
-        </a:solidFill>
-      </p:bgPr>
-    </p:bg>
-    <p:spTree>
-      <p:nvGrpSpPr>
-        <p:cNvPr id="360" name="Shape 360"/>
-        <p:cNvGrpSpPr/>
-        <p:nvPr/>
-      </p:nvGrpSpPr>
-      <p:grpSpPr>
-        <a:xfrm>
-          <a:off x="0" y="0"/>
-          <a:ext cx="0" cy="0"/>
-          <a:chOff x="0" y="0"/>
-          <a:chExt cx="0" cy="0"/>
-        </a:xfrm>
-      </p:grpSpPr>
-      <p:pic>
-        <p:nvPicPr>
-          <p:cNvPr descr="image.png" id="361" name="Google Shape;361;p30"/>
-          <p:cNvPicPr preferRelativeResize="0"/>
-          <p:nvPr/>
-        </p:nvPicPr>
-        <p:blipFill rotWithShape="1">
-          <a:blip r:embed="rId3">
-            <a:alphaModFix/>
-          </a:blip>
-          <a:srcRect b="0" l="0" r="0" t="0"/>
-          <a:stretch/>
-        </p:blipFill>
-        <p:spPr>
-          <a:xfrm>
-            <a:off x="571500" y="205525"/>
-            <a:ext cx="2590800" cy="352425"/>
-          </a:xfrm>
-          <a:prstGeom prst="rect">
-            <a:avLst/>
-          </a:prstGeom>
-          <a:noFill/>
-          <a:ln>
-            <a:noFill/>
-          </a:ln>
-        </p:spPr>
-      </p:pic>
-      <p:sp>
-        <p:nvSpPr>
-          <p:cNvPr id="362" name="Google Shape;362;p30"/>
-          <p:cNvSpPr txBox="1"/>
-          <p:nvPr/>
-        </p:nvSpPr>
-        <p:spPr>
-          <a:xfrm>
-            <a:off x="571450" y="983675"/>
-            <a:ext cx="4000500" cy="464700"/>
-          </a:xfrm>
-          <a:prstGeom prst="rect">
-            <a:avLst/>
-          </a:prstGeom>
-          <a:noFill/>
-          <a:ln>
-            <a:noFill/>
-          </a:ln>
-        </p:spPr>
-        <p:txBody>
-          <a:bodyPr anchorCtr="0" anchor="t" bIns="0" lIns="0" spcFirstLastPara="1" rIns="0" wrap="square" tIns="0">
-            <a:normAutofit/>
-          </a:bodyPr>
-          <a:lstStyle/>
-          <a:p>
-            <a:pPr indent="0" lvl="0" marL="0" rtl="0" algn="l">
-              <a:spcBef>
-                <a:spcPts val="0"/>
-              </a:spcBef>
-              <a:spcAft>
-                <a:spcPts val="0"/>
-              </a:spcAft>
-              <a:buNone/>
-            </a:pPr>
-            <a:r>
-              <a:rPr lang="en-US" sz="1800">
-                <a:solidFill>
-                  <a:srgbClr val="00FF00"/>
-                </a:solidFill>
-                <a:latin typeface="Urbanist SemiBold"/>
-                <a:ea typeface="Urbanist SemiBold"/>
-                <a:cs typeface="Urbanist SemiBold"/>
-                <a:sym typeface="Urbanist SemiBold"/>
-              </a:rPr>
-              <a:t>The Paper &amp; Its Contribution </a:t>
-            </a:r>
-            <a:endParaRPr sz="1800">
-              <a:solidFill>
-                <a:srgbClr val="00FF00"/>
-              </a:solidFill>
-              <a:latin typeface="Urbanist SemiBold"/>
-              <a:ea typeface="Urbanist SemiBold"/>
-              <a:cs typeface="Urbanist SemiBold"/>
-              <a:sym typeface="Urbanist SemiBold"/>
-            </a:endParaRPr>
-          </a:p>
-        </p:txBody>
-      </p:sp>
-      <p:sp>
-        <p:nvSpPr>
-          <p:cNvPr id="363" name="Google Shape;363;p30"/>
-          <p:cNvSpPr txBox="1"/>
-          <p:nvPr/>
-        </p:nvSpPr>
-        <p:spPr>
-          <a:xfrm flipH="1">
-            <a:off x="571450" y="1577850"/>
-            <a:ext cx="11049000" cy="4531200"/>
-          </a:xfrm>
-          <a:prstGeom prst="rect">
-            <a:avLst/>
-          </a:prstGeom>
-          <a:noFill/>
-          <a:ln cap="flat" cmpd="sng" w="19050">
-            <a:solidFill>
-              <a:srgbClr val="93C47D"/>
-            </a:solidFill>
-            <a:prstDash val="solid"/>
-            <a:round/>
-            <a:headEnd len="sm" w="sm" type="none"/>
-            <a:tailEnd len="sm" w="sm" type="none"/>
-          </a:ln>
-        </p:spPr>
-        <p:txBody>
-          <a:bodyPr anchorCtr="0" anchor="t" bIns="0" lIns="0" spcFirstLastPara="1" rIns="0" wrap="square" tIns="0">
-            <a:noAutofit/>
-          </a:bodyPr>
-          <a:lstStyle/>
-          <a:p>
-            <a:pPr indent="0" lvl="0" marL="0" rtl="0" algn="l">
-              <a:lnSpc>
-                <a:spcPct val="160000"/>
-              </a:lnSpc>
-              <a:spcBef>
-                <a:spcPts val="0"/>
-              </a:spcBef>
-              <a:spcAft>
-                <a:spcPts val="0"/>
-              </a:spcAft>
-              <a:buNone/>
-            </a:pPr>
-            <a:r>
-              <a:rPr b="1" lang="en-US">
-                <a:solidFill>
-                  <a:srgbClr val="00FF00"/>
-                </a:solidFill>
-              </a:rPr>
-              <a:t>Objective:</a:t>
-            </a:r>
-            <a:endParaRPr b="1">
-              <a:solidFill>
-                <a:srgbClr val="00FF00"/>
-              </a:solidFill>
-            </a:endParaRPr>
-          </a:p>
-          <a:p>
-            <a:pPr indent="0" lvl="0" marL="0" rtl="0" algn="l">
-              <a:lnSpc>
-                <a:spcPct val="160000"/>
-              </a:lnSpc>
-              <a:spcBef>
-                <a:spcPts val="0"/>
-              </a:spcBef>
-              <a:spcAft>
-                <a:spcPts val="0"/>
-              </a:spcAft>
-              <a:buNone/>
-            </a:pPr>
-            <a:r>
-              <a:rPr b="1" lang="en-US" sz="1200">
-                <a:solidFill>
-                  <a:srgbClr val="6AA84F"/>
-                </a:solidFill>
-              </a:rPr>
-              <a:t>I</a:t>
-            </a:r>
-            <a:r>
-              <a:rPr b="1" lang="en-US" sz="1800">
-                <a:solidFill>
-                  <a:srgbClr val="6AA84F"/>
-                </a:solidFill>
-              </a:rPr>
-              <a:t>ntroduce a multi-LVLM-powered framework that automates post-disaster management — on-site assessment, emergency alerts, resource allocation, and recovery planning.</a:t>
-            </a:r>
-            <a:endParaRPr b="1" sz="1800">
-              <a:solidFill>
-                <a:srgbClr val="6AA84F"/>
-              </a:solidFill>
-            </a:endParaRPr>
-          </a:p>
-          <a:p>
-            <a:pPr indent="0" lvl="0" marL="0" rtl="0" algn="l">
-              <a:lnSpc>
-                <a:spcPct val="160000"/>
-              </a:lnSpc>
-              <a:spcBef>
-                <a:spcPts val="0"/>
-              </a:spcBef>
-              <a:spcAft>
-                <a:spcPts val="0"/>
-              </a:spcAft>
-              <a:buNone/>
-            </a:pPr>
-            <a:r>
-              <a:rPr b="1" lang="en-US">
-                <a:solidFill>
-                  <a:srgbClr val="00FF00"/>
-                </a:solidFill>
-              </a:rPr>
-              <a:t>Core Idea:</a:t>
-            </a:r>
-            <a:endParaRPr b="1">
-              <a:solidFill>
-                <a:srgbClr val="00FF00"/>
-              </a:solidFill>
-            </a:endParaRPr>
-          </a:p>
-          <a:p>
-            <a:pPr indent="0" lvl="0" marL="0" rtl="0" algn="l">
-              <a:lnSpc>
-                <a:spcPct val="160000"/>
-              </a:lnSpc>
-              <a:spcBef>
-                <a:spcPts val="0"/>
-              </a:spcBef>
-              <a:spcAft>
-                <a:spcPts val="0"/>
-              </a:spcAft>
-              <a:buNone/>
-            </a:pPr>
-            <a:r>
-              <a:rPr b="1" lang="en-US" sz="1800">
-                <a:solidFill>
-                  <a:srgbClr val="6AA84F"/>
-                </a:solidFill>
-              </a:rPr>
-              <a:t>Four specialised LVLM agents (Expert, Alerts, Emergency, Assignment) — coordinated with GPT-4o as core — simulate real disaster-response teamwork.</a:t>
-            </a:r>
-            <a:endParaRPr b="1" sz="1800">
-              <a:solidFill>
-                <a:srgbClr val="6AA84F"/>
-              </a:solidFill>
-            </a:endParaRPr>
-          </a:p>
-          <a:p>
-            <a:pPr indent="0" lvl="0" marL="0" rtl="0" algn="l">
-              <a:lnSpc>
-                <a:spcPct val="160000"/>
-              </a:lnSpc>
-              <a:spcBef>
-                <a:spcPts val="0"/>
-              </a:spcBef>
-              <a:spcAft>
-                <a:spcPts val="0"/>
-              </a:spcAft>
-              <a:buNone/>
-            </a:pPr>
-            <a:r>
-              <a:rPr b="1" lang="en-US">
-                <a:solidFill>
-                  <a:srgbClr val="00FF00"/>
-                </a:solidFill>
-              </a:rPr>
-              <a:t>4  Agents:</a:t>
-            </a:r>
-            <a:endParaRPr b="1">
-              <a:solidFill>
-                <a:srgbClr val="00FF00"/>
-              </a:solidFill>
-            </a:endParaRPr>
-          </a:p>
-          <a:p>
-            <a:pPr indent="0" lvl="0" marL="0" rtl="0" algn="l">
-              <a:lnSpc>
-                <a:spcPct val="160000"/>
-              </a:lnSpc>
-              <a:spcBef>
-                <a:spcPts val="0"/>
-              </a:spcBef>
-              <a:spcAft>
-                <a:spcPts val="0"/>
-              </a:spcAft>
-              <a:buNone/>
-            </a:pPr>
-            <a:r>
-              <a:rPr b="1" lang="en-US" sz="1200">
-                <a:solidFill>
-                  <a:srgbClr val="6AA84F"/>
-                </a:solidFill>
-              </a:rPr>
-              <a:t>- </a:t>
-            </a:r>
-            <a:r>
-              <a:rPr b="1" lang="en-US" sz="1800">
-                <a:solidFill>
-                  <a:srgbClr val="6AA84F"/>
-                </a:solidFill>
-              </a:rPr>
-              <a:t>Expert Team – On-site damage grading</a:t>
-            </a:r>
-            <a:endParaRPr b="1" sz="1800">
-              <a:solidFill>
-                <a:srgbClr val="6AA84F"/>
-              </a:solidFill>
-            </a:endParaRPr>
-          </a:p>
-          <a:p>
-            <a:pPr indent="0" lvl="0" marL="0" rtl="0" algn="l">
-              <a:lnSpc>
-                <a:spcPct val="160000"/>
-              </a:lnSpc>
-              <a:spcBef>
-                <a:spcPts val="0"/>
-              </a:spcBef>
-              <a:spcAft>
-                <a:spcPts val="0"/>
-              </a:spcAft>
-              <a:buNone/>
-            </a:pPr>
-            <a:r>
-              <a:rPr b="1" lang="en-US" sz="1800">
-                <a:solidFill>
-                  <a:srgbClr val="6AA84F"/>
-                </a:solidFill>
-              </a:rPr>
-              <a:t>- Alerts Team – Danger-zone alerts</a:t>
-            </a:r>
-            <a:endParaRPr b="1" sz="1800">
-              <a:solidFill>
-                <a:srgbClr val="6AA84F"/>
-              </a:solidFill>
-            </a:endParaRPr>
-          </a:p>
-          <a:p>
-            <a:pPr indent="0" lvl="0" marL="0" rtl="0" algn="l">
-              <a:lnSpc>
-                <a:spcPct val="160000"/>
-              </a:lnSpc>
-              <a:spcBef>
-                <a:spcPts val="0"/>
-              </a:spcBef>
-              <a:spcAft>
-                <a:spcPts val="0"/>
-              </a:spcAft>
-              <a:buNone/>
-            </a:pPr>
-            <a:r>
-              <a:rPr b="1" lang="en-US" sz="1800">
-                <a:solidFill>
-                  <a:srgbClr val="6AA84F"/>
-                </a:solidFill>
-              </a:rPr>
-              <a:t>- Emergency Team – Shelters &amp; recovery</a:t>
-            </a:r>
-            <a:endParaRPr b="1" sz="1800">
-              <a:solidFill>
-                <a:srgbClr val="6AA84F"/>
-              </a:solidFill>
-            </a:endParaRPr>
-          </a:p>
-          <a:p>
-            <a:pPr indent="0" lvl="0" marL="0" rtl="0" algn="l">
-              <a:lnSpc>
-                <a:spcPct val="160000"/>
-              </a:lnSpc>
-              <a:spcBef>
-                <a:spcPts val="0"/>
-              </a:spcBef>
-              <a:spcAft>
-                <a:spcPts val="0"/>
-              </a:spcAft>
-              <a:buNone/>
-            </a:pPr>
-            <a:r>
-              <a:rPr b="1" lang="en-US" sz="1800">
-                <a:solidFill>
-                  <a:srgbClr val="6AA84F"/>
-                </a:solidFill>
-              </a:rPr>
-              <a:t>- Assignment Team – Resource allocation</a:t>
-            </a:r>
-            <a:endParaRPr b="1" sz="1800">
-              <a:solidFill>
-                <a:srgbClr val="6AA84F"/>
-              </a:solidFill>
-            </a:endParaRPr>
-          </a:p>
-          <a:p>
-            <a:pPr indent="0" lvl="0" marL="0" rtl="0" algn="l">
-              <a:lnSpc>
-                <a:spcPct val="160000"/>
-              </a:lnSpc>
-              <a:spcBef>
-                <a:spcPts val="0"/>
-              </a:spcBef>
-              <a:spcAft>
-                <a:spcPts val="0"/>
-              </a:spcAft>
-              <a:buNone/>
-            </a:pPr>
-            <a:r>
-              <a:t/>
-            </a:r>
-            <a:endParaRPr b="1" sz="1200">
-              <a:solidFill>
-                <a:srgbClr val="6AA84F"/>
-              </a:solidFill>
-            </a:endParaRPr>
-          </a:p>
-        </p:txBody>
-      </p:sp>
-      <p:pic>
-        <p:nvPicPr>
-          <p:cNvPr descr="image.png" id="364" name="Google Shape;364;p30"/>
-          <p:cNvPicPr preferRelativeResize="0"/>
-          <p:nvPr/>
-        </p:nvPicPr>
-        <p:blipFill rotWithShape="1">
-          <a:blip r:embed="rId4">
-            <a:alphaModFix/>
-          </a:blip>
-          <a:srcRect b="0" l="0" r="0" t="0"/>
-          <a:stretch/>
-        </p:blipFill>
-        <p:spPr>
-          <a:xfrm>
-            <a:off x="571500" y="6257925"/>
-            <a:ext cx="11049000" cy="314325"/>
-          </a:xfrm>
-          <a:prstGeom prst="rect">
-            <a:avLst/>
-          </a:prstGeom>
-          <a:noFill/>
-          <a:ln>
-            <a:noFill/>
-          </a:ln>
-        </p:spPr>
-      </p:pic>
-      <p:sp>
-        <p:nvSpPr>
-          <p:cNvPr id="365" name="Google Shape;365;p30"/>
-          <p:cNvSpPr txBox="1"/>
-          <p:nvPr/>
-        </p:nvSpPr>
-        <p:spPr>
-          <a:xfrm>
-            <a:off x="571500" y="6410325"/>
-            <a:ext cx="485700" cy="161700"/>
-          </a:xfrm>
-          <a:prstGeom prst="rect">
-            <a:avLst/>
-          </a:prstGeom>
-          <a:noFill/>
-          <a:ln>
-            <a:noFill/>
-          </a:ln>
-        </p:spPr>
-        <p:txBody>
-          <a:bodyPr anchorCtr="0" anchor="t" bIns="0" lIns="0" spcFirstLastPara="1" rIns="0" wrap="square" tIns="0">
-            <a:spAutoFit/>
-          </a:bodyPr>
-          <a:lstStyle/>
-          <a:p>
-            <a:pPr indent="0" lvl="0" marL="0" marR="0" rtl="0" algn="l">
-              <a:spcBef>
-                <a:spcPts val="0"/>
-              </a:spcBef>
-              <a:spcAft>
-                <a:spcPts val="0"/>
-              </a:spcAft>
-              <a:buNone/>
-            </a:pPr>
-            <a:r>
-              <a:rPr b="0" i="0" lang="en-US" sz="1050" u="none" cap="none" strike="noStrike">
-                <a:solidFill>
-                  <a:srgbClr val="00FF00"/>
-                </a:solidFill>
-                <a:latin typeface="Urbanist SemiBold"/>
-                <a:ea typeface="Urbanist SemiBold"/>
-                <a:cs typeface="Urbanist SemiBold"/>
-                <a:sym typeface="Urbanist SemiBold"/>
-              </a:rPr>
-              <a:t>Group 5</a:t>
-            </a:r>
-            <a:endParaRPr>
-              <a:solidFill>
-                <a:srgbClr val="00FF00"/>
-              </a:solidFill>
-            </a:endParaRPr>
-          </a:p>
-        </p:txBody>
-      </p:sp>
-      <p:sp>
-        <p:nvSpPr>
-          <p:cNvPr id="366" name="Google Shape;366;p30"/>
-          <p:cNvSpPr txBox="1"/>
-          <p:nvPr/>
-        </p:nvSpPr>
-        <p:spPr>
-          <a:xfrm>
-            <a:off x="5063350" y="6410313"/>
-            <a:ext cx="7048500" cy="169200"/>
-          </a:xfrm>
-          <a:prstGeom prst="rect">
-            <a:avLst/>
-          </a:prstGeom>
-          <a:noFill/>
-          <a:ln>
-            <a:noFill/>
-          </a:ln>
-        </p:spPr>
-        <p:txBody>
-          <a:bodyPr anchorCtr="0" anchor="t" bIns="0" lIns="0" spcFirstLastPara="1" rIns="0" wrap="square" tIns="0">
-            <a:spAutoFit/>
-          </a:bodyPr>
-          <a:lstStyle/>
-          <a:p>
-            <a:pPr indent="0" lvl="0" marL="0" marR="0" rtl="0" algn="l">
-              <a:spcBef>
-                <a:spcPts val="0"/>
-              </a:spcBef>
-              <a:spcAft>
-                <a:spcPts val="0"/>
-              </a:spcAft>
-              <a:buNone/>
-            </a:pPr>
-            <a:r>
-              <a:rPr b="0" i="0" lang="en-US" sz="1100" u="none" cap="none" strike="noStrike">
-                <a:solidFill>
-                  <a:srgbClr val="00FF00"/>
-                </a:solidFill>
-                <a:latin typeface="Urbanist"/>
-                <a:ea typeface="Urbanist"/>
-                <a:cs typeface="Urbanist"/>
-                <a:sym typeface="Urbanist"/>
-              </a:rPr>
-              <a:t>Abdullah Al Noman · Tamanna Akter Mou · Aryan Sami · Ridita Afrin Riya · Abrar Mohammed Tanzim </a:t>
-            </a:r>
-            <a:r>
-              <a:rPr b="0" i="0" lang="en-US" sz="1100" u="none" cap="none" strike="noStrike">
-                <a:solidFill>
-                  <a:srgbClr val="00FF00"/>
-                </a:solidFill>
-                <a:latin typeface="Urbanist"/>
-                <a:ea typeface="Urbanist"/>
-                <a:cs typeface="Urbanist"/>
-                <a:sym typeface="Urbanist"/>
-              </a:rPr>
-              <a:t>Alam</a:t>
-            </a:r>
-            <a:endParaRPr sz="1100">
               <a:solidFill>
                 <a:srgbClr val="00FF00"/>
               </a:solidFill>
@@ -14464,7 +13953,7 @@
     </p:bg>
     <p:spTree>
       <p:nvGrpSpPr>
-        <p:cNvPr id="370" name="Shape 370"/>
+        <p:cNvPr id="364" name="Shape 364"/>
         <p:cNvGrpSpPr/>
         <p:nvPr/>
       </p:nvGrpSpPr>
@@ -14476,53 +13965,9 @@
           <a:chExt cx="0" cy="0"/>
         </a:xfrm>
       </p:grpSpPr>
-      <p:sp>
-        <p:nvSpPr>
-          <p:cNvPr id="371" name="Google Shape;371;p31"/>
-          <p:cNvSpPr txBox="1"/>
-          <p:nvPr/>
-        </p:nvSpPr>
-        <p:spPr>
-          <a:xfrm>
-            <a:off x="904875" y="2557462"/>
-            <a:ext cx="4953000" cy="215400"/>
-          </a:xfrm>
-          <a:prstGeom prst="rect">
-            <a:avLst/>
-          </a:prstGeom>
-          <a:noFill/>
-          <a:ln>
-            <a:noFill/>
-          </a:ln>
-        </p:spPr>
-        <p:txBody>
-          <a:bodyPr anchorCtr="0" anchor="t" bIns="0" lIns="0" spcFirstLastPara="1" rIns="0" wrap="square" tIns="0">
-            <a:spAutoFit/>
-          </a:bodyPr>
-          <a:lstStyle/>
-          <a:p>
-            <a:pPr indent="0" lvl="0" marL="0" marR="0" rtl="0" algn="l">
-              <a:lnSpc>
-                <a:spcPct val="160000"/>
-              </a:lnSpc>
-              <a:spcBef>
-                <a:spcPts val="0"/>
-              </a:spcBef>
-              <a:spcAft>
-                <a:spcPts val="0"/>
-              </a:spcAft>
-              <a:buNone/>
-            </a:pPr>
-            <a:r>
-              <a:t/>
-            </a:r>
-            <a:endParaRPr/>
-          </a:p>
-        </p:txBody>
-      </p:sp>
       <p:pic>
         <p:nvPicPr>
-          <p:cNvPr descr="image.png" id="372" name="Google Shape;372;p31"/>
+          <p:cNvPr descr="image.png" id="365" name="Google Shape;365;p31"/>
           <p:cNvPicPr preferRelativeResize="0"/>
           <p:nvPr/>
         </p:nvPicPr>
@@ -14535,8 +13980,8 @@
         </p:blipFill>
         <p:spPr>
           <a:xfrm>
-            <a:off x="571500" y="6257925"/>
-            <a:ext cx="11049000" cy="314325"/>
+            <a:off x="571500" y="205525"/>
+            <a:ext cx="2590800" cy="352425"/>
           </a:xfrm>
           <a:prstGeom prst="rect">
             <a:avLst/>
@@ -14549,14 +13994,14 @@
       </p:pic>
       <p:sp>
         <p:nvSpPr>
-          <p:cNvPr id="373" name="Google Shape;373;p31"/>
+          <p:cNvPr id="366" name="Google Shape;366;p31"/>
           <p:cNvSpPr txBox="1"/>
           <p:nvPr/>
         </p:nvSpPr>
         <p:spPr>
           <a:xfrm>
-            <a:off x="571500" y="6410325"/>
-            <a:ext cx="485700" cy="161700"/>
+            <a:off x="571450" y="983675"/>
+            <a:ext cx="4000500" cy="464700"/>
           </a:xfrm>
           <a:prstGeom prst="rect">
             <a:avLst/>
@@ -14568,88 +14013,359 @@
         </p:spPr>
         <p:txBody>
           <a:bodyPr anchorCtr="0" anchor="t" bIns="0" lIns="0" spcFirstLastPara="1" rIns="0" wrap="square" tIns="0">
-            <a:spAutoFit/>
+            <a:normAutofit/>
           </a:bodyPr>
           <a:lstStyle/>
           <a:p>
-            <a:pPr indent="0" lvl="0" marL="0" marR="0" rtl="0" algn="l">
-              <a:spcBef>
-                <a:spcPts val="0"/>
-              </a:spcBef>
-              <a:spcAft>
-                <a:spcPts val="0"/>
-              </a:spcAft>
-              <a:buNone/>
-            </a:pPr>
-            <a:r>
-              <a:rPr b="0" i="0" lang="en-US" sz="1050" u="none" cap="none" strike="noStrike">
-                <a:solidFill>
-                  <a:srgbClr val="94A3B8"/>
+            <a:pPr indent="0" lvl="0" marL="0" rtl="0" algn="l">
+              <a:spcBef>
+                <a:spcPts val="0"/>
+              </a:spcBef>
+              <a:spcAft>
+                <a:spcPts val="0"/>
+              </a:spcAft>
+              <a:buNone/>
+            </a:pPr>
+            <a:r>
+              <a:rPr lang="en-US" sz="1800">
+                <a:solidFill>
+                  <a:srgbClr val="00FF00"/>
                 </a:solidFill>
                 <a:latin typeface="Urbanist SemiBold"/>
                 <a:ea typeface="Urbanist SemiBold"/>
                 <a:cs typeface="Urbanist SemiBold"/>
                 <a:sym typeface="Urbanist SemiBold"/>
               </a:rPr>
-              <a:t>Group 5</a:t>
-            </a:r>
-            <a:endParaRPr/>
+              <a:t>The Paper &amp; Its Contribution </a:t>
+            </a:r>
+            <a:endParaRPr sz="1800">
+              <a:solidFill>
+                <a:srgbClr val="00FF00"/>
+              </a:solidFill>
+              <a:latin typeface="Urbanist SemiBold"/>
+              <a:ea typeface="Urbanist SemiBold"/>
+              <a:cs typeface="Urbanist SemiBold"/>
+              <a:sym typeface="Urbanist SemiBold"/>
+            </a:endParaRPr>
           </a:p>
         </p:txBody>
       </p:sp>
       <p:sp>
         <p:nvSpPr>
-          <p:cNvPr id="374" name="Google Shape;374;p31"/>
+          <p:cNvPr id="367" name="Google Shape;367;p31"/>
           <p:cNvSpPr txBox="1"/>
           <p:nvPr/>
         </p:nvSpPr>
         <p:spPr>
-          <a:xfrm>
-            <a:off x="5114925" y="6410438"/>
-            <a:ext cx="7048500" cy="161700"/>
+          <a:xfrm flipH="1">
+            <a:off x="571450" y="1496750"/>
+            <a:ext cx="11049000" cy="4612200"/>
           </a:xfrm>
           <a:prstGeom prst="rect">
             <a:avLst/>
           </a:prstGeom>
           <a:noFill/>
-          <a:ln>
-            <a:noFill/>
+          <a:ln cap="flat" cmpd="sng" w="19050">
+            <a:solidFill>
+              <a:srgbClr val="93C47D"/>
+            </a:solidFill>
+            <a:prstDash val="solid"/>
+            <a:round/>
+            <a:headEnd len="sm" w="sm" type="none"/>
+            <a:tailEnd len="sm" w="sm" type="none"/>
           </a:ln>
         </p:spPr>
         <p:txBody>
           <a:bodyPr anchorCtr="0" anchor="t" bIns="0" lIns="0" spcFirstLastPara="1" rIns="0" wrap="square" tIns="0">
-            <a:spAutoFit/>
+            <a:noAutofit/>
           </a:bodyPr>
           <a:lstStyle/>
           <a:p>
-            <a:pPr indent="0" lvl="0" marL="0" marR="0" rtl="0" algn="l">
-              <a:spcBef>
-                <a:spcPts val="0"/>
-              </a:spcBef>
-              <a:spcAft>
-                <a:spcPts val="0"/>
-              </a:spcAft>
-              <a:buNone/>
-            </a:pPr>
-            <a:r>
-              <a:rPr b="0" i="0" lang="en-US" sz="1050" u="none" cap="none" strike="noStrike">
-                <a:solidFill>
-                  <a:srgbClr val="64748B"/>
-                </a:solidFill>
-                <a:latin typeface="Urbanist"/>
-                <a:ea typeface="Urbanist"/>
-                <a:cs typeface="Urbanist"/>
-                <a:sym typeface="Urbanist"/>
-              </a:rPr>
-              <a:t>Abdullah Al Noman · Tamanna Akter Mou · Aryan Sami · Ridita Afrin Riya · Abrar Mohammed Tanzim Alam</a:t>
-            </a:r>
-            <a:endParaRPr/>
+            <a:pPr indent="0" lvl="0" marL="457200" rtl="0" algn="l">
+              <a:lnSpc>
+                <a:spcPct val="160000"/>
+              </a:lnSpc>
+              <a:spcBef>
+                <a:spcPts val="0"/>
+              </a:spcBef>
+              <a:spcAft>
+                <a:spcPts val="0"/>
+              </a:spcAft>
+              <a:buNone/>
+            </a:pPr>
+            <a:r>
+              <a:rPr b="1" lang="en-US">
+                <a:solidFill>
+                  <a:srgbClr val="00FF00"/>
+                </a:solidFill>
+              </a:rPr>
+              <a:t>Objective:</a:t>
+            </a:r>
+            <a:endParaRPr b="1">
+              <a:solidFill>
+                <a:srgbClr val="00FF00"/>
+              </a:solidFill>
+            </a:endParaRPr>
+          </a:p>
+          <a:p>
+            <a:pPr indent="0" lvl="0" marL="457200" rtl="0" algn="l">
+              <a:lnSpc>
+                <a:spcPct val="160000"/>
+              </a:lnSpc>
+              <a:spcBef>
+                <a:spcPts val="0"/>
+              </a:spcBef>
+              <a:spcAft>
+                <a:spcPts val="0"/>
+              </a:spcAft>
+              <a:buNone/>
+            </a:pPr>
+            <a:r>
+              <a:rPr b="1" lang="en-US" sz="1200">
+                <a:solidFill>
+                  <a:srgbClr val="6AA84F"/>
+                </a:solidFill>
+              </a:rPr>
+              <a:t>I</a:t>
+            </a:r>
+            <a:r>
+              <a:rPr b="1" lang="en-US" sz="1800">
+                <a:solidFill>
+                  <a:srgbClr val="6AA84F"/>
+                </a:solidFill>
+              </a:rPr>
+              <a:t>ntroduce a multi-LVLM-powered framework that automates post-disaster management — on-site assessment, emergency alerts, resource allocation, and recovery planning.</a:t>
+            </a:r>
+            <a:endParaRPr b="1" sz="1800">
+              <a:solidFill>
+                <a:srgbClr val="6AA84F"/>
+              </a:solidFill>
+            </a:endParaRPr>
+          </a:p>
+          <a:p>
+            <a:pPr indent="0" lvl="0" marL="457200" rtl="0" algn="l">
+              <a:lnSpc>
+                <a:spcPct val="160000"/>
+              </a:lnSpc>
+              <a:spcBef>
+                <a:spcPts val="0"/>
+              </a:spcBef>
+              <a:spcAft>
+                <a:spcPts val="0"/>
+              </a:spcAft>
+              <a:buNone/>
+            </a:pPr>
+            <a:r>
+              <a:rPr b="1" lang="en-US">
+                <a:solidFill>
+                  <a:srgbClr val="00FF00"/>
+                </a:solidFill>
+              </a:rPr>
+              <a:t>Core Idea:</a:t>
+            </a:r>
+            <a:endParaRPr b="1">
+              <a:solidFill>
+                <a:srgbClr val="00FF00"/>
+              </a:solidFill>
+            </a:endParaRPr>
+          </a:p>
+          <a:p>
+            <a:pPr indent="0" lvl="0" marL="457200" rtl="0" algn="l">
+              <a:lnSpc>
+                <a:spcPct val="160000"/>
+              </a:lnSpc>
+              <a:spcBef>
+                <a:spcPts val="0"/>
+              </a:spcBef>
+              <a:spcAft>
+                <a:spcPts val="0"/>
+              </a:spcAft>
+              <a:buNone/>
+            </a:pPr>
+            <a:r>
+              <a:rPr b="1" lang="en-US" sz="1800">
+                <a:solidFill>
+                  <a:srgbClr val="6AA84F"/>
+                </a:solidFill>
+              </a:rPr>
+              <a:t>Four specialised LVLM agents (Expert, Alerts, Emergency, Assignment) — coordinated with GPT-4o as core — simulate real disaster-response teamwork.</a:t>
+            </a:r>
+            <a:endParaRPr b="1" sz="1800">
+              <a:solidFill>
+                <a:srgbClr val="6AA84F"/>
+              </a:solidFill>
+            </a:endParaRPr>
+          </a:p>
+          <a:p>
+            <a:pPr indent="0" lvl="0" marL="457200" rtl="0" algn="l">
+              <a:lnSpc>
+                <a:spcPct val="160000"/>
+              </a:lnSpc>
+              <a:spcBef>
+                <a:spcPts val="0"/>
+              </a:spcBef>
+              <a:spcAft>
+                <a:spcPts val="0"/>
+              </a:spcAft>
+              <a:buNone/>
+            </a:pPr>
+            <a:r>
+              <a:rPr b="1" lang="en-US">
+                <a:solidFill>
+                  <a:srgbClr val="00FF00"/>
+                </a:solidFill>
+              </a:rPr>
+              <a:t>4  Agents:</a:t>
+            </a:r>
+            <a:endParaRPr b="1">
+              <a:solidFill>
+                <a:srgbClr val="00FF00"/>
+              </a:solidFill>
+            </a:endParaRPr>
+          </a:p>
+          <a:p>
+            <a:pPr indent="0" lvl="0" marL="457200" rtl="0" algn="l">
+              <a:lnSpc>
+                <a:spcPct val="160000"/>
+              </a:lnSpc>
+              <a:spcBef>
+                <a:spcPts val="0"/>
+              </a:spcBef>
+              <a:spcAft>
+                <a:spcPts val="0"/>
+              </a:spcAft>
+              <a:buNone/>
+            </a:pPr>
+            <a:r>
+              <a:rPr b="1" lang="en-US" sz="1200">
+                <a:solidFill>
+                  <a:srgbClr val="6AA84F"/>
+                </a:solidFill>
+              </a:rPr>
+              <a:t>- </a:t>
+            </a:r>
+            <a:r>
+              <a:rPr b="1" lang="en-US" sz="1800">
+                <a:solidFill>
+                  <a:srgbClr val="6AA84F"/>
+                </a:solidFill>
+              </a:rPr>
+              <a:t>Expert Team – On-site damage grading</a:t>
+            </a:r>
+            <a:endParaRPr b="1" sz="1800">
+              <a:solidFill>
+                <a:srgbClr val="6AA84F"/>
+              </a:solidFill>
+            </a:endParaRPr>
+          </a:p>
+          <a:p>
+            <a:pPr indent="0" lvl="0" marL="457200" rtl="0" algn="l">
+              <a:lnSpc>
+                <a:spcPct val="160000"/>
+              </a:lnSpc>
+              <a:spcBef>
+                <a:spcPts val="0"/>
+              </a:spcBef>
+              <a:spcAft>
+                <a:spcPts val="0"/>
+              </a:spcAft>
+              <a:buNone/>
+            </a:pPr>
+            <a:r>
+              <a:rPr b="1" lang="en-US" sz="1800">
+                <a:solidFill>
+                  <a:srgbClr val="6AA84F"/>
+                </a:solidFill>
+              </a:rPr>
+              <a:t>- Alerts Team – Danger-zone alerts</a:t>
+            </a:r>
+            <a:endParaRPr b="1" sz="1800">
+              <a:solidFill>
+                <a:srgbClr val="6AA84F"/>
+              </a:solidFill>
+            </a:endParaRPr>
+          </a:p>
+          <a:p>
+            <a:pPr indent="0" lvl="0" marL="457200" rtl="0" algn="l">
+              <a:lnSpc>
+                <a:spcPct val="160000"/>
+              </a:lnSpc>
+              <a:spcBef>
+                <a:spcPts val="0"/>
+              </a:spcBef>
+              <a:spcAft>
+                <a:spcPts val="0"/>
+              </a:spcAft>
+              <a:buNone/>
+            </a:pPr>
+            <a:r>
+              <a:rPr b="1" lang="en-US" sz="1800">
+                <a:solidFill>
+                  <a:srgbClr val="6AA84F"/>
+                </a:solidFill>
+              </a:rPr>
+              <a:t>- Emergency Team – Shelters &amp; recovery</a:t>
+            </a:r>
+            <a:endParaRPr b="1" sz="1800">
+              <a:solidFill>
+                <a:srgbClr val="6AA84F"/>
+              </a:solidFill>
+            </a:endParaRPr>
+          </a:p>
+          <a:p>
+            <a:pPr indent="0" lvl="0" marL="457200" rtl="0" algn="l">
+              <a:lnSpc>
+                <a:spcPct val="160000"/>
+              </a:lnSpc>
+              <a:spcBef>
+                <a:spcPts val="0"/>
+              </a:spcBef>
+              <a:spcAft>
+                <a:spcPts val="0"/>
+              </a:spcAft>
+              <a:buNone/>
+            </a:pPr>
+            <a:r>
+              <a:rPr b="1" lang="en-US" sz="1800">
+                <a:solidFill>
+                  <a:srgbClr val="6AA84F"/>
+                </a:solidFill>
+              </a:rPr>
+              <a:t>- Assignment Team – Resource allocation</a:t>
+            </a:r>
+            <a:endParaRPr b="1" sz="1800">
+              <a:solidFill>
+                <a:srgbClr val="6AA84F"/>
+              </a:solidFill>
+            </a:endParaRPr>
+          </a:p>
+          <a:p>
+            <a:pPr indent="0" lvl="0" marL="457200" rtl="0" algn="l">
+              <a:lnSpc>
+                <a:spcPct val="160000"/>
+              </a:lnSpc>
+              <a:spcBef>
+                <a:spcPts val="0"/>
+              </a:spcBef>
+              <a:spcAft>
+                <a:spcPts val="0"/>
+              </a:spcAft>
+              <a:buNone/>
+            </a:pPr>
+            <a:r>
+              <a:t/>
+            </a:r>
+            <a:endParaRPr b="1" sz="1200">
+              <a:solidFill>
+                <a:srgbClr val="6AA84F"/>
+              </a:solidFill>
+            </a:endParaRPr>
           </a:p>
         </p:txBody>
       </p:sp>
       <p:pic>
         <p:nvPicPr>
-          <p:cNvPr descr="image.png" id="375" name="Google Shape;375;p31"/>
+          <p:cNvPr descr="image.png" id="368" name="Google Shape;368;p31"/>
           <p:cNvPicPr preferRelativeResize="0"/>
           <p:nvPr/>
         </p:nvPicPr>
@@ -14662,8 +14378,8 @@
         </p:blipFill>
         <p:spPr>
           <a:xfrm>
-            <a:off x="1124025" y="257100"/>
-            <a:ext cx="2590800" cy="352425"/>
+            <a:off x="571500" y="6257925"/>
+            <a:ext cx="11049000" cy="314325"/>
           </a:xfrm>
           <a:prstGeom prst="rect">
             <a:avLst/>
@@ -14676,14 +14392,14 @@
       </p:pic>
       <p:sp>
         <p:nvSpPr>
-          <p:cNvPr id="376" name="Google Shape;376;p31"/>
+          <p:cNvPr id="369" name="Google Shape;369;p31"/>
           <p:cNvSpPr txBox="1"/>
           <p:nvPr/>
         </p:nvSpPr>
         <p:spPr>
           <a:xfrm>
-            <a:off x="904875" y="2557462"/>
-            <a:ext cx="4953000" cy="215400"/>
+            <a:off x="571500" y="6410325"/>
+            <a:ext cx="485700" cy="161700"/>
           </a:xfrm>
           <a:prstGeom prst="rect">
             <a:avLst/>
@@ -14700,61 +14416,44 @@
           <a:lstStyle/>
           <a:p>
             <a:pPr indent="0" lvl="0" marL="0" marR="0" rtl="0" algn="l">
-              <a:lnSpc>
-                <a:spcPct val="160000"/>
-              </a:lnSpc>
-              <a:spcBef>
-                <a:spcPts val="0"/>
-              </a:spcBef>
-              <a:spcAft>
-                <a:spcPts val="0"/>
-              </a:spcAft>
-              <a:buNone/>
-            </a:pPr>
-            <a:r>
-              <a:t/>
-            </a:r>
-            <a:endParaRPr/>
+              <a:spcBef>
+                <a:spcPts val="0"/>
+              </a:spcBef>
+              <a:spcAft>
+                <a:spcPts val="0"/>
+              </a:spcAft>
+              <a:buNone/>
+            </a:pPr>
+            <a:r>
+              <a:rPr b="0" i="0" lang="en-US" sz="1050" u="none" cap="none" strike="noStrike">
+                <a:solidFill>
+                  <a:srgbClr val="00FF00"/>
+                </a:solidFill>
+                <a:latin typeface="Urbanist SemiBold"/>
+                <a:ea typeface="Urbanist SemiBold"/>
+                <a:cs typeface="Urbanist SemiBold"/>
+                <a:sym typeface="Urbanist SemiBold"/>
+              </a:rPr>
+              <a:t>Group 5</a:t>
+            </a:r>
+            <a:endParaRPr>
+              <a:solidFill>
+                <a:srgbClr val="00FF00"/>
+              </a:solidFill>
+            </a:endParaRPr>
           </a:p>
         </p:txBody>
       </p:sp>
-      <p:pic>
-        <p:nvPicPr>
-          <p:cNvPr descr="image.png" id="377" name="Google Shape;377;p31"/>
-          <p:cNvPicPr preferRelativeResize="0"/>
-          <p:nvPr/>
-        </p:nvPicPr>
-        <p:blipFill rotWithShape="1">
-          <a:blip r:embed="rId3">
-            <a:alphaModFix/>
-          </a:blip>
-          <a:srcRect b="0" l="0" r="0" t="0"/>
-          <a:stretch/>
-        </p:blipFill>
-        <p:spPr>
-          <a:xfrm>
-            <a:off x="571500" y="6257925"/>
-            <a:ext cx="11049000" cy="314325"/>
-          </a:xfrm>
-          <a:prstGeom prst="rect">
-            <a:avLst/>
-          </a:prstGeom>
-          <a:noFill/>
-          <a:ln>
-            <a:noFill/>
-          </a:ln>
-        </p:spPr>
-      </p:pic>
-      <p:sp>
-        <p:nvSpPr>
-          <p:cNvPr id="378" name="Google Shape;378;p31"/>
+      <p:sp>
+        <p:nvSpPr>
+          <p:cNvPr id="370" name="Google Shape;370;p31"/>
           <p:cNvSpPr txBox="1"/>
           <p:nvPr/>
         </p:nvSpPr>
         <p:spPr>
           <a:xfrm>
-            <a:off x="5114925" y="6410438"/>
-            <a:ext cx="7048500" cy="161700"/>
+            <a:off x="5063350" y="6410313"/>
+            <a:ext cx="7048500" cy="169200"/>
           </a:xfrm>
           <a:prstGeom prst="rect">
             <a:avLst/>
@@ -14780,7 +14479,7 @@
               <a:buNone/>
             </a:pPr>
             <a:r>
-              <a:rPr b="0" i="0" lang="en-US" sz="1050" u="none" cap="none" strike="noStrike">
+              <a:rPr b="0" i="0" lang="en-US" sz="1100" u="none" cap="none" strike="noStrike">
                 <a:solidFill>
                   <a:srgbClr val="00FF00"/>
                 </a:solidFill>
@@ -14789,200 +14488,21 @@
                 <a:cs typeface="Urbanist"/>
                 <a:sym typeface="Urbanist"/>
               </a:rPr>
-              <a:t>Abdullah Al Noman · Tamanna Akter Mou · Aryan Sami · Ridita Afrin Riya · Abrar Mohammed Tanzim Alam</a:t>
-            </a:r>
-            <a:endParaRPr>
-              <a:solidFill>
-                <a:srgbClr val="00FF00"/>
-              </a:solidFill>
-            </a:endParaRPr>
-          </a:p>
-        </p:txBody>
-      </p:sp>
-      <p:sp>
-        <p:nvSpPr>
-          <p:cNvPr id="379" name="Google Shape;379;p31"/>
-          <p:cNvSpPr txBox="1"/>
-          <p:nvPr/>
-        </p:nvSpPr>
-        <p:spPr>
-          <a:xfrm>
-            <a:off x="1196325" y="1711050"/>
-            <a:ext cx="6228900" cy="2678100"/>
-          </a:xfrm>
-          <a:prstGeom prst="rect">
-            <a:avLst/>
-          </a:prstGeom>
-          <a:noFill/>
-          <a:ln>
-            <a:noFill/>
-          </a:ln>
-        </p:spPr>
-        <p:txBody>
-          <a:bodyPr anchorCtr="0" anchor="t" bIns="91425" lIns="91425" spcFirstLastPara="1" rIns="91425" wrap="square" tIns="91425">
-            <a:spAutoFit/>
-          </a:bodyPr>
-          <a:lstStyle/>
-          <a:p>
-            <a:pPr indent="0" lvl="0" marL="0" rtl="0" algn="l">
-              <a:spcBef>
-                <a:spcPts val="0"/>
-              </a:spcBef>
-              <a:spcAft>
-                <a:spcPts val="0"/>
-              </a:spcAft>
-              <a:buNone/>
-            </a:pPr>
-            <a:r>
-              <a:rPr lang="en-US" sz="1800">
-                <a:solidFill>
-                  <a:srgbClr val="6AA84F"/>
-                </a:solidFill>
-              </a:rPr>
-              <a:t>- No GIS Integration — spatial logic not linked to systems like QGIS</a:t>
-            </a:r>
-            <a:endParaRPr sz="1800">
-              <a:solidFill>
-                <a:srgbClr val="6AA84F"/>
-              </a:solidFill>
-            </a:endParaRPr>
-          </a:p>
-          <a:p>
-            <a:pPr indent="0" lvl="0" marL="0" rtl="0" algn="l">
-              <a:spcBef>
-                <a:spcPts val="0"/>
-              </a:spcBef>
-              <a:spcAft>
-                <a:spcPts val="0"/>
-              </a:spcAft>
-              <a:buNone/>
-            </a:pPr>
-            <a:r>
-              <a:rPr lang="en-US" sz="1800">
-                <a:solidFill>
-                  <a:srgbClr val="6AA84F"/>
-                </a:solidFill>
-              </a:rPr>
-              <a:t>- Ungrounded Web Retrieval — depends fully on open web search, no curated knowledge base</a:t>
-            </a:r>
-            <a:endParaRPr sz="1800">
-              <a:solidFill>
-                <a:srgbClr val="6AA84F"/>
-              </a:solidFill>
-            </a:endParaRPr>
-          </a:p>
-          <a:p>
-            <a:pPr indent="0" lvl="0" marL="0" rtl="0" algn="l">
-              <a:spcBef>
-                <a:spcPts val="0"/>
-              </a:spcBef>
-              <a:spcAft>
-                <a:spcPts val="0"/>
-              </a:spcAft>
-              <a:buNone/>
-            </a:pPr>
-            <a:r>
-              <a:rPr lang="en-US" sz="1800">
-                <a:solidFill>
-                  <a:srgbClr val="6AA84F"/>
-                </a:solidFill>
-              </a:rPr>
-              <a:t>- No Structured Validation — no formal ground-truth benchmark, only human-in-the-loop</a:t>
-            </a:r>
-            <a:endParaRPr sz="1800">
-              <a:solidFill>
-                <a:srgbClr val="6AA84F"/>
-              </a:solidFill>
-            </a:endParaRPr>
-          </a:p>
-          <a:p>
-            <a:pPr indent="0" lvl="0" marL="0" rtl="0" algn="l">
-              <a:spcBef>
-                <a:spcPts val="0"/>
-              </a:spcBef>
-              <a:spcAft>
-                <a:spcPts val="0"/>
-              </a:spcAft>
-              <a:buNone/>
-            </a:pPr>
-            <a:r>
-              <a:rPr lang="en-US" sz="1800">
-                <a:solidFill>
-                  <a:srgbClr val="6AA84F"/>
-                </a:solidFill>
-              </a:rPr>
-              <a:t>- Limited to Zero-Shot Reasoning — no fine-tuning explored for disaster-specific tasks</a:t>
-            </a:r>
-            <a:endParaRPr sz="1800">
-              <a:solidFill>
-                <a:srgbClr val="6AA84F"/>
-              </a:solidFill>
-            </a:endParaRPr>
-          </a:p>
-          <a:p>
-            <a:pPr indent="0" lvl="0" marL="0" rtl="0" algn="l">
-              <a:spcBef>
-                <a:spcPts val="0"/>
-              </a:spcBef>
-              <a:spcAft>
-                <a:spcPts val="0"/>
-              </a:spcAft>
-              <a:buNone/>
-            </a:pPr>
-            <a:r>
-              <a:t/>
-            </a:r>
-            <a:endParaRPr sz="1800">
-              <a:solidFill>
-                <a:srgbClr val="6AA84F"/>
-              </a:solidFill>
-            </a:endParaRPr>
-          </a:p>
-        </p:txBody>
-      </p:sp>
-      <p:sp>
-        <p:nvSpPr>
-          <p:cNvPr id="380" name="Google Shape;380;p31"/>
-          <p:cNvSpPr txBox="1"/>
-          <p:nvPr/>
-        </p:nvSpPr>
-        <p:spPr>
-          <a:xfrm>
-            <a:off x="1196325" y="783100"/>
-            <a:ext cx="4370100" cy="554100"/>
-          </a:xfrm>
-          <a:prstGeom prst="rect">
-            <a:avLst/>
-          </a:prstGeom>
-          <a:noFill/>
-          <a:ln>
-            <a:noFill/>
-          </a:ln>
-        </p:spPr>
-        <p:txBody>
-          <a:bodyPr anchorCtr="0" anchor="t" bIns="91425" lIns="91425" spcFirstLastPara="1" rIns="91425" wrap="square" tIns="91425">
-            <a:spAutoFit/>
-          </a:bodyPr>
-          <a:lstStyle/>
-          <a:p>
-            <a:pPr indent="0" lvl="0" marL="0" rtl="0" algn="l">
-              <a:spcBef>
-                <a:spcPts val="0"/>
-              </a:spcBef>
-              <a:spcAft>
-                <a:spcPts val="0"/>
-              </a:spcAft>
-              <a:buNone/>
-            </a:pPr>
-            <a:r>
-              <a:rPr lang="en-US" sz="2400">
+              <a:t>Abdullah Al Noman · Tamanna Akter Mou · Aryan Sami · Ridita Afrin Riya · Abrar Mohammed Tanzim </a:t>
+            </a:r>
+            <a:r>
+              <a:rPr b="0" i="0" lang="en-US" sz="1100" u="none" cap="none" strike="noStrike">
                 <a:solidFill>
                   <a:srgbClr val="00FF00"/>
                 </a:solidFill>
-              </a:rPr>
-              <a:t>Research Gap:</a:t>
-            </a:r>
-            <a:endParaRPr sz="2400">
+                <a:latin typeface="Urbanist"/>
+                <a:ea typeface="Urbanist"/>
+                <a:cs typeface="Urbanist"/>
+                <a:sym typeface="Urbanist"/>
+              </a:rPr>
+              <a:t>Alam</a:t>
+            </a:r>
+            <a:endParaRPr sz="1100">
               <a:solidFill>
                 <a:srgbClr val="00FF00"/>
               </a:solidFill>
@@ -16509,7 +16029,553 @@
     </p:bg>
     <p:spTree>
       <p:nvGrpSpPr>
-        <p:cNvPr id="384" name="Shape 384"/>
+        <p:cNvPr id="374" name="Shape 374"/>
+        <p:cNvGrpSpPr/>
+        <p:nvPr/>
+      </p:nvGrpSpPr>
+      <p:grpSpPr>
+        <a:xfrm>
+          <a:off x="0" y="0"/>
+          <a:ext cx="0" cy="0"/>
+          <a:chOff x="0" y="0"/>
+          <a:chExt cx="0" cy="0"/>
+        </a:xfrm>
+      </p:grpSpPr>
+      <p:sp>
+        <p:nvSpPr>
+          <p:cNvPr id="375" name="Google Shape;375;p32"/>
+          <p:cNvSpPr txBox="1"/>
+          <p:nvPr/>
+        </p:nvSpPr>
+        <p:spPr>
+          <a:xfrm>
+            <a:off x="904875" y="2557462"/>
+            <a:ext cx="4953000" cy="215400"/>
+          </a:xfrm>
+          <a:prstGeom prst="rect">
+            <a:avLst/>
+          </a:prstGeom>
+          <a:noFill/>
+          <a:ln>
+            <a:noFill/>
+          </a:ln>
+        </p:spPr>
+        <p:txBody>
+          <a:bodyPr anchorCtr="0" anchor="t" bIns="0" lIns="0" spcFirstLastPara="1" rIns="0" wrap="square" tIns="0">
+            <a:spAutoFit/>
+          </a:bodyPr>
+          <a:lstStyle/>
+          <a:p>
+            <a:pPr indent="0" lvl="0" marL="0" marR="0" rtl="0" algn="l">
+              <a:lnSpc>
+                <a:spcPct val="160000"/>
+              </a:lnSpc>
+              <a:spcBef>
+                <a:spcPts val="0"/>
+              </a:spcBef>
+              <a:spcAft>
+                <a:spcPts val="0"/>
+              </a:spcAft>
+              <a:buNone/>
+            </a:pPr>
+            <a:r>
+              <a:t/>
+            </a:r>
+            <a:endParaRPr/>
+          </a:p>
+        </p:txBody>
+      </p:sp>
+      <p:pic>
+        <p:nvPicPr>
+          <p:cNvPr descr="image.png" id="376" name="Google Shape;376;p32"/>
+          <p:cNvPicPr preferRelativeResize="0"/>
+          <p:nvPr/>
+        </p:nvPicPr>
+        <p:blipFill rotWithShape="1">
+          <a:blip r:embed="rId3">
+            <a:alphaModFix/>
+          </a:blip>
+          <a:srcRect b="0" l="0" r="0" t="0"/>
+          <a:stretch/>
+        </p:blipFill>
+        <p:spPr>
+          <a:xfrm>
+            <a:off x="571500" y="6257925"/>
+            <a:ext cx="11049000" cy="314325"/>
+          </a:xfrm>
+          <a:prstGeom prst="rect">
+            <a:avLst/>
+          </a:prstGeom>
+          <a:noFill/>
+          <a:ln>
+            <a:noFill/>
+          </a:ln>
+        </p:spPr>
+      </p:pic>
+      <p:sp>
+        <p:nvSpPr>
+          <p:cNvPr id="377" name="Google Shape;377;p32"/>
+          <p:cNvSpPr txBox="1"/>
+          <p:nvPr/>
+        </p:nvSpPr>
+        <p:spPr>
+          <a:xfrm>
+            <a:off x="571500" y="6410325"/>
+            <a:ext cx="485700" cy="161700"/>
+          </a:xfrm>
+          <a:prstGeom prst="rect">
+            <a:avLst/>
+          </a:prstGeom>
+          <a:noFill/>
+          <a:ln>
+            <a:noFill/>
+          </a:ln>
+        </p:spPr>
+        <p:txBody>
+          <a:bodyPr anchorCtr="0" anchor="t" bIns="0" lIns="0" spcFirstLastPara="1" rIns="0" wrap="square" tIns="0">
+            <a:spAutoFit/>
+          </a:bodyPr>
+          <a:lstStyle/>
+          <a:p>
+            <a:pPr indent="0" lvl="0" marL="0" marR="0" rtl="0" algn="l">
+              <a:spcBef>
+                <a:spcPts val="0"/>
+              </a:spcBef>
+              <a:spcAft>
+                <a:spcPts val="0"/>
+              </a:spcAft>
+              <a:buNone/>
+            </a:pPr>
+            <a:r>
+              <a:rPr b="0" i="0" lang="en-US" sz="1050" u="none" cap="none" strike="noStrike">
+                <a:solidFill>
+                  <a:srgbClr val="94A3B8"/>
+                </a:solidFill>
+                <a:latin typeface="Urbanist SemiBold"/>
+                <a:ea typeface="Urbanist SemiBold"/>
+                <a:cs typeface="Urbanist SemiBold"/>
+                <a:sym typeface="Urbanist SemiBold"/>
+              </a:rPr>
+              <a:t>Group 5</a:t>
+            </a:r>
+            <a:endParaRPr/>
+          </a:p>
+        </p:txBody>
+      </p:sp>
+      <p:sp>
+        <p:nvSpPr>
+          <p:cNvPr id="378" name="Google Shape;378;p32"/>
+          <p:cNvSpPr txBox="1"/>
+          <p:nvPr/>
+        </p:nvSpPr>
+        <p:spPr>
+          <a:xfrm>
+            <a:off x="5114925" y="6410438"/>
+            <a:ext cx="7048500" cy="161700"/>
+          </a:xfrm>
+          <a:prstGeom prst="rect">
+            <a:avLst/>
+          </a:prstGeom>
+          <a:noFill/>
+          <a:ln>
+            <a:noFill/>
+          </a:ln>
+        </p:spPr>
+        <p:txBody>
+          <a:bodyPr anchorCtr="0" anchor="t" bIns="0" lIns="0" spcFirstLastPara="1" rIns="0" wrap="square" tIns="0">
+            <a:spAutoFit/>
+          </a:bodyPr>
+          <a:lstStyle/>
+          <a:p>
+            <a:pPr indent="0" lvl="0" marL="0" marR="0" rtl="0" algn="l">
+              <a:spcBef>
+                <a:spcPts val="0"/>
+              </a:spcBef>
+              <a:spcAft>
+                <a:spcPts val="0"/>
+              </a:spcAft>
+              <a:buNone/>
+            </a:pPr>
+            <a:r>
+              <a:rPr b="0" i="0" lang="en-US" sz="1050" u="none" cap="none" strike="noStrike">
+                <a:solidFill>
+                  <a:srgbClr val="64748B"/>
+                </a:solidFill>
+                <a:latin typeface="Urbanist"/>
+                <a:ea typeface="Urbanist"/>
+                <a:cs typeface="Urbanist"/>
+                <a:sym typeface="Urbanist"/>
+              </a:rPr>
+              <a:t>Abdullah Al Noman · Tamanna Akter Mou · Aryan Sami · Ridita Afrin Riya · Abrar Mohammed Tanzim Alam</a:t>
+            </a:r>
+            <a:endParaRPr/>
+          </a:p>
+        </p:txBody>
+      </p:sp>
+      <p:pic>
+        <p:nvPicPr>
+          <p:cNvPr descr="image.png" id="379" name="Google Shape;379;p32"/>
+          <p:cNvPicPr preferRelativeResize="0"/>
+          <p:nvPr/>
+        </p:nvPicPr>
+        <p:blipFill rotWithShape="1">
+          <a:blip r:embed="rId4">
+            <a:alphaModFix/>
+          </a:blip>
+          <a:srcRect b="0" l="0" r="0" t="0"/>
+          <a:stretch/>
+        </p:blipFill>
+        <p:spPr>
+          <a:xfrm>
+            <a:off x="1124025" y="257100"/>
+            <a:ext cx="2590800" cy="352425"/>
+          </a:xfrm>
+          <a:prstGeom prst="rect">
+            <a:avLst/>
+          </a:prstGeom>
+          <a:noFill/>
+          <a:ln>
+            <a:noFill/>
+          </a:ln>
+        </p:spPr>
+      </p:pic>
+      <p:sp>
+        <p:nvSpPr>
+          <p:cNvPr id="380" name="Google Shape;380;p32"/>
+          <p:cNvSpPr txBox="1"/>
+          <p:nvPr/>
+        </p:nvSpPr>
+        <p:spPr>
+          <a:xfrm>
+            <a:off x="904875" y="2557462"/>
+            <a:ext cx="4953000" cy="215400"/>
+          </a:xfrm>
+          <a:prstGeom prst="rect">
+            <a:avLst/>
+          </a:prstGeom>
+          <a:noFill/>
+          <a:ln>
+            <a:noFill/>
+          </a:ln>
+        </p:spPr>
+        <p:txBody>
+          <a:bodyPr anchorCtr="0" anchor="t" bIns="0" lIns="0" spcFirstLastPara="1" rIns="0" wrap="square" tIns="0">
+            <a:spAutoFit/>
+          </a:bodyPr>
+          <a:lstStyle/>
+          <a:p>
+            <a:pPr indent="0" lvl="0" marL="0" marR="0" rtl="0" algn="l">
+              <a:lnSpc>
+                <a:spcPct val="160000"/>
+              </a:lnSpc>
+              <a:spcBef>
+                <a:spcPts val="0"/>
+              </a:spcBef>
+              <a:spcAft>
+                <a:spcPts val="0"/>
+              </a:spcAft>
+              <a:buNone/>
+            </a:pPr>
+            <a:r>
+              <a:t/>
+            </a:r>
+            <a:endParaRPr/>
+          </a:p>
+        </p:txBody>
+      </p:sp>
+      <p:pic>
+        <p:nvPicPr>
+          <p:cNvPr descr="image.png" id="381" name="Google Shape;381;p32"/>
+          <p:cNvPicPr preferRelativeResize="0"/>
+          <p:nvPr/>
+        </p:nvPicPr>
+        <p:blipFill rotWithShape="1">
+          <a:blip r:embed="rId3">
+            <a:alphaModFix/>
+          </a:blip>
+          <a:srcRect b="0" l="0" r="0" t="0"/>
+          <a:stretch/>
+        </p:blipFill>
+        <p:spPr>
+          <a:xfrm>
+            <a:off x="571500" y="6257925"/>
+            <a:ext cx="11049000" cy="314325"/>
+          </a:xfrm>
+          <a:prstGeom prst="rect">
+            <a:avLst/>
+          </a:prstGeom>
+          <a:noFill/>
+          <a:ln>
+            <a:noFill/>
+          </a:ln>
+        </p:spPr>
+      </p:pic>
+      <p:sp>
+        <p:nvSpPr>
+          <p:cNvPr id="382" name="Google Shape;382;p32"/>
+          <p:cNvSpPr txBox="1"/>
+          <p:nvPr/>
+        </p:nvSpPr>
+        <p:spPr>
+          <a:xfrm>
+            <a:off x="5114925" y="6410438"/>
+            <a:ext cx="7048500" cy="161700"/>
+          </a:xfrm>
+          <a:prstGeom prst="rect">
+            <a:avLst/>
+          </a:prstGeom>
+          <a:noFill/>
+          <a:ln>
+            <a:noFill/>
+          </a:ln>
+        </p:spPr>
+        <p:txBody>
+          <a:bodyPr anchorCtr="0" anchor="t" bIns="0" lIns="0" spcFirstLastPara="1" rIns="0" wrap="square" tIns="0">
+            <a:spAutoFit/>
+          </a:bodyPr>
+          <a:lstStyle/>
+          <a:p>
+            <a:pPr indent="0" lvl="0" marL="0" marR="0" rtl="0" algn="l">
+              <a:spcBef>
+                <a:spcPts val="0"/>
+              </a:spcBef>
+              <a:spcAft>
+                <a:spcPts val="0"/>
+              </a:spcAft>
+              <a:buNone/>
+            </a:pPr>
+            <a:r>
+              <a:rPr b="0" i="0" lang="en-US" sz="1050" u="none" cap="none" strike="noStrike">
+                <a:solidFill>
+                  <a:srgbClr val="00FF00"/>
+                </a:solidFill>
+                <a:latin typeface="Urbanist"/>
+                <a:ea typeface="Urbanist"/>
+                <a:cs typeface="Urbanist"/>
+                <a:sym typeface="Urbanist"/>
+              </a:rPr>
+              <a:t>Abdullah Al Noman · Tamanna Akter Mou · Aryan Sami · Ridita Afrin Riya · Abrar Mohammed Tanzim Alam</a:t>
+            </a:r>
+            <a:endParaRPr>
+              <a:solidFill>
+                <a:srgbClr val="00FF00"/>
+              </a:solidFill>
+            </a:endParaRPr>
+          </a:p>
+        </p:txBody>
+      </p:sp>
+      <p:sp>
+        <p:nvSpPr>
+          <p:cNvPr id="383" name="Google Shape;383;p32"/>
+          <p:cNvSpPr txBox="1"/>
+          <p:nvPr/>
+        </p:nvSpPr>
+        <p:spPr>
+          <a:xfrm>
+            <a:off x="1196325" y="1711050"/>
+            <a:ext cx="6228900" cy="2678100"/>
+          </a:xfrm>
+          <a:prstGeom prst="rect">
+            <a:avLst/>
+          </a:prstGeom>
+          <a:noFill/>
+          <a:ln>
+            <a:noFill/>
+          </a:ln>
+        </p:spPr>
+        <p:txBody>
+          <a:bodyPr anchorCtr="0" anchor="t" bIns="91425" lIns="91425" spcFirstLastPara="1" rIns="91425" wrap="square" tIns="91425">
+            <a:spAutoFit/>
+          </a:bodyPr>
+          <a:lstStyle/>
+          <a:p>
+            <a:pPr indent="0" lvl="0" marL="0" rtl="0" algn="l">
+              <a:spcBef>
+                <a:spcPts val="0"/>
+              </a:spcBef>
+              <a:spcAft>
+                <a:spcPts val="0"/>
+              </a:spcAft>
+              <a:buNone/>
+            </a:pPr>
+            <a:r>
+              <a:rPr lang="en-US" sz="1800">
+                <a:solidFill>
+                  <a:srgbClr val="6AA84F"/>
+                </a:solidFill>
+              </a:rPr>
+              <a:t>- No GIS Integration — spatial logic not linked to systems like QGIS</a:t>
+            </a:r>
+            <a:endParaRPr sz="1800">
+              <a:solidFill>
+                <a:srgbClr val="6AA84F"/>
+              </a:solidFill>
+            </a:endParaRPr>
+          </a:p>
+          <a:p>
+            <a:pPr indent="0" lvl="0" marL="0" rtl="0" algn="l">
+              <a:spcBef>
+                <a:spcPts val="0"/>
+              </a:spcBef>
+              <a:spcAft>
+                <a:spcPts val="0"/>
+              </a:spcAft>
+              <a:buNone/>
+            </a:pPr>
+            <a:r>
+              <a:rPr lang="en-US" sz="1800">
+                <a:solidFill>
+                  <a:srgbClr val="6AA84F"/>
+                </a:solidFill>
+              </a:rPr>
+              <a:t>- Ungrounded Web Retrieval — depends fully on open web search, no curated knowledge base</a:t>
+            </a:r>
+            <a:endParaRPr sz="1800">
+              <a:solidFill>
+                <a:srgbClr val="6AA84F"/>
+              </a:solidFill>
+            </a:endParaRPr>
+          </a:p>
+          <a:p>
+            <a:pPr indent="0" lvl="0" marL="0" rtl="0" algn="l">
+              <a:spcBef>
+                <a:spcPts val="0"/>
+              </a:spcBef>
+              <a:spcAft>
+                <a:spcPts val="0"/>
+              </a:spcAft>
+              <a:buNone/>
+            </a:pPr>
+            <a:r>
+              <a:rPr lang="en-US" sz="1800">
+                <a:solidFill>
+                  <a:srgbClr val="6AA84F"/>
+                </a:solidFill>
+              </a:rPr>
+              <a:t>- No Structured Validation — no formal ground-truth benchmark, only human-in-the-loop</a:t>
+            </a:r>
+            <a:endParaRPr sz="1800">
+              <a:solidFill>
+                <a:srgbClr val="6AA84F"/>
+              </a:solidFill>
+            </a:endParaRPr>
+          </a:p>
+          <a:p>
+            <a:pPr indent="0" lvl="0" marL="0" rtl="0" algn="l">
+              <a:spcBef>
+                <a:spcPts val="0"/>
+              </a:spcBef>
+              <a:spcAft>
+                <a:spcPts val="0"/>
+              </a:spcAft>
+              <a:buNone/>
+            </a:pPr>
+            <a:r>
+              <a:rPr lang="en-US" sz="1800">
+                <a:solidFill>
+                  <a:srgbClr val="6AA84F"/>
+                </a:solidFill>
+              </a:rPr>
+              <a:t>- Limited to Zero-Shot Reasoning — no fine-tuning explored for disaster-specific tasks</a:t>
+            </a:r>
+            <a:endParaRPr sz="1800">
+              <a:solidFill>
+                <a:srgbClr val="6AA84F"/>
+              </a:solidFill>
+            </a:endParaRPr>
+          </a:p>
+          <a:p>
+            <a:pPr indent="0" lvl="0" marL="0" rtl="0" algn="l">
+              <a:spcBef>
+                <a:spcPts val="0"/>
+              </a:spcBef>
+              <a:spcAft>
+                <a:spcPts val="0"/>
+              </a:spcAft>
+              <a:buNone/>
+            </a:pPr>
+            <a:r>
+              <a:t/>
+            </a:r>
+            <a:endParaRPr sz="1800">
+              <a:solidFill>
+                <a:srgbClr val="6AA84F"/>
+              </a:solidFill>
+            </a:endParaRPr>
+          </a:p>
+        </p:txBody>
+      </p:sp>
+      <p:sp>
+        <p:nvSpPr>
+          <p:cNvPr id="384" name="Google Shape;384;p32"/>
+          <p:cNvSpPr txBox="1"/>
+          <p:nvPr/>
+        </p:nvSpPr>
+        <p:spPr>
+          <a:xfrm>
+            <a:off x="1196325" y="783100"/>
+            <a:ext cx="4370100" cy="554100"/>
+          </a:xfrm>
+          <a:prstGeom prst="rect">
+            <a:avLst/>
+          </a:prstGeom>
+          <a:noFill/>
+          <a:ln>
+            <a:noFill/>
+          </a:ln>
+        </p:spPr>
+        <p:txBody>
+          <a:bodyPr anchorCtr="0" anchor="t" bIns="91425" lIns="91425" spcFirstLastPara="1" rIns="91425" wrap="square" tIns="91425">
+            <a:spAutoFit/>
+          </a:bodyPr>
+          <a:lstStyle/>
+          <a:p>
+            <a:pPr indent="0" lvl="0" marL="0" rtl="0" algn="l">
+              <a:spcBef>
+                <a:spcPts val="0"/>
+              </a:spcBef>
+              <a:spcAft>
+                <a:spcPts val="0"/>
+              </a:spcAft>
+              <a:buNone/>
+            </a:pPr>
+            <a:r>
+              <a:rPr lang="en-US" sz="2400">
+                <a:solidFill>
+                  <a:srgbClr val="00FF00"/>
+                </a:solidFill>
+              </a:rPr>
+              <a:t>Research Gap:</a:t>
+            </a:r>
+            <a:endParaRPr sz="2400">
+              <a:solidFill>
+                <a:srgbClr val="00FF00"/>
+              </a:solidFill>
+            </a:endParaRPr>
+          </a:p>
+        </p:txBody>
+      </p:sp>
+    </p:spTree>
+  </p:cSld>
+  <p:clrMapOvr>
+    <a:masterClrMapping/>
+  </p:clrMapOvr>
+</p:sld>
+</file>
+
+<file path=ppt/slides/slide21.xml><?xml version="1.0" encoding="utf-8"?>
+<p:sld xmlns:a="http://schemas.openxmlformats.org/drawingml/2006/main" xmlns:r="http://schemas.openxmlformats.org/officeDocument/2006/relationships" xmlns:mc="http://schemas.openxmlformats.org/markup-compatibility/2006" xmlns:mv="urn:schemas-microsoft-com:mac:vml" xmlns:p="http://schemas.openxmlformats.org/presentationml/2006/main" xmlns:c="http://schemas.openxmlformats.org/drawingml/2006/chart" xmlns:dgm="http://schemas.openxmlformats.org/drawingml/2006/diagram" xmlns:o="urn:schemas-microsoft-com:office:office" xmlns:v="urn:schemas-microsoft-com:vml" xmlns:pvml="urn:schemas-microsoft-com:office:powerpoint" xmlns:com="http://schemas.openxmlformats.org/drawingml/2006/compatibility" xmlns:p14="http://schemas.microsoft.com/office/powerpoint/2010/main" xmlns:p15="http://schemas.microsoft.com/office/powerpoint/2012/main" xmlns:ahyp="http://schemas.microsoft.com/office/drawing/2018/hyperlinkcolor">
+  <p:cSld>
+    <p:bg>
+      <p:bgPr>
+        <a:solidFill>
+          <a:srgbClr val="1A1A1A"/>
+        </a:solidFill>
+      </p:bgPr>
+    </p:bg>
+    <p:spTree>
+      <p:nvGrpSpPr>
+        <p:cNvPr id="388" name="Shape 388"/>
         <p:cNvGrpSpPr/>
         <p:nvPr/>
       </p:nvGrpSpPr>
@@ -16523,7 +16589,7 @@
       </p:grpSpPr>
       <p:pic>
         <p:nvPicPr>
-          <p:cNvPr descr="image.png" id="385" name="Google Shape;385;p32"/>
+          <p:cNvPr descr="image.png" id="389" name="Google Shape;389;p33"/>
           <p:cNvPicPr preferRelativeResize="0"/>
           <p:nvPr/>
         </p:nvPicPr>
@@ -16550,7 +16616,7 @@
       </p:pic>
       <p:pic>
         <p:nvPicPr>
-          <p:cNvPr descr="image.png" id="386" name="Google Shape;386;p32"/>
+          <p:cNvPr descr="image.png" id="390" name="Google Shape;390;p33"/>
           <p:cNvPicPr preferRelativeResize="0"/>
           <p:nvPr/>
         </p:nvPicPr>
@@ -16577,7 +16643,7 @@
       </p:pic>
       <p:sp>
         <p:nvSpPr>
-          <p:cNvPr id="387" name="Google Shape;387;p32"/>
+          <p:cNvPr id="391" name="Google Shape;391;p33"/>
           <p:cNvSpPr txBox="1"/>
           <p:nvPr/>
         </p:nvSpPr>
@@ -16627,7 +16693,7 @@
       </p:sp>
       <p:sp>
         <p:nvSpPr>
-          <p:cNvPr id="388" name="Google Shape;388;p32"/>
+          <p:cNvPr id="392" name="Google Shape;392;p33"/>
           <p:cNvSpPr/>
           <p:nvPr/>
         </p:nvSpPr>
@@ -16678,7 +16744,7 @@
       </p:sp>
       <p:pic>
         <p:nvPicPr>
-          <p:cNvPr descr="image.png" id="389" name="Google Shape;389;p32"/>
+          <p:cNvPr descr="image.png" id="393" name="Google Shape;393;p33"/>
           <p:cNvPicPr preferRelativeResize="0"/>
           <p:nvPr/>
         </p:nvPicPr>
@@ -16705,7 +16771,7 @@
       </p:pic>
       <p:sp>
         <p:nvSpPr>
-          <p:cNvPr id="390" name="Google Shape;390;p32"/>
+          <p:cNvPr id="394" name="Google Shape;394;p33"/>
           <p:cNvSpPr txBox="1"/>
           <p:nvPr/>
         </p:nvSpPr>
@@ -17063,7 +17129,7 @@
       </p:sp>
       <p:pic>
         <p:nvPicPr>
-          <p:cNvPr descr="image.png" id="391" name="Google Shape;391;p32"/>
+          <p:cNvPr descr="image.png" id="395" name="Google Shape;395;p33"/>
           <p:cNvPicPr preferRelativeResize="0"/>
           <p:nvPr/>
         </p:nvPicPr>
@@ -17090,7 +17156,7 @@
       </p:pic>
       <p:sp>
         <p:nvSpPr>
-          <p:cNvPr id="392" name="Google Shape;392;p32"/>
+          <p:cNvPr id="396" name="Google Shape;396;p33"/>
           <p:cNvSpPr txBox="1"/>
           <p:nvPr/>
         </p:nvSpPr>
@@ -17144,7 +17210,7 @@
       </p:sp>
       <p:sp>
         <p:nvSpPr>
-          <p:cNvPr id="393" name="Google Shape;393;p32"/>
+          <p:cNvPr id="397" name="Google Shape;397;p33"/>
           <p:cNvSpPr txBox="1"/>
           <p:nvPr/>
         </p:nvSpPr>
@@ -17743,15 +17809,10 @@
               <a:spcAft>
                 <a:spcPts val="0"/>
               </a:spcAft>
-              <a:buClr>
-                <a:srgbClr val="E0E4E6"/>
-              </a:buClr>
-              <a:buSzPts val="961"/>
-              <a:buFont typeface="Barlow"/>
-              <a:buNone/>
-            </a:pPr>
-            <a:r>
-              <a:rPr b="0" i="0" lang="en-US" sz="961" u="none" cap="none" strike="noStrike">
+              <a:buNone/>
+            </a:pPr>
+            <a:r>
+              <a:rPr lang="en-US" sz="961">
                 <a:solidFill>
                   <a:srgbClr val="E0E4E6"/>
                 </a:solidFill>
@@ -17760,7 +17821,67 @@
                 <a:cs typeface="Barlow"/>
                 <a:sym typeface="Barlow"/>
               </a:rPr>
-              <a:t>Disaster Scene Recognition, Disaster Type Recognition, Bearing Body Recognition — identifying </a:t>
+              <a:t>1. </a:t>
+            </a:r>
+            <a:r>
+              <a:rPr b="0" i="0" lang="en-US" sz="961" u="none" cap="none" strike="noStrike">
+                <a:solidFill>
+                  <a:srgbClr val="E0E4E6"/>
+                </a:solidFill>
+                <a:latin typeface="Barlow"/>
+                <a:ea typeface="Barlow"/>
+                <a:cs typeface="Barlow"/>
+                <a:sym typeface="Barlow"/>
+              </a:rPr>
+              <a:t>Disaster Scene Recognition, 2</a:t>
+            </a:r>
+            <a:r>
+              <a:rPr lang="en-US" sz="961">
+                <a:solidFill>
+                  <a:srgbClr val="E0E4E6"/>
+                </a:solidFill>
+                <a:latin typeface="Barlow"/>
+                <a:ea typeface="Barlow"/>
+                <a:cs typeface="Barlow"/>
+                <a:sym typeface="Barlow"/>
+              </a:rPr>
+              <a:t>. </a:t>
+            </a:r>
+            <a:r>
+              <a:rPr b="0" i="0" lang="en-US" sz="961" u="none" cap="none" strike="noStrike">
+                <a:solidFill>
+                  <a:srgbClr val="E0E4E6"/>
+                </a:solidFill>
+                <a:latin typeface="Barlow"/>
+                <a:ea typeface="Barlow"/>
+                <a:cs typeface="Barlow"/>
+                <a:sym typeface="Barlow"/>
+              </a:rPr>
+              <a:t>Disaster Type Recognition, 3</a:t>
+            </a:r>
+            <a:r>
+              <a:rPr lang="en-US" sz="961">
+                <a:solidFill>
+                  <a:srgbClr val="E0E4E6"/>
+                </a:solidFill>
+                <a:latin typeface="Barlow"/>
+                <a:ea typeface="Barlow"/>
+                <a:cs typeface="Barlow"/>
+                <a:sym typeface="Barlow"/>
+              </a:rPr>
+              <a:t>. </a:t>
+            </a:r>
+            <a:r>
+              <a:rPr b="0" i="0" lang="en-US" sz="961" u="none" cap="none" strike="noStrike">
+                <a:solidFill>
+                  <a:srgbClr val="E0E4E6"/>
+                </a:solidFill>
+                <a:latin typeface="Barlow"/>
+                <a:ea typeface="Barlow"/>
+                <a:cs typeface="Barlow"/>
+                <a:sym typeface="Barlow"/>
+              </a:rPr>
+              <a:t>Bearing Body Recognition — identifying </a:t>
             </a:r>
             <a:r>
               <a:rPr b="0" i="1" lang="en-US" sz="961" u="none" cap="none" strike="noStrike">
@@ -17958,7 +18079,7 @@
               <a:buNone/>
             </a:pPr>
             <a:r>
-              <a:rPr b="0" i="0" lang="en-US" sz="961" u="none" cap="none" strike="noStrike">
+              <a:rPr lang="en-US" sz="961">
                 <a:solidFill>
                   <a:srgbClr val="E0E4E6"/>
                 </a:solidFill>
@@ -17967,7 +18088,19 @@
                 <a:cs typeface="Barlow"/>
                 <a:sym typeface="Barlow"/>
               </a:rPr>
-              <a:t>Damaged Building Counting, Damaged Road Area Estimation — measuring the </a:t>
+              <a:t>1. </a:t>
+            </a:r>
+            <a:r>
+              <a:rPr b="0" i="0" lang="en-US" sz="961" u="none" cap="none" strike="noStrike">
+                <a:solidFill>
+                  <a:srgbClr val="E0E4E6"/>
+                </a:solidFill>
+                <a:latin typeface="Barlow"/>
+                <a:ea typeface="Barlow"/>
+                <a:cs typeface="Barlow"/>
+                <a:sym typeface="Barlow"/>
+              </a:rPr>
+              <a:t>Damaged Building Counting, 2.  Damaged Road Area Estimation — measuring the </a:t>
             </a:r>
             <a:r>
               <a:rPr b="0" i="1" lang="en-US" sz="961" u="none" cap="none" strike="noStrike">
@@ -18133,13 +18266,20 @@
               <a:spcAft>
                 <a:spcPts val="0"/>
               </a:spcAft>
-              <a:buClr>
-                <a:srgbClr val="E0E4E6"/>
-              </a:buClr>
-              <a:buSzPts val="961"/>
-              <a:buFont typeface="Barlow"/>
-              <a:buNone/>
-            </a:pPr>
+              <a:buNone/>
+            </a:pPr>
+            <a:r>
+              <a:rPr lang="en-US" sz="961">
+                <a:solidFill>
+                  <a:srgbClr val="E0E4E6"/>
+                </a:solidFill>
+                <a:latin typeface="Barlow"/>
+                <a:ea typeface="Barlow"/>
+                <a:cs typeface="Barlow"/>
+                <a:sym typeface="Barlow"/>
+              </a:rPr>
+              <a:t>1. </a:t>
+            </a:r>
             <a:r>
               <a:rPr b="0" i="0" lang="en-US" sz="961" u="none" cap="none" strike="noStrike">
                 <a:solidFill>
@@ -18300,7 +18440,7 @@
               <a:buNone/>
             </a:pPr>
             <a:r>
-              <a:rPr b="0" i="0" lang="en-US" sz="961" u="none" cap="none" strike="noStrike">
+              <a:rPr lang="en-US" sz="961">
                 <a:solidFill>
                   <a:srgbClr val="E0E4E6"/>
                 </a:solidFill>
@@ -18309,7 +18449,43 @@
                 <a:cs typeface="Barlow"/>
                 <a:sym typeface="Barlow"/>
               </a:rPr>
-              <a:t>Disaster Caption + Restoration Advice — generating comprehensive damage summaries and actionable Immediate/Long-term recovery plans aligned with UNITAR/FEMA guidelines.</a:t>
+              <a:t>1. </a:t>
+            </a:r>
+            <a:r>
+              <a:rPr b="0" i="0" lang="en-US" sz="961" u="none" cap="none" strike="noStrike">
+                <a:solidFill>
+                  <a:srgbClr val="E0E4E6"/>
+                </a:solidFill>
+                <a:latin typeface="Barlow"/>
+                <a:ea typeface="Barlow"/>
+                <a:cs typeface="Barlow"/>
+                <a:sym typeface="Barlow"/>
+              </a:rPr>
+              <a:t>Disaster Caption </a:t>
+            </a:r>
+            <a:r>
+              <a:rPr lang="en-US" sz="961">
+                <a:solidFill>
+                  <a:srgbClr val="E0E4E6"/>
+                </a:solidFill>
+                <a:latin typeface="Barlow"/>
+                <a:ea typeface="Barlow"/>
+                <a:cs typeface="Barlow"/>
+                <a:sym typeface="Barlow"/>
+              </a:rPr>
+              <a:t>+ 2. </a:t>
+            </a:r>
+            <a:r>
+              <a:rPr b="0" i="0" lang="en-US" sz="961" u="none" cap="none" strike="noStrike">
+                <a:solidFill>
+                  <a:srgbClr val="E0E4E6"/>
+                </a:solidFill>
+                <a:latin typeface="Barlow"/>
+                <a:ea typeface="Barlow"/>
+                <a:cs typeface="Barlow"/>
+                <a:sym typeface="Barlow"/>
+              </a:rPr>
+              <a:t>Restoration Advice — generating comprehensive damage summaries and actionable Immediate/Long-term recovery plans aligned with UNITAR/FEMA guidelines.</a:t>
             </a:r>
             <a:endParaRPr b="0" i="0" sz="961" u="none" cap="none" strike="noStrike">
               <a:solidFill>
@@ -18458,6 +18634,18 @@
               <a:buFont typeface="Barlow"/>
               <a:buNone/>
             </a:pPr>
+            <a:r>
+              <a:rPr lang="en-US" sz="961">
+                <a:solidFill>
+                  <a:srgbClr val="E0E4E6"/>
+                </a:solidFill>
+                <a:latin typeface="Barlow"/>
+                <a:ea typeface="Barlow"/>
+                <a:cs typeface="Barlow"/>
+                <a:sym typeface="Barlow"/>
+              </a:rPr>
+              <a:t>1. </a:t>
+            </a:r>
             <a:r>
               <a:rPr b="0" i="0" lang="en-US" sz="961" u="none" cap="none" strike="noStrike">
                 <a:solidFill>
@@ -24567,6 +24755,285 @@
 </file>
 
 <file path=ppt/theme/theme1.xml><?xml version="1.0" encoding="utf-8"?>
+<a:theme xmlns:a="http://schemas.openxmlformats.org/drawingml/2006/main" xmlns:r="http://schemas.openxmlformats.org/officeDocument/2006/relationships" name="Simple Dark">
+  <a:themeElements>
+    <a:clrScheme name="Simple Dark">
+      <a:dk1>
+        <a:srgbClr val="FFFFFF"/>
+      </a:dk1>
+      <a:lt1>
+        <a:srgbClr val="212121"/>
+      </a:lt1>
+      <a:dk2>
+        <a:srgbClr val="303030"/>
+      </a:dk2>
+      <a:lt2>
+        <a:srgbClr val="ADADAD"/>
+      </a:lt2>
+      <a:accent1>
+        <a:srgbClr val="009688"/>
+      </a:accent1>
+      <a:accent2>
+        <a:srgbClr val="EEEEEE"/>
+      </a:accent2>
+      <a:accent3>
+        <a:srgbClr val="78909C"/>
+      </a:accent3>
+      <a:accent4>
+        <a:srgbClr val="FFAB40"/>
+      </a:accent4>
+      <a:accent5>
+        <a:srgbClr val="4DD0E1"/>
+      </a:accent5>
+      <a:accent6>
+        <a:srgbClr val="EEFF41"/>
+      </a:accent6>
+      <a:hlink>
+        <a:srgbClr val="4DD0E1"/>
+      </a:hlink>
+      <a:folHlink>
+        <a:srgbClr val="4DD0E1"/>
+      </a:folHlink>
+    </a:clrScheme>
+    <a:fontScheme name="Office">
+      <a:majorFont>
+        <a:latin typeface="Arial"/>
+        <a:ea typeface=""/>
+        <a:cs typeface=""/>
+        <a:font script="Jpan" typeface="ＭＳ Ｐゴシック"/>
+        <a:font script="Hang" typeface="맑은 고딕"/>
+        <a:font script="Hans" typeface="宋体"/>
+        <a:font script="Hant" typeface="新細明體"/>
+        <a:font script="Arab" typeface="Times New Roman"/>
+        <a:font script="Hebr" typeface="Times New Roman"/>
+        <a:font script="Thai" typeface="Angsana New"/>
+        <a:font script="Ethi" typeface="Nyala"/>
+        <a:font script="Beng" typeface="Vrinda"/>
+        <a:font script="Gujr" typeface="Shruti"/>
+        <a:font script="Khmr" typeface="MoolBoran"/>
+        <a:font script="Knda" typeface="Tunga"/>
+        <a:font script="Guru" typeface="Raavi"/>
+        <a:font script="Cans" typeface="Euphemia"/>
+        <a:font script="Cher" typeface="Plantagenet Cherokee"/>
+        <a:font script="Yiii" typeface="Microsoft Yi Baiti"/>
+        <a:font script="Tibt" typeface="Microsoft Himalaya"/>
+        <a:font script="Thaa" typeface="MV Boli"/>
+        <a:font script="Deva" typeface="Mangal"/>
+        <a:font script="Telu" typeface="Gautami"/>
+        <a:font script="Taml" typeface="Latha"/>
+        <a:font script="Syrc" typeface="Estrangelo Edessa"/>
+        <a:font script="Orya" typeface="Kalinga"/>
+        <a:font script="Mlym" typeface="Kartika"/>
+        <a:font script="Laoo" typeface="DokChampa"/>
+        <a:font script="Sinh" typeface="Iskoola Pota"/>
+        <a:font script="Mong" typeface="Mongolian Baiti"/>
+        <a:font script="Viet" typeface="Times New Roman"/>
+        <a:font script="Uigh" typeface="Microsoft Uighur"/>
+        <a:font script="Geor" typeface="Sylfaen"/>
+      </a:majorFont>
+      <a:minorFont>
+        <a:latin typeface="Arial"/>
+        <a:ea typeface=""/>
+        <a:cs typeface=""/>
+        <a:font script="Jpan" typeface="ＭＳ Ｐゴシック"/>
+        <a:font script="Hang" typeface="맑은 고딕"/>
+        <a:font script="Hans" typeface="宋体"/>
+        <a:font script="Hant" typeface="新細明體"/>
+        <a:font script="Arab" typeface="Arial"/>
+        <a:font script="Hebr" typeface="Arial"/>
+        <a:font script="Thai" typeface="Cordia New"/>
+        <a:font script="Ethi" typeface="Nyala"/>
+        <a:font script="Beng" typeface="Vrinda"/>
+        <a:font script="Gujr" typeface="Shruti"/>
+        <a:font script="Khmr" typeface="DaunPenh"/>
+        <a:font script="Knda" typeface="Tunga"/>
+        <a:font script="Guru" typeface="Raavi"/>
+        <a:font script="Cans" typeface="Euphemia"/>
+        <a:font script="Cher" typeface="Plantagenet Cherokee"/>
+        <a:font script="Yiii" typeface="Microsoft Yi Baiti"/>
+        <a:font script="Tibt" typeface="Microsoft Himalaya"/>
+        <a:font script="Thaa" typeface="MV Boli"/>
+        <a:font script="Deva" typeface="Mangal"/>
+        <a:font script="Telu" typeface="Gautami"/>
+        <a:font script="Taml" typeface="Latha"/>
+        <a:font script="Syrc" typeface="Estrangelo Edessa"/>
+        <a:font script="Orya" typeface="Kalinga"/>
+        <a:font script="Mlym" typeface="Kartika"/>
+        <a:font script="Laoo" typeface="DokChampa"/>
+        <a:font script="Sinh" typeface="Iskoola Pota"/>
+        <a:font script="Mong" typeface="Mongolian Baiti"/>
+        <a:font script="Viet" typeface="Arial"/>
+        <a:font script="Uigh" typeface="Microsoft Uighur"/>
+        <a:font script="Geor" typeface="Sylfaen"/>
+      </a:minorFont>
+    </a:fontScheme>
+    <a:fmtScheme name="Office">
+      <a:fillStyleLst>
+        <a:solidFill>
+          <a:schemeClr val="phClr"/>
+        </a:solidFill>
+        <a:gradFill rotWithShape="1">
+          <a:gsLst>
+            <a:gs pos="0">
+              <a:schemeClr val="phClr">
+                <a:tint val="50000"/>
+                <a:satMod val="300000"/>
+              </a:schemeClr>
+            </a:gs>
+            <a:gs pos="35000">
+              <a:schemeClr val="phClr">
+                <a:tint val="37000"/>
+                <a:satMod val="300000"/>
+              </a:schemeClr>
+            </a:gs>
+            <a:gs pos="100000">
+              <a:schemeClr val="phClr">
+                <a:tint val="15000"/>
+                <a:satMod val="350000"/>
+              </a:schemeClr>
+            </a:gs>
+          </a:gsLst>
+          <a:lin ang="16200000" scaled="1"/>
+        </a:gradFill>
+        <a:gradFill rotWithShape="1">
+          <a:gsLst>
+            <a:gs pos="0">
+              <a:schemeClr val="phClr">
+                <a:tint val="100000"/>
+                <a:shade val="100000"/>
+                <a:satMod val="130000"/>
+              </a:schemeClr>
+            </a:gs>
+            <a:gs pos="100000">
+              <a:schemeClr val="phClr">
+                <a:tint val="50000"/>
+                <a:shade val="100000"/>
+                <a:satMod val="350000"/>
+              </a:schemeClr>
+            </a:gs>
+          </a:gsLst>
+          <a:lin ang="16200000" scaled="0"/>
+        </a:gradFill>
+      </a:fillStyleLst>
+      <a:lnStyleLst>
+        <a:ln w="9525" cap="flat" cmpd="sng" algn="ctr">
+          <a:solidFill>
+            <a:schemeClr val="phClr">
+              <a:shade val="95000"/>
+              <a:satMod val="105000"/>
+            </a:schemeClr>
+          </a:solidFill>
+          <a:prstDash val="solid"/>
+        </a:ln>
+        <a:ln w="25400" cap="flat" cmpd="sng" algn="ctr">
+          <a:solidFill>
+            <a:schemeClr val="phClr"/>
+          </a:solidFill>
+          <a:prstDash val="solid"/>
+        </a:ln>
+        <a:ln w="38100" cap="flat" cmpd="sng" algn="ctr">
+          <a:solidFill>
+            <a:schemeClr val="phClr"/>
+          </a:solidFill>
+          <a:prstDash val="solid"/>
+        </a:ln>
+      </a:lnStyleLst>
+      <a:effectStyleLst>
+        <a:effectStyle>
+          <a:effectLst>
+            <a:outerShdw blurRad="40000" dist="20000" dir="5400000" rotWithShape="0">
+              <a:srgbClr val="000000">
+                <a:alpha val="38000"/>
+              </a:srgbClr>
+            </a:outerShdw>
+          </a:effectLst>
+        </a:effectStyle>
+        <a:effectStyle>
+          <a:effectLst>
+            <a:outerShdw blurRad="40000" dist="23000" dir="5400000" rotWithShape="0">
+              <a:srgbClr val="000000">
+                <a:alpha val="35000"/>
+              </a:srgbClr>
+            </a:outerShdw>
+          </a:effectLst>
+        </a:effectStyle>
+        <a:effectStyle>
+          <a:effectLst>
+            <a:outerShdw blurRad="40000" dist="23000" dir="5400000" rotWithShape="0">
+              <a:srgbClr val="000000">
+                <a:alpha val="35000"/>
+              </a:srgbClr>
+            </a:outerShdw>
+          </a:effectLst>
+          <a:scene3d>
+            <a:camera prst="orthographicFront">
+              <a:rot lat="0" lon="0" rev="0"/>
+            </a:camera>
+            <a:lightRig rig="threePt" dir="t">
+              <a:rot lat="0" lon="0" rev="1200000"/>
+            </a:lightRig>
+          </a:scene3d>
+          <a:sp3d>
+            <a:bevelT w="63500" h="25400"/>
+          </a:sp3d>
+        </a:effectStyle>
+      </a:effectStyleLst>
+      <a:bgFillStyleLst>
+        <a:solidFill>
+          <a:schemeClr val="phClr"/>
+        </a:solidFill>
+        <a:gradFill rotWithShape="1">
+          <a:gsLst>
+            <a:gs pos="0">
+              <a:schemeClr val="phClr">
+                <a:tint val="40000"/>
+                <a:satMod val="350000"/>
+              </a:schemeClr>
+            </a:gs>
+            <a:gs pos="40000">
+              <a:schemeClr val="phClr">
+                <a:tint val="45000"/>
+                <a:shade val="99000"/>
+                <a:satMod val="350000"/>
+              </a:schemeClr>
+            </a:gs>
+            <a:gs pos="100000">
+              <a:schemeClr val="phClr">
+                <a:shade val="20000"/>
+                <a:satMod val="255000"/>
+              </a:schemeClr>
+            </a:gs>
+          </a:gsLst>
+          <a:path path="circle">
+            <a:fillToRect l="50000" t="-80000" r="50000" b="180000"/>
+          </a:path>
+        </a:gradFill>
+        <a:gradFill rotWithShape="1">
+          <a:gsLst>
+            <a:gs pos="0">
+              <a:schemeClr val="phClr">
+                <a:tint val="80000"/>
+                <a:satMod val="300000"/>
+              </a:schemeClr>
+            </a:gs>
+            <a:gs pos="100000">
+              <a:schemeClr val="phClr">
+                <a:shade val="30000"/>
+                <a:satMod val="200000"/>
+              </a:schemeClr>
+            </a:gs>
+          </a:gsLst>
+          <a:path path="circle">
+            <a:fillToRect l="50000" t="50000" r="50000" b="50000"/>
+          </a:path>
+        </a:gradFill>
+      </a:bgFillStyleLst>
+    </a:fmtScheme>
+  </a:themeElements>
+</a:theme>
+</file>
+
+<file path=ppt/theme/theme2.xml><?xml version="1.0" encoding="utf-8"?>
 <a:theme xmlns:a="http://schemas.openxmlformats.org/drawingml/2006/main" xmlns:r="http://schemas.openxmlformats.org/officeDocument/2006/relationships">
   <a:themeElements>
     <a:clrScheme name="Default">
@@ -24843,283 +25310,4 @@
     </a:fmtScheme>
   </a:themeElements>
 </a:theme>
-</file>
-
-<file path=ppt/theme/theme2.xml><?xml version="1.0" encoding="utf-8"?>
-<a:theme xmlns:a="http://schemas.openxmlformats.org/drawingml/2006/main" xmlns:r="http://schemas.openxmlformats.org/officeDocument/2006/relationships" name="Simple Dark">
-  <a:themeElements>
-    <a:clrScheme name="Simple Dark">
-      <a:dk1>
-        <a:srgbClr val="FFFFFF"/>
-      </a:dk1>
-      <a:lt1>
-        <a:srgbClr val="212121"/>
-      </a:lt1>
-      <a:dk2>
-        <a:srgbClr val="303030"/>
-      </a:dk2>
-      <a:lt2>
-        <a:srgbClr val="ADADAD"/>
-      </a:lt2>
-      <a:accent1>
-        <a:srgbClr val="009688"/>
-      </a:accent1>
-      <a:accent2>
-        <a:srgbClr val="EEEEEE"/>
-      </a:accent2>
-      <a:accent3>
-        <a:srgbClr val="78909C"/>
-      </a:accent3>
-      <a:accent4>
-        <a:srgbClr val="FFAB40"/>
-      </a:accent4>
-      <a:accent5>
-        <a:srgbClr val="4DD0E1"/>
-      </a:accent5>
-      <a:accent6>
-        <a:srgbClr val="EEFF41"/>
-      </a:accent6>
-      <a:hlink>
-        <a:srgbClr val="4DD0E1"/>
-      </a:hlink>
-      <a:folHlink>
-        <a:srgbClr val="4DD0E1"/>
-      </a:folHlink>
-    </a:clrScheme>
-    <a:fontScheme name="Office">
-      <a:majorFont>
-        <a:latin typeface="Arial"/>
-        <a:ea typeface=""/>
-        <a:cs typeface=""/>
-        <a:font script="Jpan" typeface="ＭＳ Ｐゴシック"/>
-        <a:font script="Hang" typeface="맑은 고딕"/>
-        <a:font script="Hans" typeface="宋体"/>
-        <a:font script="Hant" typeface="新細明體"/>
-        <a:font script="Arab" typeface="Times New Roman"/>
-        <a:font script="Hebr" typeface="Times New Roman"/>
-        <a:font script="Thai" typeface="Angsana New"/>
-        <a:font script="Ethi" typeface="Nyala"/>
-        <a:font script="Beng" typeface="Vrinda"/>
-        <a:font script="Gujr" typeface="Shruti"/>
-        <a:font script="Khmr" typeface="MoolBoran"/>
-        <a:font script="Knda" typeface="Tunga"/>
-        <a:font script="Guru" typeface="Raavi"/>
-        <a:font script="Cans" typeface="Euphemia"/>
-        <a:font script="Cher" typeface="Plantagenet Cherokee"/>
-        <a:font script="Yiii" typeface="Microsoft Yi Baiti"/>
-        <a:font script="Tibt" typeface="Microsoft Himalaya"/>
-        <a:font script="Thaa" typeface="MV Boli"/>
-        <a:font script="Deva" typeface="Mangal"/>
-        <a:font script="Telu" typeface="Gautami"/>
-        <a:font script="Taml" typeface="Latha"/>
-        <a:font script="Syrc" typeface="Estrangelo Edessa"/>
-        <a:font script="Orya" typeface="Kalinga"/>
-        <a:font script="Mlym" typeface="Kartika"/>
-        <a:font script="Laoo" typeface="DokChampa"/>
-        <a:font script="Sinh" typeface="Iskoola Pota"/>
-        <a:font script="Mong" typeface="Mongolian Baiti"/>
-        <a:font script="Viet" typeface="Times New Roman"/>
-        <a:font script="Uigh" typeface="Microsoft Uighur"/>
-        <a:font script="Geor" typeface="Sylfaen"/>
-      </a:majorFont>
-      <a:minorFont>
-        <a:latin typeface="Arial"/>
-        <a:ea typeface=""/>
-        <a:cs typeface=""/>
-        <a:font script="Jpan" typeface="ＭＳ Ｐゴシック"/>
-        <a:font script="Hang" typeface="맑은 고딕"/>
-        <a:font script="Hans" typeface="宋体"/>
-        <a:font script="Hant" typeface="新細明體"/>
-        <a:font script="Arab" typeface="Arial"/>
-        <a:font script="Hebr" typeface="Arial"/>
-        <a:font script="Thai" typeface="Cordia New"/>
-        <a:font script="Ethi" typeface="Nyala"/>
-        <a:font script="Beng" typeface="Vrinda"/>
-        <a:font script="Gujr" typeface="Shruti"/>
-        <a:font script="Khmr" typeface="DaunPenh"/>
-        <a:font script="Knda" typeface="Tunga"/>
-        <a:font script="Guru" typeface="Raavi"/>
-        <a:font script="Cans" typeface="Euphemia"/>
-        <a:font script="Cher" typeface="Plantagenet Cherokee"/>
-        <a:font script="Yiii" typeface="Microsoft Yi Baiti"/>
-        <a:font script="Tibt" typeface="Microsoft Himalaya"/>
-        <a:font script="Thaa" typeface="MV Boli"/>
-        <a:font script="Deva" typeface="Mangal"/>
-        <a:font script="Telu" typeface="Gautami"/>
-        <a:font script="Taml" typeface="Latha"/>
-        <a:font script="Syrc" typeface="Estrangelo Edessa"/>
-        <a:font script="Orya" typeface="Kalinga"/>
-        <a:font script="Mlym" typeface="Kartika"/>
-        <a:font script="Laoo" typeface="DokChampa"/>
-        <a:font script="Sinh" typeface="Iskoola Pota"/>
-        <a:font script="Mong" typeface="Mongolian Baiti"/>
-        <a:font script="Viet" typeface="Arial"/>
-        <a:font script="Uigh" typeface="Microsoft Uighur"/>
-        <a:font script="Geor" typeface="Sylfaen"/>
-      </a:minorFont>
-    </a:fontScheme>
-    <a:fmtScheme name="Office">
-      <a:fillStyleLst>
-        <a:solidFill>
-          <a:schemeClr val="phClr"/>
-        </a:solidFill>
-        <a:gradFill rotWithShape="1">
-          <a:gsLst>
-            <a:gs pos="0">
-              <a:schemeClr val="phClr">
-                <a:tint val="50000"/>
-                <a:satMod val="300000"/>
-              </a:schemeClr>
-            </a:gs>
-            <a:gs pos="35000">
-              <a:schemeClr val="phClr">
-                <a:tint val="37000"/>
-                <a:satMod val="300000"/>
-              </a:schemeClr>
-            </a:gs>
-            <a:gs pos="100000">
-              <a:schemeClr val="phClr">
-                <a:tint val="15000"/>
-                <a:satMod val="350000"/>
-              </a:schemeClr>
-            </a:gs>
-          </a:gsLst>
-          <a:lin ang="16200000" scaled="1"/>
-        </a:gradFill>
-        <a:gradFill rotWithShape="1">
-          <a:gsLst>
-            <a:gs pos="0">
-              <a:schemeClr val="phClr">
-                <a:tint val="100000"/>
-                <a:shade val="100000"/>
-                <a:satMod val="130000"/>
-              </a:schemeClr>
-            </a:gs>
-            <a:gs pos="100000">
-              <a:schemeClr val="phClr">
-                <a:tint val="50000"/>
-                <a:shade val="100000"/>
-                <a:satMod val="350000"/>
-              </a:schemeClr>
-            </a:gs>
-          </a:gsLst>
-          <a:lin ang="16200000" scaled="0"/>
-        </a:gradFill>
-      </a:fillStyleLst>
-      <a:lnStyleLst>
-        <a:ln w="9525" cap="flat" cmpd="sng" algn="ctr">
-          <a:solidFill>
-            <a:schemeClr val="phClr">
-              <a:shade val="95000"/>
-              <a:satMod val="105000"/>
-            </a:schemeClr>
-          </a:solidFill>
-          <a:prstDash val="solid"/>
-        </a:ln>
-        <a:ln w="25400" cap="flat" cmpd="sng" algn="ctr">
-          <a:solidFill>
-            <a:schemeClr val="phClr"/>
-          </a:solidFill>
-          <a:prstDash val="solid"/>
-        </a:ln>
-        <a:ln w="38100" cap="flat" cmpd="sng" algn="ctr">
-          <a:solidFill>
-            <a:schemeClr val="phClr"/>
-          </a:solidFill>
-          <a:prstDash val="solid"/>
-        </a:ln>
-      </a:lnStyleLst>
-      <a:effectStyleLst>
-        <a:effectStyle>
-          <a:effectLst>
-            <a:outerShdw blurRad="40000" dist="20000" dir="5400000" rotWithShape="0">
-              <a:srgbClr val="000000">
-                <a:alpha val="38000"/>
-              </a:srgbClr>
-            </a:outerShdw>
-          </a:effectLst>
-        </a:effectStyle>
-        <a:effectStyle>
-          <a:effectLst>
-            <a:outerShdw blurRad="40000" dist="23000" dir="5400000" rotWithShape="0">
-              <a:srgbClr val="000000">
-                <a:alpha val="35000"/>
-              </a:srgbClr>
-            </a:outerShdw>
-          </a:effectLst>
-        </a:effectStyle>
-        <a:effectStyle>
-          <a:effectLst>
-            <a:outerShdw blurRad="40000" dist="23000" dir="5400000" rotWithShape="0">
-              <a:srgbClr val="000000">
-                <a:alpha val="35000"/>
-              </a:srgbClr>
-            </a:outerShdw>
-          </a:effectLst>
-          <a:scene3d>
-            <a:camera prst="orthographicFront">
-              <a:rot lat="0" lon="0" rev="0"/>
-            </a:camera>
-            <a:lightRig rig="threePt" dir="t">
-              <a:rot lat="0" lon="0" rev="1200000"/>
-            </a:lightRig>
-          </a:scene3d>
-          <a:sp3d>
-            <a:bevelT w="63500" h="25400"/>
-          </a:sp3d>
-        </a:effectStyle>
-      </a:effectStyleLst>
-      <a:bgFillStyleLst>
-        <a:solidFill>
-          <a:schemeClr val="phClr"/>
-        </a:solidFill>
-        <a:gradFill rotWithShape="1">
-          <a:gsLst>
-            <a:gs pos="0">
-              <a:schemeClr val="phClr">
-                <a:tint val="40000"/>
-                <a:satMod val="350000"/>
-              </a:schemeClr>
-            </a:gs>
-            <a:gs pos="40000">
-              <a:schemeClr val="phClr">
-                <a:tint val="45000"/>
-                <a:shade val="99000"/>
-                <a:satMod val="350000"/>
-              </a:schemeClr>
-            </a:gs>
-            <a:gs pos="100000">
-              <a:schemeClr val="phClr">
-                <a:shade val="20000"/>
-                <a:satMod val="255000"/>
-              </a:schemeClr>
-            </a:gs>
-          </a:gsLst>
-          <a:path path="circle">
-            <a:fillToRect l="50000" t="-80000" r="50000" b="180000"/>
-          </a:path>
-        </a:gradFill>
-        <a:gradFill rotWithShape="1">
-          <a:gsLst>
-            <a:gs pos="0">
-              <a:schemeClr val="phClr">
-                <a:tint val="80000"/>
-                <a:satMod val="300000"/>
-              </a:schemeClr>
-            </a:gs>
-            <a:gs pos="100000">
-              <a:schemeClr val="phClr">
-                <a:shade val="30000"/>
-                <a:satMod val="200000"/>
-              </a:schemeClr>
-            </a:gs>
-          </a:gsLst>
-          <a:path path="circle">
-            <a:fillToRect l="50000" t="50000" r="50000" b="50000"/>
-          </a:path>
-        </a:gradFill>
-      </a:bgFillStyleLst>
-    </a:fmtScheme>
-  </a:themeElements>
-</a:theme>
 </file>
--- a/others/Literature Review_ Post-Disaster Rescue Guidance.pptx
+++ b/others/Literature Review_ Post-Disaster Rescue Guidance.pptx
@@ -5,7 +5,7 @@
     <p:sldMasterId id="2147483659" r:id="rId1"/>
   </p:sldMasterIdLst>
   <p:notesMasterIdLst>
-    <p:notesMasterId r:id="rId24"/>
+    <p:notesMasterId r:id="rId25"/>
   </p:notesMasterIdLst>
   <p:sldIdLst>
     <p:sldId id="256" r:id="rId2"/>
@@ -29,42 +29,43 @@
     <p:sldId id="274" r:id="rId20"/>
     <p:sldId id="275" r:id="rId21"/>
     <p:sldId id="276" r:id="rId22"/>
-    <p:sldId id="277" r:id="rId23"/>
+    <p:sldId id="278" r:id="rId23"/>
+    <p:sldId id="277" r:id="rId24"/>
   </p:sldIdLst>
   <p:sldSz cx="12192000" cy="6858000"/>
   <p:notesSz cx="6858000" cy="9144000"/>
   <p:embeddedFontLst>
     <p:embeddedFont>
-      <p:font typeface="Barlow" panose="00000500000000000000" pitchFamily="2" charset="0"/>
-      <p:regular r:id="rId25"/>
-      <p:bold r:id="rId26"/>
-      <p:italic r:id="rId27"/>
-      <p:boldItalic r:id="rId28"/>
+      <p:font typeface="Barlow" pitchFamily="2" charset="77"/>
+      <p:regular r:id="rId26"/>
+      <p:bold r:id="rId27"/>
+      <p:italic r:id="rId28"/>
+      <p:boldItalic r:id="rId29"/>
     </p:embeddedFont>
     <p:embeddedFont>
-      <p:font typeface="Spline Sans" panose="020B0604020202020204" charset="0"/>
-      <p:bold r:id="rId29"/>
+      <p:font typeface="Spline Sans" pitchFamily="2" charset="0"/>
+      <p:bold r:id="rId30"/>
     </p:embeddedFont>
     <p:embeddedFont>
-      <p:font typeface="Urbanist" panose="020B0604020202020204" charset="0"/>
-      <p:regular r:id="rId30"/>
-      <p:bold r:id="rId31"/>
-      <p:italic r:id="rId32"/>
-      <p:boldItalic r:id="rId33"/>
+      <p:font typeface="Urbanist" panose="020B0A04040200000203" pitchFamily="34" charset="77"/>
+      <p:regular r:id="rId31"/>
+      <p:bold r:id="rId32"/>
+      <p:italic r:id="rId33"/>
+      <p:boldItalic r:id="rId34"/>
     </p:embeddedFont>
     <p:embeddedFont>
-      <p:font typeface="Urbanist Medium" panose="020B0604020202020204" charset="0"/>
-      <p:regular r:id="rId34"/>
-      <p:bold r:id="rId35"/>
-      <p:italic r:id="rId36"/>
-      <p:boldItalic r:id="rId37"/>
+      <p:font typeface="Urbanist Medium" panose="020B0A04040200000203" pitchFamily="34" charset="77"/>
+      <p:regular r:id="rId35"/>
+      <p:bold r:id="rId36"/>
+      <p:italic r:id="rId37"/>
+      <p:boldItalic r:id="rId38"/>
     </p:embeddedFont>
     <p:embeddedFont>
-      <p:font typeface="Urbanist SemiBold" panose="020B0604020202020204" charset="0"/>
-      <p:regular r:id="rId38"/>
-      <p:bold r:id="rId39"/>
-      <p:italic r:id="rId40"/>
-      <p:boldItalic r:id="rId41"/>
+      <p:font typeface="Urbanist SemiBold" panose="020B0A04040200000203" pitchFamily="34" charset="77"/>
+      <p:regular r:id="rId39"/>
+      <p:bold r:id="rId40"/>
+      <p:italic r:id="rId41"/>
+      <p:boldItalic r:id="rId42"/>
     </p:embeddedFont>
   </p:embeddedFontLst>
   <p:defaultTextStyle>
@@ -2213,6 +2214,110 @@
 </file>
 
 <file path=ppt/notesSlides/notesSlide22.xml><?xml version="1.0" encoding="utf-8"?>
+<p:notes xmlns:a="http://schemas.openxmlformats.org/drawingml/2006/main" xmlns:r="http://schemas.openxmlformats.org/officeDocument/2006/relationships" xmlns:p="http://schemas.openxmlformats.org/presentationml/2006/main" showMasterSp="0" showMasterPhAnim="0">
+  <p:cSld>
+    <p:spTree>
+      <p:nvGrpSpPr>
+        <p:cNvPr id="1" name="Shape 362"/>
+        <p:cNvGrpSpPr/>
+        <p:nvPr/>
+      </p:nvGrpSpPr>
+      <p:grpSpPr>
+        <a:xfrm>
+          <a:off x="0" y="0"/>
+          <a:ext cx="0" cy="0"/>
+          <a:chOff x="0" y="0"/>
+          <a:chExt cx="0" cy="0"/>
+        </a:xfrm>
+      </p:grpSpPr>
+      <p:sp>
+        <p:nvSpPr>
+          <p:cNvPr id="363" name="Google Shape;363;p15:notes"/>
+          <p:cNvSpPr txBox="1">
+            <a:spLocks noGrp="1"/>
+          </p:cNvSpPr>
+          <p:nvPr>
+            <p:ph type="body" idx="1"/>
+          </p:nvPr>
+        </p:nvSpPr>
+        <p:spPr>
+          <a:xfrm>
+            <a:off x="685800" y="4343400"/>
+            <a:ext cx="5486400" cy="4114800"/>
+          </a:xfrm>
+          <a:prstGeom prst="rect">
+            <a:avLst/>
+          </a:prstGeom>
+        </p:spPr>
+        <p:txBody>
+          <a:bodyPr spcFirstLastPara="1" wrap="square" lIns="91425" tIns="91425" rIns="91425" bIns="91425" anchor="t" anchorCtr="0">
+            <a:noAutofit/>
+          </a:bodyPr>
+          <a:lstStyle/>
+          <a:p>
+            <a:pPr marL="0" lvl="0" indent="0" algn="l" rtl="0">
+              <a:spcBef>
+                <a:spcPts val="0"/>
+              </a:spcBef>
+              <a:spcAft>
+                <a:spcPts val="0"/>
+              </a:spcAft>
+              <a:buNone/>
+            </a:pPr>
+            <a:endParaRPr/>
+          </a:p>
+        </p:txBody>
+      </p:sp>
+      <p:sp>
+        <p:nvSpPr>
+          <p:cNvPr id="364" name="Google Shape;364;p15:notes"/>
+          <p:cNvSpPr>
+            <a:spLocks noGrp="1" noRot="1" noChangeAspect="1"/>
+          </p:cNvSpPr>
+          <p:nvPr>
+            <p:ph type="sldImg" idx="2"/>
+          </p:nvPr>
+        </p:nvSpPr>
+        <p:spPr>
+          <a:xfrm>
+            <a:off x="381000" y="685800"/>
+            <a:ext cx="6096000" cy="3429000"/>
+          </a:xfrm>
+          <a:custGeom>
+            <a:avLst/>
+            <a:gdLst/>
+            <a:ahLst/>
+            <a:cxnLst/>
+            <a:rect l="l" t="t" r="r" b="b"/>
+            <a:pathLst>
+              <a:path w="120000" h="120000" extrusionOk="0">
+                <a:moveTo>
+                  <a:pt x="0" y="0"/>
+                </a:moveTo>
+                <a:lnTo>
+                  <a:pt x="120000" y="0"/>
+                </a:lnTo>
+                <a:lnTo>
+                  <a:pt x="120000" y="120000"/>
+                </a:lnTo>
+                <a:lnTo>
+                  <a:pt x="0" y="120000"/>
+                </a:lnTo>
+                <a:close/>
+              </a:path>
+            </a:pathLst>
+          </a:custGeom>
+        </p:spPr>
+      </p:sp>
+    </p:spTree>
+  </p:cSld>
+  <p:clrMapOvr>
+    <a:masterClrMapping/>
+  </p:clrMapOvr>
+</p:notes>
+</file>
+
+<file path=ppt/notesSlides/notesSlide23.xml><?xml version="1.0" encoding="utf-8"?>
 <p:notes xmlns:a="http://schemas.openxmlformats.org/drawingml/2006/main" xmlns:r="http://schemas.openxmlformats.org/officeDocument/2006/relationships" xmlns:p="http://schemas.openxmlformats.org/presentationml/2006/main" showMasterSp="0" showMasterPhAnim="0">
   <p:cSld>
     <p:spTree>
@@ -16691,6 +16796,480 @@
     </p:bg>
     <p:spTree>
       <p:nvGrpSpPr>
+        <p:cNvPr id="1" name="Shape 365"/>
+        <p:cNvGrpSpPr/>
+        <p:nvPr/>
+      </p:nvGrpSpPr>
+      <p:grpSpPr>
+        <a:xfrm>
+          <a:off x="0" y="0"/>
+          <a:ext cx="0" cy="0"/>
+          <a:chOff x="0" y="0"/>
+          <a:chExt cx="0" cy="0"/>
+        </a:xfrm>
+      </p:grpSpPr>
+      <p:sp>
+        <p:nvSpPr>
+          <p:cNvPr id="367" name="Google Shape;367;p31"/>
+          <p:cNvSpPr txBox="1"/>
+          <p:nvPr/>
+        </p:nvSpPr>
+        <p:spPr>
+          <a:xfrm>
+            <a:off x="571450" y="983675"/>
+            <a:ext cx="4000500" cy="464700"/>
+          </a:xfrm>
+          <a:prstGeom prst="rect">
+            <a:avLst/>
+          </a:prstGeom>
+          <a:noFill/>
+          <a:ln>
+            <a:noFill/>
+          </a:ln>
+        </p:spPr>
+        <p:txBody>
+          <a:bodyPr spcFirstLastPara="1" wrap="square" lIns="0" tIns="0" rIns="0" bIns="0" anchor="t" anchorCtr="0">
+            <a:normAutofit/>
+          </a:bodyPr>
+          <a:lstStyle/>
+          <a:p>
+            <a:pPr marL="0" lvl="0" indent="0" algn="l" rtl="0">
+              <a:spcBef>
+                <a:spcPts val="0"/>
+              </a:spcBef>
+              <a:spcAft>
+                <a:spcPts val="0"/>
+              </a:spcAft>
+              <a:buNone/>
+            </a:pPr>
+            <a:r>
+              <a:rPr lang="en-US" sz="1800" dirty="0">
+                <a:solidFill>
+                  <a:srgbClr val="00FF00"/>
+                </a:solidFill>
+                <a:latin typeface="Urbanist SemiBold"/>
+                <a:ea typeface="Urbanist SemiBold"/>
+                <a:cs typeface="Urbanist SemiBold"/>
+                <a:sym typeface="Urbanist SemiBold"/>
+              </a:rPr>
+              <a:t>References:</a:t>
+            </a:r>
+            <a:endParaRPr sz="1800" dirty="0">
+              <a:solidFill>
+                <a:srgbClr val="00FF00"/>
+              </a:solidFill>
+              <a:latin typeface="Urbanist SemiBold"/>
+              <a:ea typeface="Urbanist SemiBold"/>
+              <a:cs typeface="Urbanist SemiBold"/>
+              <a:sym typeface="Urbanist SemiBold"/>
+            </a:endParaRPr>
+          </a:p>
+        </p:txBody>
+      </p:sp>
+      <p:sp>
+        <p:nvSpPr>
+          <p:cNvPr id="368" name="Google Shape;368;p31"/>
+          <p:cNvSpPr txBox="1"/>
+          <p:nvPr/>
+        </p:nvSpPr>
+        <p:spPr>
+          <a:xfrm flipH="1">
+            <a:off x="571450" y="1496750"/>
+            <a:ext cx="11049000" cy="4612200"/>
+          </a:xfrm>
+          <a:prstGeom prst="rect">
+            <a:avLst/>
+          </a:prstGeom>
+          <a:noFill/>
+          <a:ln w="19050" cap="flat" cmpd="sng">
+            <a:solidFill>
+              <a:srgbClr val="93C47D"/>
+            </a:solidFill>
+            <a:prstDash val="solid"/>
+            <a:round/>
+            <a:headEnd type="none" w="sm" len="sm"/>
+            <a:tailEnd type="none" w="sm" len="sm"/>
+          </a:ln>
+        </p:spPr>
+        <p:txBody>
+          <a:bodyPr spcFirstLastPara="1" wrap="square" lIns="0" tIns="0" rIns="0" bIns="0" anchor="t" anchorCtr="0">
+            <a:noAutofit/>
+          </a:bodyPr>
+          <a:lstStyle/>
+          <a:p>
+            <a:pPr marL="800100" indent="-342900">
+              <a:lnSpc>
+                <a:spcPct val="160000"/>
+              </a:lnSpc>
+              <a:buFont typeface="+mj-lt"/>
+              <a:buAutoNum type="arabicPeriod"/>
+            </a:pPr>
+            <a:r>
+              <a:rPr lang="en-JP" sz="1300" b="1" dirty="0">
+                <a:solidFill>
+                  <a:srgbClr val="00FF00"/>
+                </a:solidFill>
+              </a:rPr>
+              <a:t>From Pixels to Semantics: A Multi-Stage AI Framework for Structural Damage Detection in Satellite Imagery — Shakya, Hoier, Ahmed (Dakota State University), CVPR 2026 Workshops arXiv: </a:t>
+            </a:r>
+            <a:r>
+              <a:rPr lang="en-JP" sz="1300" b="1" dirty="0">
+                <a:solidFill>
+                  <a:srgbClr val="00FF00"/>
+                </a:solidFill>
+                <a:hlinkClick r:id="rId3">
+                  <a:extLst>
+                    <a:ext uri="{A12FA001-AC4F-418D-AE19-62706E023703}">
+                      <ahyp:hlinkClr xmlns:ahyp="http://schemas.microsoft.com/office/drawing/2018/hyperlinkcolor" val="tx"/>
+                    </a:ext>
+                  </a:extLst>
+                </a:hlinkClick>
+              </a:rPr>
+              <a:t>https://arxiv.org/abs/2603.22768</a:t>
+            </a:r>
+            <a:endParaRPr lang="en-JP" sz="1300" b="1" dirty="0">
+              <a:solidFill>
+                <a:srgbClr val="00FF00"/>
+              </a:solidFill>
+            </a:endParaRPr>
+          </a:p>
+          <a:p>
+            <a:pPr marL="800100" indent="-342900">
+              <a:lnSpc>
+                <a:spcPct val="160000"/>
+              </a:lnSpc>
+              <a:buFont typeface="+mj-lt"/>
+              <a:buAutoNum type="arabicPeriod"/>
+            </a:pPr>
+            <a:r>
+              <a:rPr lang="en-JP" sz="1300" b="1" dirty="0">
+                <a:solidFill>
+                  <a:srgbClr val="00FF00"/>
+                </a:solidFill>
+              </a:rPr>
+              <a:t>DisasterM3: A Remote Sensing Vision-Language Dataset for Disaster Damage Assessment and Response — Wang et al., NeurIPS 2025 arXiv: </a:t>
+            </a:r>
+            <a:r>
+              <a:rPr lang="en-JP" sz="1300" b="1" dirty="0">
+                <a:solidFill>
+                  <a:srgbClr val="00FF00"/>
+                </a:solidFill>
+                <a:hlinkClick r:id="rId4">
+                  <a:extLst>
+                    <a:ext uri="{A12FA001-AC4F-418D-AE19-62706E023703}">
+                      <ahyp:hlinkClr xmlns:ahyp="http://schemas.microsoft.com/office/drawing/2018/hyperlinkcolor" val="tx"/>
+                    </a:ext>
+                  </a:extLst>
+                </a:hlinkClick>
+              </a:rPr>
+              <a:t>https://arxiv.org/abs/2505.21089</a:t>
+            </a:r>
+            <a:endParaRPr lang="en-JP" sz="1300" b="1" dirty="0">
+              <a:solidFill>
+                <a:srgbClr val="00FF00"/>
+              </a:solidFill>
+            </a:endParaRPr>
+          </a:p>
+          <a:p>
+            <a:pPr marL="800100" indent="-342900">
+              <a:lnSpc>
+                <a:spcPct val="160000"/>
+              </a:lnSpc>
+              <a:buFont typeface="+mj-lt"/>
+              <a:buAutoNum type="arabicPeriod"/>
+            </a:pPr>
+            <a:r>
+              <a:rPr lang="en-JP" sz="1300" b="1" dirty="0">
+                <a:solidFill>
+                  <a:srgbClr val="00FF00"/>
+                </a:solidFill>
+              </a:rPr>
+              <a:t>FloodNet: A High Resolution Aerial Imagery Dataset for Post Flood Scene Understanding — Rahnemoonfar et al., IEEE Access 2021 arXiv: </a:t>
+            </a:r>
+            <a:r>
+              <a:rPr lang="en-JP" sz="1300" b="1" dirty="0">
+                <a:solidFill>
+                  <a:srgbClr val="00FF00"/>
+                </a:solidFill>
+                <a:hlinkClick r:id="rId5">
+                  <a:extLst>
+                    <a:ext uri="{A12FA001-AC4F-418D-AE19-62706E023703}">
+                      <ahyp:hlinkClr xmlns:ahyp="http://schemas.microsoft.com/office/drawing/2018/hyperlinkcolor" val="tx"/>
+                    </a:ext>
+                  </a:extLst>
+                </a:hlinkClick>
+              </a:rPr>
+              <a:t>https://arxiv.org/abs/2012.02951</a:t>
+            </a:r>
+            <a:r>
+              <a:rPr lang="en-JP" sz="1300" b="1" dirty="0">
+                <a:solidFill>
+                  <a:srgbClr val="00FF00"/>
+                </a:solidFill>
+              </a:rPr>
+              <a:t> (Note: your slide 10 title says “Satellite remote sensing and AI-driven analysis of post-disaster cultural landscape recovery,” but the actual slide content — UAV imagery, Hurricane Harvey, classification/segmentation/VQA tasks — matches FloodNet exactly. It looks like the slide title may have been mislabeled during drafting. Worth double-checking against your original source.)</a:t>
+            </a:r>
+          </a:p>
+          <a:p>
+            <a:pPr marL="800100" indent="-342900">
+              <a:lnSpc>
+                <a:spcPct val="160000"/>
+              </a:lnSpc>
+              <a:buFont typeface="+mj-lt"/>
+              <a:buAutoNum type="arabicPeriod"/>
+            </a:pPr>
+            <a:r>
+              <a:rPr lang="en-JP" sz="1300" b="1" dirty="0">
+                <a:solidFill>
+                  <a:srgbClr val="00FF00"/>
+                </a:solidFill>
+              </a:rPr>
+              <a:t>The Potential of Copernicus Satellites for Disaster Response: Retrieving Building Damage from Sentinel-1 and Sentinel-2 — Dietrich et al., ETH Zurich, 2025 (ISPRS Congress 2026) arXiv: </a:t>
+            </a:r>
+            <a:r>
+              <a:rPr lang="en-JP" sz="1300" b="1" dirty="0">
+                <a:solidFill>
+                  <a:srgbClr val="00FF00"/>
+                </a:solidFill>
+                <a:hlinkClick r:id="rId6">
+                  <a:extLst>
+                    <a:ext uri="{A12FA001-AC4F-418D-AE19-62706E023703}">
+                      <ahyp:hlinkClr xmlns:ahyp="http://schemas.microsoft.com/office/drawing/2018/hyperlinkcolor" val="tx"/>
+                    </a:ext>
+                  </a:extLst>
+                </a:hlinkClick>
+              </a:rPr>
+              <a:t>https://arxiv.org/abs/2511.05461</a:t>
+            </a:r>
+            <a:endParaRPr lang="en-JP" sz="1300" b="1" dirty="0">
+              <a:solidFill>
+                <a:srgbClr val="00FF00"/>
+              </a:solidFill>
+            </a:endParaRPr>
+          </a:p>
+          <a:p>
+            <a:pPr marL="800100" indent="-342900">
+              <a:lnSpc>
+                <a:spcPct val="160000"/>
+              </a:lnSpc>
+              <a:buFont typeface="+mj-lt"/>
+              <a:buAutoNum type="arabicPeriod"/>
+            </a:pPr>
+            <a:r>
+              <a:rPr lang="en-JP" sz="1300" b="1" dirty="0">
+                <a:solidFill>
+                  <a:srgbClr val="00FF00"/>
+                </a:solidFill>
+              </a:rPr>
+              <a:t>Integration of Large Vision Language Models for Efficient Post-disaster Damage Assessment and Reporting (DisasTeller) — Chen et al., Nature Communications 2026 (originally arXiv 2024) Nature Comms: </a:t>
+            </a:r>
+            <a:r>
+              <a:rPr lang="en-JP" sz="1300" b="1" dirty="0">
+                <a:solidFill>
+                  <a:srgbClr val="00FF00"/>
+                </a:solidFill>
+                <a:hlinkClick r:id="rId7">
+                  <a:extLst>
+                    <a:ext uri="{A12FA001-AC4F-418D-AE19-62706E023703}">
+                      <ahyp:hlinkClr xmlns:ahyp="http://schemas.microsoft.com/office/drawing/2018/hyperlinkcolor" val="tx"/>
+                    </a:ext>
+                  </a:extLst>
+                </a:hlinkClick>
+              </a:rPr>
+              <a:t>https://www.nature.com/articles/s41467-025-68216-z</a:t>
+            </a:r>
+            <a:r>
+              <a:rPr lang="en-JP" sz="1300" b="1" dirty="0">
+                <a:solidFill>
+                  <a:srgbClr val="00FF00"/>
+                </a:solidFill>
+              </a:rPr>
+              <a:t> arXiv: </a:t>
+            </a:r>
+            <a:r>
+              <a:rPr lang="en-JP" sz="1300" b="1" dirty="0">
+                <a:solidFill>
+                  <a:srgbClr val="00FF00"/>
+                </a:solidFill>
+                <a:hlinkClick r:id="rId8">
+                  <a:extLst>
+                    <a:ext uri="{A12FA001-AC4F-418D-AE19-62706E023703}">
+                      <ahyp:hlinkClr xmlns:ahyp="http://schemas.microsoft.com/office/drawing/2018/hyperlinkcolor" val="tx"/>
+                    </a:ext>
+                  </a:extLst>
+                </a:hlinkClick>
+              </a:rPr>
+              <a:t>https://arxiv.org/abs/2411.01511</a:t>
+            </a:r>
+            <a:endParaRPr lang="en-JP" sz="1300" b="1" dirty="0">
+              <a:solidFill>
+                <a:srgbClr val="00FF00"/>
+              </a:solidFill>
+            </a:endParaRPr>
+          </a:p>
+        </p:txBody>
+      </p:sp>
+      <p:pic>
+        <p:nvPicPr>
+          <p:cNvPr id="369" name="Google Shape;369;p31" descr="image.png"/>
+          <p:cNvPicPr preferRelativeResize="0"/>
+          <p:nvPr/>
+        </p:nvPicPr>
+        <p:blipFill rotWithShape="1">
+          <a:blip r:embed="rId9">
+            <a:alphaModFix/>
+          </a:blip>
+          <a:srcRect/>
+          <a:stretch/>
+        </p:blipFill>
+        <p:spPr>
+          <a:xfrm>
+            <a:off x="571500" y="6257925"/>
+            <a:ext cx="11049000" cy="314325"/>
+          </a:xfrm>
+          <a:prstGeom prst="rect">
+            <a:avLst/>
+          </a:prstGeom>
+          <a:noFill/>
+          <a:ln>
+            <a:noFill/>
+          </a:ln>
+        </p:spPr>
+      </p:pic>
+      <p:sp>
+        <p:nvSpPr>
+          <p:cNvPr id="370" name="Google Shape;370;p31"/>
+          <p:cNvSpPr txBox="1"/>
+          <p:nvPr/>
+        </p:nvSpPr>
+        <p:spPr>
+          <a:xfrm>
+            <a:off x="571500" y="6410325"/>
+            <a:ext cx="485700" cy="161700"/>
+          </a:xfrm>
+          <a:prstGeom prst="rect">
+            <a:avLst/>
+          </a:prstGeom>
+          <a:noFill/>
+          <a:ln>
+            <a:noFill/>
+          </a:ln>
+        </p:spPr>
+        <p:txBody>
+          <a:bodyPr spcFirstLastPara="1" wrap="square" lIns="0" tIns="0" rIns="0" bIns="0" anchor="t" anchorCtr="0">
+            <a:spAutoFit/>
+          </a:bodyPr>
+          <a:lstStyle/>
+          <a:p>
+            <a:pPr marL="0" marR="0" lvl="0" indent="0" algn="l" rtl="0">
+              <a:spcBef>
+                <a:spcPts val="0"/>
+              </a:spcBef>
+              <a:spcAft>
+                <a:spcPts val="0"/>
+              </a:spcAft>
+              <a:buNone/>
+            </a:pPr>
+            <a:r>
+              <a:rPr lang="en-US" sz="1050" b="0" i="0" u="none" strike="noStrike" cap="none">
+                <a:solidFill>
+                  <a:srgbClr val="00FF00"/>
+                </a:solidFill>
+                <a:latin typeface="Urbanist SemiBold"/>
+                <a:ea typeface="Urbanist SemiBold"/>
+                <a:cs typeface="Urbanist SemiBold"/>
+                <a:sym typeface="Urbanist SemiBold"/>
+              </a:rPr>
+              <a:t>Group 5</a:t>
+            </a:r>
+            <a:endParaRPr>
+              <a:solidFill>
+                <a:srgbClr val="00FF00"/>
+              </a:solidFill>
+            </a:endParaRPr>
+          </a:p>
+        </p:txBody>
+      </p:sp>
+      <p:sp>
+        <p:nvSpPr>
+          <p:cNvPr id="371" name="Google Shape;371;p31"/>
+          <p:cNvSpPr txBox="1"/>
+          <p:nvPr/>
+        </p:nvSpPr>
+        <p:spPr>
+          <a:xfrm>
+            <a:off x="5063350" y="6410313"/>
+            <a:ext cx="7048500" cy="169200"/>
+          </a:xfrm>
+          <a:prstGeom prst="rect">
+            <a:avLst/>
+          </a:prstGeom>
+          <a:noFill/>
+          <a:ln>
+            <a:noFill/>
+          </a:ln>
+        </p:spPr>
+        <p:txBody>
+          <a:bodyPr spcFirstLastPara="1" wrap="square" lIns="0" tIns="0" rIns="0" bIns="0" anchor="t" anchorCtr="0">
+            <a:spAutoFit/>
+          </a:bodyPr>
+          <a:lstStyle/>
+          <a:p>
+            <a:pPr marL="0" marR="0" lvl="0" indent="0" algn="l" rtl="0">
+              <a:spcBef>
+                <a:spcPts val="0"/>
+              </a:spcBef>
+              <a:spcAft>
+                <a:spcPts val="0"/>
+              </a:spcAft>
+              <a:buNone/>
+            </a:pPr>
+            <a:r>
+              <a:rPr lang="en-US" sz="1100" b="0" i="0" u="none" strike="noStrike" cap="none">
+                <a:solidFill>
+                  <a:srgbClr val="00FF00"/>
+                </a:solidFill>
+                <a:latin typeface="Urbanist"/>
+                <a:ea typeface="Urbanist"/>
+                <a:cs typeface="Urbanist"/>
+                <a:sym typeface="Urbanist"/>
+              </a:rPr>
+              <a:t>Abdullah Al Noman · Tamanna Akter Mou · Aryan Sami · Ridita Afrin Riya · Abrar Mohammed Tanzim Alam</a:t>
+            </a:r>
+            <a:endParaRPr sz="1100">
+              <a:solidFill>
+                <a:srgbClr val="00FF00"/>
+              </a:solidFill>
+            </a:endParaRPr>
+          </a:p>
+        </p:txBody>
+      </p:sp>
+    </p:spTree>
+    <p:extLst>
+      <p:ext uri="{BB962C8B-B14F-4D97-AF65-F5344CB8AC3E}">
+        <p14:creationId xmlns:p14="http://schemas.microsoft.com/office/powerpoint/2010/main" val="1864299271"/>
+      </p:ext>
+    </p:extLst>
+  </p:cSld>
+  <p:clrMapOvr>
+    <a:masterClrMapping/>
+  </p:clrMapOvr>
+</p:sld>
+</file>
+
+<file path=ppt/slides/slide23.xml><?xml version="1.0" encoding="utf-8"?>
+<p:sld xmlns:a="http://schemas.openxmlformats.org/drawingml/2006/main" xmlns:r="http://schemas.openxmlformats.org/officeDocument/2006/relationships" xmlns:p="http://schemas.openxmlformats.org/presentationml/2006/main">
+  <p:cSld>
+    <p:bg>
+      <p:bgPr>
+        <a:solidFill>
+          <a:srgbClr val="1A1A1A"/>
+        </a:solidFill>
+        <a:effectLst/>
+      </p:bgPr>
+    </p:bg>
+    <p:spTree>
+      <p:nvGrpSpPr>
         <p:cNvPr id="1" name="Shape 389">
           <a:extLst>
             <a:ext uri="{FF2B5EF4-FFF2-40B4-BE49-F238E27FC236}">
